--- a/assets/figures-editable/c3-c4/c4-e08.pptx
+++ b/assets/figures-editable/c3-c4/c4-e08.pptx
@@ -3104,8 +3104,8 @@
         </p:nvSpPr>
         <p:spPr>
           <a:xfrm>
-            <a:off x="274320" y="137160"/>
-            <a:ext cx="11612880" cy="365760"/>
+            <a:off x="274320" y="118872"/>
+            <a:ext cx="11612880" cy="340105"/>
           </a:xfrm>
           <a:prstGeom prst="rect">
             <a:avLst/>
@@ -3114,7 +3114,7 @@
           <a:effectLst/>
         </p:spPr>
         <p:txBody>
-          <a:bodyPr wrap="square" lIns="27432" rIns="27432" tIns="18288" bIns="18288" anchor="ctr">
+          <a:bodyPr wrap="none" lIns="18288" rIns="18288" tIns="18288" bIns="18288" anchor="t">
             <a:spAutoFit/>
           </a:bodyPr>
           <a:lstStyle/>
@@ -3125,7 +3125,7 @@
               </a:spcAft>
             </a:pPr>
             <a:r>
-              <a:rPr sz="2100" b="0" i="0">
+              <a:rPr sz="1900" b="1" i="0">
                 <a:solidFill>
                   <a:srgbClr val="8EDBD4"/>
                 </a:solidFill>
@@ -3144,13 +3144,13 @@
         </p:nvCxnSpPr>
         <p:spPr>
           <a:xfrm>
-            <a:off x="914400" y="2468880"/>
-            <a:ext cx="8229600" cy="0"/>
+            <a:off x="914400" y="4663440"/>
+            <a:ext cx="5852160" cy="0"/>
           </a:xfrm>
           <a:prstGeom prst="line">
             <a:avLst/>
           </a:prstGeom>
-          <a:ln w="25400">
+          <a:ln w="19050">
             <a:solidFill>
               <a:srgbClr val="B4C7D2"/>
             </a:solidFill>
@@ -3165,16 +3165,16 @@
           <p:nvPr/>
         </p:nvCxnSpPr>
         <p:spPr>
-          <a:xfrm flipV="1">
-            <a:off x="1097280" y="2467682"/>
-            <a:ext cx="96012" cy="1198"/>
+          <a:xfrm>
+            <a:off x="914400" y="1371600"/>
+            <a:ext cx="0" cy="3291840"/>
           </a:xfrm>
           <a:prstGeom prst="line">
             <a:avLst/>
           </a:prstGeom>
-          <a:ln w="25400">
+          <a:ln w="19050">
             <a:solidFill>
-              <a:srgbClr val="8EDBD4"/>
+              <a:srgbClr val="B4C7D2"/>
             </a:solidFill>
           </a:ln>
           <a:effectLst/>
@@ -3187,16 +3187,16 @@
           <p:nvPr/>
         </p:nvCxnSpPr>
         <p:spPr>
-          <a:xfrm flipV="1">
-            <a:off x="1193292" y="2464095"/>
-            <a:ext cx="96012" cy="3587"/>
+          <a:xfrm>
+            <a:off x="914400" y="4663440"/>
+            <a:ext cx="0" cy="64008"/>
           </a:xfrm>
           <a:prstGeom prst="line">
             <a:avLst/>
           </a:prstGeom>
-          <a:ln w="25400">
+          <a:ln w="12700">
             <a:solidFill>
-              <a:srgbClr val="8EDBD4"/>
+              <a:srgbClr val="B4C7D2"/>
             </a:solidFill>
           </a:ln>
           <a:effectLst/>
@@ -3209,43 +3209,61 @@
           <p:nvPr/>
         </p:nvCxnSpPr>
         <p:spPr>
-          <a:xfrm flipV="1">
-            <a:off x="1289304" y="2458142"/>
-            <a:ext cx="96012" cy="5953"/>
+          <a:xfrm>
+            <a:off x="914400" y="1371600"/>
+            <a:ext cx="0" cy="3291840"/>
           </a:xfrm>
           <a:prstGeom prst="line">
             <a:avLst/>
           </a:prstGeom>
-          <a:ln w="25400">
+          <a:ln w="7620">
             <a:solidFill>
-              <a:srgbClr val="8EDBD4"/>
+              <a:srgbClr val="2E4756"/>
             </a:solidFill>
           </a:ln>
           <a:effectLst/>
         </p:spPr>
       </p:cxnSp>
-      <p:cxnSp>
-        <p:nvCxnSpPr>
-          <p:cNvPr id="7" name="C4-E08 line 5" descr="sci-ppt:o005"/>
-          <p:cNvCxnSpPr/>
+      <p:sp>
+        <p:nvSpPr>
+          <p:cNvPr id="7" name="C4-E08 text 5" descr="sci-ppt:o005"/>
+          <p:cNvSpPr txBox="1"/>
           <p:nvPr/>
-        </p:nvCxnSpPr>
+        </p:nvSpPr>
         <p:spPr>
-          <a:xfrm flipV="1">
-            <a:off x="1385316" y="2449859"/>
-            <a:ext cx="96012" cy="8283"/>
+          <a:xfrm>
+            <a:off x="457200" y="4745736"/>
+            <a:ext cx="914400" cy="208407"/>
           </a:xfrm>
-          <a:prstGeom prst="line">
+          <a:prstGeom prst="rect">
             <a:avLst/>
           </a:prstGeom>
-          <a:ln w="25400">
-            <a:solidFill>
-              <a:srgbClr val="8EDBD4"/>
-            </a:solidFill>
-          </a:ln>
+          <a:noFill/>
           <a:effectLst/>
         </p:spPr>
-      </p:cxnSp>
+        <p:txBody>
+          <a:bodyPr wrap="none" lIns="18288" rIns="18288" tIns="18288" bIns="18288" anchor="t">
+            <a:spAutoFit/>
+          </a:bodyPr>
+          <a:lstStyle/>
+          <a:p>
+            <a:pPr algn="ctr">
+              <a:spcAft>
+                <a:spcPts val="0"/>
+              </a:spcAft>
+            </a:pPr>
+            <a:r>
+              <a:rPr sz="1050" b="0" i="0">
+                <a:solidFill>
+                  <a:srgbClr val="B4C7D2"/>
+                </a:solidFill>
+                <a:latin typeface="Arial"/>
+              </a:rPr>
+              <a:t>0</a:t>
+            </a:r>
+          </a:p>
+        </p:txBody>
+      </p:sp>
       <p:cxnSp>
         <p:nvCxnSpPr>
           <p:cNvPr id="8" name="C4-E08 line 6" descr="sci-ppt:o006"/>
@@ -3253,16 +3271,16 @@
           <p:nvPr/>
         </p:nvCxnSpPr>
         <p:spPr>
-          <a:xfrm flipV="1">
-            <a:off x="1481328" y="2439298"/>
-            <a:ext cx="96012" cy="10561"/>
+          <a:xfrm>
+            <a:off x="2377440" y="4663440"/>
+            <a:ext cx="0" cy="64008"/>
           </a:xfrm>
           <a:prstGeom prst="line">
             <a:avLst/>
           </a:prstGeom>
-          <a:ln w="25400">
+          <a:ln w="12700">
             <a:solidFill>
-              <a:srgbClr val="8EDBD4"/>
+              <a:srgbClr val="B4C7D2"/>
             </a:solidFill>
           </a:ln>
           <a:effectLst/>
@@ -3275,43 +3293,61 @@
           <p:nvPr/>
         </p:nvCxnSpPr>
         <p:spPr>
-          <a:xfrm flipV="1">
-            <a:off x="1577340" y="2426522"/>
-            <a:ext cx="96012" cy="12776"/>
+          <a:xfrm>
+            <a:off x="2377440" y="1371600"/>
+            <a:ext cx="0" cy="3291840"/>
           </a:xfrm>
           <a:prstGeom prst="line">
             <a:avLst/>
           </a:prstGeom>
-          <a:ln w="25400">
+          <a:ln w="7620">
             <a:solidFill>
-              <a:srgbClr val="8EDBD4"/>
+              <a:srgbClr val="2E4756"/>
             </a:solidFill>
           </a:ln>
           <a:effectLst/>
         </p:spPr>
       </p:cxnSp>
-      <p:cxnSp>
-        <p:nvCxnSpPr>
-          <p:cNvPr id="10" name="C4-E08 line 8" descr="sci-ppt:o008"/>
-          <p:cNvCxnSpPr/>
+      <p:sp>
+        <p:nvSpPr>
+          <p:cNvPr id="10" name="C4-E08 text 8" descr="sci-ppt:o008"/>
+          <p:cNvSpPr txBox="1"/>
           <p:nvPr/>
-        </p:nvCxnSpPr>
+        </p:nvSpPr>
         <p:spPr>
-          <a:xfrm flipV="1">
-            <a:off x="1673352" y="2411613"/>
-            <a:ext cx="96012" cy="14909"/>
+          <a:xfrm>
+            <a:off x="1920240" y="4745736"/>
+            <a:ext cx="914400" cy="208407"/>
           </a:xfrm>
-          <a:prstGeom prst="line">
+          <a:prstGeom prst="rect">
             <a:avLst/>
           </a:prstGeom>
-          <a:ln w="25400">
-            <a:solidFill>
-              <a:srgbClr val="8EDBD4"/>
-            </a:solidFill>
-          </a:ln>
+          <a:noFill/>
           <a:effectLst/>
         </p:spPr>
-      </p:cxnSp>
+        <p:txBody>
+          <a:bodyPr wrap="none" lIns="18288" rIns="18288" tIns="18288" bIns="18288" anchor="t">
+            <a:spAutoFit/>
+          </a:bodyPr>
+          <a:lstStyle/>
+          <a:p>
+            <a:pPr algn="ctr">
+              <a:spcAft>
+                <a:spcPts val="0"/>
+              </a:spcAft>
+            </a:pPr>
+            <a:r>
+              <a:rPr sz="1050" b="0" i="0">
+                <a:solidFill>
+                  <a:srgbClr val="B4C7D2"/>
+                </a:solidFill>
+                <a:latin typeface="Arial"/>
+              </a:rPr>
+              <a:t>10</a:t>
+            </a:r>
+          </a:p>
+        </p:txBody>
+      </p:sp>
       <p:cxnSp>
         <p:nvCxnSpPr>
           <p:cNvPr id="11" name="C4-E08 line 9" descr="sci-ppt:o009"/>
@@ -3319,16 +3355,16 @@
           <p:nvPr/>
         </p:nvCxnSpPr>
         <p:spPr>
-          <a:xfrm flipV="1">
-            <a:off x="1769364" y="2394660"/>
-            <a:ext cx="96012" cy="16953"/>
+          <a:xfrm>
+            <a:off x="3840480" y="4663440"/>
+            <a:ext cx="0" cy="64008"/>
           </a:xfrm>
           <a:prstGeom prst="line">
             <a:avLst/>
           </a:prstGeom>
-          <a:ln w="25400">
+          <a:ln w="12700">
             <a:solidFill>
-              <a:srgbClr val="8EDBD4"/>
+              <a:srgbClr val="B4C7D2"/>
             </a:solidFill>
           </a:ln>
           <a:effectLst/>
@@ -3341,43 +3377,61 @@
           <p:nvPr/>
         </p:nvCxnSpPr>
         <p:spPr>
-          <a:xfrm flipV="1">
-            <a:off x="1865376" y="2375768"/>
-            <a:ext cx="96012" cy="18892"/>
+          <a:xfrm>
+            <a:off x="3840480" y="1371600"/>
+            <a:ext cx="0" cy="3291840"/>
           </a:xfrm>
           <a:prstGeom prst="line">
             <a:avLst/>
           </a:prstGeom>
-          <a:ln w="25400">
+          <a:ln w="7620">
             <a:solidFill>
-              <a:srgbClr val="8EDBD4"/>
+              <a:srgbClr val="2E4756"/>
             </a:solidFill>
           </a:ln>
           <a:effectLst/>
         </p:spPr>
       </p:cxnSp>
-      <p:cxnSp>
-        <p:nvCxnSpPr>
-          <p:cNvPr id="13" name="C4-E08 line 11" descr="sci-ppt:o011"/>
-          <p:cNvCxnSpPr/>
+      <p:sp>
+        <p:nvSpPr>
+          <p:cNvPr id="13" name="C4-E08 text 11" descr="sci-ppt:o011"/>
+          <p:cNvSpPr txBox="1"/>
           <p:nvPr/>
-        </p:nvCxnSpPr>
+        </p:nvSpPr>
         <p:spPr>
-          <a:xfrm flipV="1">
-            <a:off x="1961388" y="2355055"/>
-            <a:ext cx="96012" cy="20713"/>
+          <a:xfrm>
+            <a:off x="3383280" y="4745736"/>
+            <a:ext cx="914400" cy="208407"/>
           </a:xfrm>
-          <a:prstGeom prst="line">
+          <a:prstGeom prst="rect">
             <a:avLst/>
           </a:prstGeom>
-          <a:ln w="25400">
-            <a:solidFill>
-              <a:srgbClr val="8EDBD4"/>
-            </a:solidFill>
-          </a:ln>
+          <a:noFill/>
           <a:effectLst/>
         </p:spPr>
-      </p:cxnSp>
+        <p:txBody>
+          <a:bodyPr wrap="none" lIns="18288" rIns="18288" tIns="18288" bIns="18288" anchor="t">
+            <a:spAutoFit/>
+          </a:bodyPr>
+          <a:lstStyle/>
+          <a:p>
+            <a:pPr algn="ctr">
+              <a:spcAft>
+                <a:spcPts val="0"/>
+              </a:spcAft>
+            </a:pPr>
+            <a:r>
+              <a:rPr sz="1050" b="0" i="0">
+                <a:solidFill>
+                  <a:srgbClr val="B4C7D2"/>
+                </a:solidFill>
+                <a:latin typeface="Arial"/>
+              </a:rPr>
+              <a:t>20</a:t>
+            </a:r>
+          </a:p>
+        </p:txBody>
+      </p:sp>
       <p:cxnSp>
         <p:nvCxnSpPr>
           <p:cNvPr id="14" name="C4-E08 line 12" descr="sci-ppt:o012"/>
@@ -3385,16 +3439,16 @@
           <p:nvPr/>
         </p:nvCxnSpPr>
         <p:spPr>
-          <a:xfrm flipV="1">
-            <a:off x="2057400" y="2332648"/>
-            <a:ext cx="96012" cy="22407"/>
+          <a:xfrm>
+            <a:off x="5303520" y="4663440"/>
+            <a:ext cx="0" cy="64008"/>
           </a:xfrm>
           <a:prstGeom prst="line">
             <a:avLst/>
           </a:prstGeom>
-          <a:ln w="25400">
+          <a:ln w="12700">
             <a:solidFill>
-              <a:srgbClr val="8EDBD4"/>
+              <a:srgbClr val="B4C7D2"/>
             </a:solidFill>
           </a:ln>
           <a:effectLst/>
@@ -3407,43 +3461,61 @@
           <p:nvPr/>
         </p:nvCxnSpPr>
         <p:spPr>
-          <a:xfrm flipV="1">
-            <a:off x="2153412" y="2308685"/>
-            <a:ext cx="96012" cy="23963"/>
+          <a:xfrm>
+            <a:off x="5303520" y="1371600"/>
+            <a:ext cx="0" cy="3291840"/>
           </a:xfrm>
           <a:prstGeom prst="line">
             <a:avLst/>
           </a:prstGeom>
-          <a:ln w="25400">
+          <a:ln w="7620">
             <a:solidFill>
-              <a:srgbClr val="8EDBD4"/>
+              <a:srgbClr val="2E4756"/>
             </a:solidFill>
           </a:ln>
           <a:effectLst/>
         </p:spPr>
       </p:cxnSp>
-      <p:cxnSp>
-        <p:nvCxnSpPr>
-          <p:cNvPr id="16" name="C4-E08 line 14" descr="sci-ppt:o014"/>
-          <p:cNvCxnSpPr/>
+      <p:sp>
+        <p:nvSpPr>
+          <p:cNvPr id="16" name="C4-E08 text 14" descr="sci-ppt:o014"/>
+          <p:cNvSpPr txBox="1"/>
           <p:nvPr/>
-        </p:nvCxnSpPr>
+        </p:nvSpPr>
         <p:spPr>
-          <a:xfrm flipV="1">
-            <a:off x="2249424" y="2283313"/>
-            <a:ext cx="96012" cy="25372"/>
+          <a:xfrm>
+            <a:off x="4846320" y="4745736"/>
+            <a:ext cx="914400" cy="208407"/>
           </a:xfrm>
-          <a:prstGeom prst="line">
+          <a:prstGeom prst="rect">
             <a:avLst/>
           </a:prstGeom>
-          <a:ln w="25400">
-            <a:solidFill>
-              <a:srgbClr val="8EDBD4"/>
-            </a:solidFill>
-          </a:ln>
+          <a:noFill/>
           <a:effectLst/>
         </p:spPr>
-      </p:cxnSp>
+        <p:txBody>
+          <a:bodyPr wrap="none" lIns="18288" rIns="18288" tIns="18288" bIns="18288" anchor="t">
+            <a:spAutoFit/>
+          </a:bodyPr>
+          <a:lstStyle/>
+          <a:p>
+            <a:pPr algn="ctr">
+              <a:spcAft>
+                <a:spcPts val="0"/>
+              </a:spcAft>
+            </a:pPr>
+            <a:r>
+              <a:rPr sz="1050" b="0" i="0">
+                <a:solidFill>
+                  <a:srgbClr val="B4C7D2"/>
+                </a:solidFill>
+                <a:latin typeface="Arial"/>
+              </a:rPr>
+              <a:t>30</a:t>
+            </a:r>
+          </a:p>
+        </p:txBody>
+      </p:sp>
       <p:cxnSp>
         <p:nvCxnSpPr>
           <p:cNvPr id="17" name="C4-E08 line 15" descr="sci-ppt:o015"/>
@@ -3451,16 +3523,16 @@
           <p:nvPr/>
         </p:nvCxnSpPr>
         <p:spPr>
-          <a:xfrm flipV="1">
-            <a:off x="2345436" y="2256689"/>
-            <a:ext cx="96012" cy="26624"/>
+          <a:xfrm>
+            <a:off x="6766560" y="4663440"/>
+            <a:ext cx="0" cy="64008"/>
           </a:xfrm>
           <a:prstGeom prst="line">
             <a:avLst/>
           </a:prstGeom>
-          <a:ln w="25400">
+          <a:ln w="12700">
             <a:solidFill>
-              <a:srgbClr val="8EDBD4"/>
+              <a:srgbClr val="B4C7D2"/>
             </a:solidFill>
           </a:ln>
           <a:effectLst/>
@@ -3473,43 +3545,61 @@
           <p:nvPr/>
         </p:nvCxnSpPr>
         <p:spPr>
-          <a:xfrm flipV="1">
-            <a:off x="2441448" y="2228978"/>
-            <a:ext cx="96012" cy="27711"/>
+          <a:xfrm>
+            <a:off x="6766560" y="1371600"/>
+            <a:ext cx="0" cy="3291840"/>
           </a:xfrm>
           <a:prstGeom prst="line">
             <a:avLst/>
           </a:prstGeom>
-          <a:ln w="25400">
+          <a:ln w="7620">
             <a:solidFill>
-              <a:srgbClr val="8EDBD4"/>
+              <a:srgbClr val="2E4756"/>
             </a:solidFill>
           </a:ln>
           <a:effectLst/>
         </p:spPr>
       </p:cxnSp>
-      <p:cxnSp>
-        <p:nvCxnSpPr>
-          <p:cNvPr id="19" name="C4-E08 line 17" descr="sci-ppt:o017"/>
-          <p:cNvCxnSpPr/>
+      <p:sp>
+        <p:nvSpPr>
+          <p:cNvPr id="19" name="C4-E08 text 17" descr="sci-ppt:o017"/>
+          <p:cNvSpPr txBox="1"/>
           <p:nvPr/>
-        </p:nvCxnSpPr>
+        </p:nvSpPr>
         <p:spPr>
-          <a:xfrm flipV="1">
-            <a:off x="2537460" y="2200350"/>
-            <a:ext cx="96012" cy="28628"/>
+          <a:xfrm>
+            <a:off x="6309360" y="4745736"/>
+            <a:ext cx="914400" cy="208407"/>
           </a:xfrm>
-          <a:prstGeom prst="line">
+          <a:prstGeom prst="rect">
             <a:avLst/>
           </a:prstGeom>
-          <a:ln w="25400">
-            <a:solidFill>
-              <a:srgbClr val="8EDBD4"/>
-            </a:solidFill>
-          </a:ln>
+          <a:noFill/>
           <a:effectLst/>
         </p:spPr>
-      </p:cxnSp>
+        <p:txBody>
+          <a:bodyPr wrap="none" lIns="18288" rIns="18288" tIns="18288" bIns="18288" anchor="t">
+            <a:spAutoFit/>
+          </a:bodyPr>
+          <a:lstStyle/>
+          <a:p>
+            <a:pPr algn="ctr">
+              <a:spcAft>
+                <a:spcPts val="0"/>
+              </a:spcAft>
+            </a:pPr>
+            <a:r>
+              <a:rPr sz="1050" b="0" i="0">
+                <a:solidFill>
+                  <a:srgbClr val="B4C7D2"/>
+                </a:solidFill>
+                <a:latin typeface="Arial"/>
+              </a:rPr>
+              <a:t>40</a:t>
+            </a:r>
+          </a:p>
+        </p:txBody>
+      </p:sp>
       <p:cxnSp>
         <p:nvCxnSpPr>
           <p:cNvPr id="20" name="C4-E08 line 18" descr="sci-ppt:o018"/>
@@ -3517,16 +3607,16 @@
           <p:nvPr/>
         </p:nvCxnSpPr>
         <p:spPr>
-          <a:xfrm flipV="1">
-            <a:off x="2633472" y="2170981"/>
-            <a:ext cx="96012" cy="29369"/>
+          <a:xfrm>
+            <a:off x="850392" y="4663440"/>
+            <a:ext cx="64008" cy="0"/>
           </a:xfrm>
           <a:prstGeom prst="line">
             <a:avLst/>
           </a:prstGeom>
-          <a:ln w="25400">
+          <a:ln w="12700">
             <a:solidFill>
-              <a:srgbClr val="8EDBD4"/>
+              <a:srgbClr val="B4C7D2"/>
             </a:solidFill>
           </a:ln>
           <a:effectLst/>
@@ -3539,16 +3629,16 @@
           <p:nvPr/>
         </p:nvCxnSpPr>
         <p:spPr>
-          <a:xfrm flipV="1">
-            <a:off x="2729484" y="2141053"/>
-            <a:ext cx="96012" cy="29928"/>
+          <a:xfrm>
+            <a:off x="850392" y="3291839"/>
+            <a:ext cx="64008" cy="0"/>
           </a:xfrm>
           <a:prstGeom prst="line">
             <a:avLst/>
           </a:prstGeom>
-          <a:ln w="25400">
+          <a:ln w="12700">
             <a:solidFill>
-              <a:srgbClr val="8EDBD4"/>
+              <a:srgbClr val="B4C7D2"/>
             </a:solidFill>
           </a:ln>
           <a:effectLst/>
@@ -3561,43 +3651,61 @@
           <p:nvPr/>
         </p:nvCxnSpPr>
         <p:spPr>
-          <a:xfrm flipV="1">
-            <a:off x="2825496" y="2110750"/>
-            <a:ext cx="96012" cy="30303"/>
+          <a:xfrm>
+            <a:off x="914400" y="3291839"/>
+            <a:ext cx="5852160" cy="0"/>
           </a:xfrm>
           <a:prstGeom prst="line">
             <a:avLst/>
           </a:prstGeom>
-          <a:ln w="25400">
+          <a:ln w="7620">
             <a:solidFill>
-              <a:srgbClr val="8EDBD4"/>
+              <a:srgbClr val="2E4756"/>
             </a:solidFill>
           </a:ln>
           <a:effectLst/>
         </p:spPr>
       </p:cxnSp>
-      <p:cxnSp>
-        <p:nvCxnSpPr>
-          <p:cNvPr id="23" name="C4-E08 line 21" descr="sci-ppt:o021"/>
-          <p:cNvCxnSpPr/>
+      <p:sp>
+        <p:nvSpPr>
+          <p:cNvPr id="23" name="C4-E08 text 21" descr="sci-ppt:o021"/>
+          <p:cNvSpPr txBox="1"/>
           <p:nvPr/>
-        </p:nvCxnSpPr>
+        </p:nvSpPr>
         <p:spPr>
-          <a:xfrm flipV="1">
-            <a:off x="2921508" y="2080260"/>
-            <a:ext cx="96012" cy="30490"/>
+          <a:xfrm>
+            <a:off x="45720" y="3209544"/>
+            <a:ext cx="777240" cy="208407"/>
           </a:xfrm>
-          <a:prstGeom prst="line">
+          <a:prstGeom prst="rect">
             <a:avLst/>
           </a:prstGeom>
-          <a:ln w="25400">
-            <a:solidFill>
-              <a:srgbClr val="8EDBD4"/>
-            </a:solidFill>
-          </a:ln>
+          <a:noFill/>
           <a:effectLst/>
         </p:spPr>
-      </p:cxnSp>
+        <p:txBody>
+          <a:bodyPr wrap="none" lIns="18288" rIns="18288" tIns="18288" bIns="18288" anchor="t">
+            <a:spAutoFit/>
+          </a:bodyPr>
+          <a:lstStyle/>
+          <a:p>
+            <a:pPr algn="r">
+              <a:spcAft>
+                <a:spcPts val="0"/>
+              </a:spcAft>
+            </a:pPr>
+            <a:r>
+              <a:rPr sz="1050" b="0" i="0">
+                <a:solidFill>
+                  <a:srgbClr val="B4C7D2"/>
+                </a:solidFill>
+                <a:latin typeface="Arial"/>
+              </a:rPr>
+              <a:t>0.5</a:t>
+            </a:r>
+          </a:p>
+        </p:txBody>
+      </p:sp>
       <p:cxnSp>
         <p:nvCxnSpPr>
           <p:cNvPr id="24" name="C4-E08 line 22" descr="sci-ppt:o022"/>
@@ -3605,16 +3713,16 @@
           <p:nvPr/>
         </p:nvCxnSpPr>
         <p:spPr>
-          <a:xfrm flipV="1">
-            <a:off x="3017520" y="2049769"/>
-            <a:ext cx="96012" cy="30491"/>
+          <a:xfrm>
+            <a:off x="850392" y="1920239"/>
+            <a:ext cx="64008" cy="0"/>
           </a:xfrm>
           <a:prstGeom prst="line">
             <a:avLst/>
           </a:prstGeom>
-          <a:ln w="25400">
+          <a:ln w="12700">
             <a:solidFill>
-              <a:srgbClr val="8EDBD4"/>
+              <a:srgbClr val="B4C7D2"/>
             </a:solidFill>
           </a:ln>
           <a:effectLst/>
@@ -3627,1467 +3735,31 @@
           <p:nvPr/>
         </p:nvCxnSpPr>
         <p:spPr>
-          <a:xfrm flipV="1">
-            <a:off x="3113532" y="2019466"/>
-            <a:ext cx="96012" cy="30303"/>
+          <a:xfrm>
+            <a:off x="914400" y="1920239"/>
+            <a:ext cx="5852160" cy="0"/>
           </a:xfrm>
           <a:prstGeom prst="line">
             <a:avLst/>
           </a:prstGeom>
-          <a:ln w="25400">
+          <a:ln w="7620">
             <a:solidFill>
-              <a:srgbClr val="8EDBD4"/>
+              <a:srgbClr val="2E4756"/>
             </a:solidFill>
           </a:ln>
           <a:effectLst/>
         </p:spPr>
       </p:cxnSp>
-      <p:cxnSp>
-        <p:nvCxnSpPr>
-          <p:cNvPr id="26" name="C4-E08 line 24" descr="sci-ppt:o024"/>
-          <p:cNvCxnSpPr/>
+      <p:sp>
+        <p:nvSpPr>
+          <p:cNvPr id="26" name="C4-E08 text 24" descr="sci-ppt:o024"/>
+          <p:cNvSpPr txBox="1"/>
           <p:nvPr/>
-        </p:nvCxnSpPr>
-        <p:spPr>
-          <a:xfrm flipV="1">
-            <a:off x="3209544" y="1989538"/>
-            <a:ext cx="96012" cy="29928"/>
-          </a:xfrm>
-          <a:prstGeom prst="line">
-            <a:avLst/>
-          </a:prstGeom>
-          <a:ln w="25400">
-            <a:solidFill>
-              <a:srgbClr val="8EDBD4"/>
-            </a:solidFill>
-          </a:ln>
-          <a:effectLst/>
-        </p:spPr>
-      </p:cxnSp>
-      <p:cxnSp>
-        <p:nvCxnSpPr>
-          <p:cNvPr id="27" name="C4-E08 line 25" descr="sci-ppt:o025"/>
-          <p:cNvCxnSpPr/>
-          <p:nvPr/>
-        </p:nvCxnSpPr>
-        <p:spPr>
-          <a:xfrm flipV="1">
-            <a:off x="3305556" y="1960169"/>
-            <a:ext cx="96012" cy="29369"/>
-          </a:xfrm>
-          <a:prstGeom prst="line">
-            <a:avLst/>
-          </a:prstGeom>
-          <a:ln w="25400">
-            <a:solidFill>
-              <a:srgbClr val="8EDBD4"/>
-            </a:solidFill>
-          </a:ln>
-          <a:effectLst/>
-        </p:spPr>
-      </p:cxnSp>
-      <p:cxnSp>
-        <p:nvCxnSpPr>
-          <p:cNvPr id="28" name="C4-E08 line 26" descr="sci-ppt:o026"/>
-          <p:cNvCxnSpPr/>
-          <p:nvPr/>
-        </p:nvCxnSpPr>
-        <p:spPr>
-          <a:xfrm flipV="1">
-            <a:off x="3401568" y="1931541"/>
-            <a:ext cx="96012" cy="28628"/>
-          </a:xfrm>
-          <a:prstGeom prst="line">
-            <a:avLst/>
-          </a:prstGeom>
-          <a:ln w="25400">
-            <a:solidFill>
-              <a:srgbClr val="8EDBD4"/>
-            </a:solidFill>
-          </a:ln>
-          <a:effectLst/>
-        </p:spPr>
-      </p:cxnSp>
-      <p:cxnSp>
-        <p:nvCxnSpPr>
-          <p:cNvPr id="29" name="C4-E08 line 27" descr="sci-ppt:o027"/>
-          <p:cNvCxnSpPr/>
-          <p:nvPr/>
-        </p:nvCxnSpPr>
-        <p:spPr>
-          <a:xfrm flipV="1">
-            <a:off x="3497580" y="1903830"/>
-            <a:ext cx="96011" cy="27711"/>
-          </a:xfrm>
-          <a:prstGeom prst="line">
-            <a:avLst/>
-          </a:prstGeom>
-          <a:ln w="25400">
-            <a:solidFill>
-              <a:srgbClr val="8EDBD4"/>
-            </a:solidFill>
-          </a:ln>
-          <a:effectLst/>
-        </p:spPr>
-      </p:cxnSp>
-      <p:cxnSp>
-        <p:nvCxnSpPr>
-          <p:cNvPr id="30" name="C4-E08 line 28" descr="sci-ppt:o028"/>
-          <p:cNvCxnSpPr/>
-          <p:nvPr/>
-        </p:nvCxnSpPr>
-        <p:spPr>
-          <a:xfrm flipV="1">
-            <a:off x="3593591" y="1877206"/>
-            <a:ext cx="96013" cy="26624"/>
-          </a:xfrm>
-          <a:prstGeom prst="line">
-            <a:avLst/>
-          </a:prstGeom>
-          <a:ln w="25400">
-            <a:solidFill>
-              <a:srgbClr val="8EDBD4"/>
-            </a:solidFill>
-          </a:ln>
-          <a:effectLst/>
-        </p:spPr>
-      </p:cxnSp>
-      <p:cxnSp>
-        <p:nvCxnSpPr>
-          <p:cNvPr id="31" name="C4-E08 line 29" descr="sci-ppt:o029"/>
-          <p:cNvCxnSpPr/>
-          <p:nvPr/>
-        </p:nvCxnSpPr>
-        <p:spPr>
-          <a:xfrm flipV="1">
-            <a:off x="3689604" y="1851834"/>
-            <a:ext cx="96011" cy="25372"/>
-          </a:xfrm>
-          <a:prstGeom prst="line">
-            <a:avLst/>
-          </a:prstGeom>
-          <a:ln w="25400">
-            <a:solidFill>
-              <a:srgbClr val="8EDBD4"/>
-            </a:solidFill>
-          </a:ln>
-          <a:effectLst/>
-        </p:spPr>
-      </p:cxnSp>
-      <p:cxnSp>
-        <p:nvCxnSpPr>
-          <p:cNvPr id="32" name="C4-E08 line 30" descr="sci-ppt:o030"/>
-          <p:cNvCxnSpPr/>
-          <p:nvPr/>
-        </p:nvCxnSpPr>
-        <p:spPr>
-          <a:xfrm flipV="1">
-            <a:off x="3785615" y="1827871"/>
-            <a:ext cx="96013" cy="23963"/>
-          </a:xfrm>
-          <a:prstGeom prst="line">
-            <a:avLst/>
-          </a:prstGeom>
-          <a:ln w="25400">
-            <a:solidFill>
-              <a:srgbClr val="8EDBD4"/>
-            </a:solidFill>
-          </a:ln>
-          <a:effectLst/>
-        </p:spPr>
-      </p:cxnSp>
-      <p:cxnSp>
-        <p:nvCxnSpPr>
-          <p:cNvPr id="33" name="C4-E08 line 31" descr="sci-ppt:o031"/>
-          <p:cNvCxnSpPr/>
-          <p:nvPr/>
-        </p:nvCxnSpPr>
-        <p:spPr>
-          <a:xfrm flipV="1">
-            <a:off x="3881628" y="1805464"/>
-            <a:ext cx="96011" cy="22407"/>
-          </a:xfrm>
-          <a:prstGeom prst="line">
-            <a:avLst/>
-          </a:prstGeom>
-          <a:ln w="25400">
-            <a:solidFill>
-              <a:srgbClr val="8EDBD4"/>
-            </a:solidFill>
-          </a:ln>
-          <a:effectLst/>
-        </p:spPr>
-      </p:cxnSp>
-      <p:cxnSp>
-        <p:nvCxnSpPr>
-          <p:cNvPr id="34" name="C4-E08 line 32" descr="sci-ppt:o032"/>
-          <p:cNvCxnSpPr/>
-          <p:nvPr/>
-        </p:nvCxnSpPr>
-        <p:spPr>
-          <a:xfrm flipV="1">
-            <a:off x="3977639" y="1784751"/>
-            <a:ext cx="96013" cy="20713"/>
-          </a:xfrm>
-          <a:prstGeom prst="line">
-            <a:avLst/>
-          </a:prstGeom>
-          <a:ln w="25400">
-            <a:solidFill>
-              <a:srgbClr val="8EDBD4"/>
-            </a:solidFill>
-          </a:ln>
-          <a:effectLst/>
-        </p:spPr>
-      </p:cxnSp>
-      <p:cxnSp>
-        <p:nvCxnSpPr>
-          <p:cNvPr id="35" name="C4-E08 line 33" descr="sci-ppt:o033"/>
-          <p:cNvCxnSpPr/>
-          <p:nvPr/>
-        </p:nvCxnSpPr>
-        <p:spPr>
-          <a:xfrm flipV="1">
-            <a:off x="4073652" y="1765859"/>
-            <a:ext cx="96011" cy="18892"/>
-          </a:xfrm>
-          <a:prstGeom prst="line">
-            <a:avLst/>
-          </a:prstGeom>
-          <a:ln w="25400">
-            <a:solidFill>
-              <a:srgbClr val="8EDBD4"/>
-            </a:solidFill>
-          </a:ln>
-          <a:effectLst/>
-        </p:spPr>
-      </p:cxnSp>
-      <p:cxnSp>
-        <p:nvCxnSpPr>
-          <p:cNvPr id="36" name="C4-E08 line 34" descr="sci-ppt:o034"/>
-          <p:cNvCxnSpPr/>
-          <p:nvPr/>
-        </p:nvCxnSpPr>
-        <p:spPr>
-          <a:xfrm flipV="1">
-            <a:off x="4169663" y="1748906"/>
-            <a:ext cx="96013" cy="16953"/>
-          </a:xfrm>
-          <a:prstGeom prst="line">
-            <a:avLst/>
-          </a:prstGeom>
-          <a:ln w="25400">
-            <a:solidFill>
-              <a:srgbClr val="8EDBD4"/>
-            </a:solidFill>
-          </a:ln>
-          <a:effectLst/>
-        </p:spPr>
-      </p:cxnSp>
-      <p:cxnSp>
-        <p:nvCxnSpPr>
-          <p:cNvPr id="37" name="C4-E08 line 35" descr="sci-ppt:o035"/>
-          <p:cNvCxnSpPr/>
-          <p:nvPr/>
-        </p:nvCxnSpPr>
-        <p:spPr>
-          <a:xfrm flipV="1">
-            <a:off x="4265676" y="1733997"/>
-            <a:ext cx="96012" cy="14909"/>
-          </a:xfrm>
-          <a:prstGeom prst="line">
-            <a:avLst/>
-          </a:prstGeom>
-          <a:ln w="25400">
-            <a:solidFill>
-              <a:srgbClr val="8EDBD4"/>
-            </a:solidFill>
-          </a:ln>
-          <a:effectLst/>
-        </p:spPr>
-      </p:cxnSp>
-      <p:cxnSp>
-        <p:nvCxnSpPr>
-          <p:cNvPr id="38" name="C4-E08 line 36" descr="sci-ppt:o036"/>
-          <p:cNvCxnSpPr/>
-          <p:nvPr/>
-        </p:nvCxnSpPr>
-        <p:spPr>
-          <a:xfrm flipV="1">
-            <a:off x="4361688" y="1721221"/>
-            <a:ext cx="96012" cy="12776"/>
-          </a:xfrm>
-          <a:prstGeom prst="line">
-            <a:avLst/>
-          </a:prstGeom>
-          <a:ln w="25400">
-            <a:solidFill>
-              <a:srgbClr val="8EDBD4"/>
-            </a:solidFill>
-          </a:ln>
-          <a:effectLst/>
-        </p:spPr>
-      </p:cxnSp>
-      <p:cxnSp>
-        <p:nvCxnSpPr>
-          <p:cNvPr id="39" name="C4-E08 line 37" descr="sci-ppt:o037"/>
-          <p:cNvCxnSpPr/>
-          <p:nvPr/>
-        </p:nvCxnSpPr>
-        <p:spPr>
-          <a:xfrm flipV="1">
-            <a:off x="4457700" y="1710660"/>
-            <a:ext cx="96012" cy="10561"/>
-          </a:xfrm>
-          <a:prstGeom prst="line">
-            <a:avLst/>
-          </a:prstGeom>
-          <a:ln w="25400">
-            <a:solidFill>
-              <a:srgbClr val="8EDBD4"/>
-            </a:solidFill>
-          </a:ln>
-          <a:effectLst/>
-        </p:spPr>
-      </p:cxnSp>
-      <p:cxnSp>
-        <p:nvCxnSpPr>
-          <p:cNvPr id="40" name="C4-E08 line 38" descr="sci-ppt:o038"/>
-          <p:cNvCxnSpPr/>
-          <p:nvPr/>
-        </p:nvCxnSpPr>
-        <p:spPr>
-          <a:xfrm flipV="1">
-            <a:off x="4553712" y="1702377"/>
-            <a:ext cx="96012" cy="8283"/>
-          </a:xfrm>
-          <a:prstGeom prst="line">
-            <a:avLst/>
-          </a:prstGeom>
-          <a:ln w="25400">
-            <a:solidFill>
-              <a:srgbClr val="8EDBD4"/>
-            </a:solidFill>
-          </a:ln>
-          <a:effectLst/>
-        </p:spPr>
-      </p:cxnSp>
-      <p:cxnSp>
-        <p:nvCxnSpPr>
-          <p:cNvPr id="41" name="C4-E08 line 39" descr="sci-ppt:o039"/>
-          <p:cNvCxnSpPr/>
-          <p:nvPr/>
-        </p:nvCxnSpPr>
-        <p:spPr>
-          <a:xfrm flipV="1">
-            <a:off x="4649724" y="1696424"/>
-            <a:ext cx="96012" cy="5953"/>
-          </a:xfrm>
-          <a:prstGeom prst="line">
-            <a:avLst/>
-          </a:prstGeom>
-          <a:ln w="25400">
-            <a:solidFill>
-              <a:srgbClr val="8EDBD4"/>
-            </a:solidFill>
-          </a:ln>
-          <a:effectLst/>
-        </p:spPr>
-      </p:cxnSp>
-      <p:cxnSp>
-        <p:nvCxnSpPr>
-          <p:cNvPr id="42" name="C4-E08 line 40" descr="sci-ppt:o040"/>
-          <p:cNvCxnSpPr/>
-          <p:nvPr/>
-        </p:nvCxnSpPr>
-        <p:spPr>
-          <a:xfrm flipV="1">
-            <a:off x="4745736" y="1692837"/>
-            <a:ext cx="96012" cy="3587"/>
-          </a:xfrm>
-          <a:prstGeom prst="line">
-            <a:avLst/>
-          </a:prstGeom>
-          <a:ln w="25400">
-            <a:solidFill>
-              <a:srgbClr val="8EDBD4"/>
-            </a:solidFill>
-          </a:ln>
-          <a:effectLst/>
-        </p:spPr>
-      </p:cxnSp>
-      <p:cxnSp>
-        <p:nvCxnSpPr>
-          <p:cNvPr id="43" name="C4-E08 line 41" descr="sci-ppt:o041"/>
-          <p:cNvCxnSpPr/>
-          <p:nvPr/>
-        </p:nvCxnSpPr>
-        <p:spPr>
-          <a:xfrm flipV="1">
-            <a:off x="4841748" y="1691640"/>
-            <a:ext cx="96012" cy="1197"/>
-          </a:xfrm>
-          <a:prstGeom prst="line">
-            <a:avLst/>
-          </a:prstGeom>
-          <a:ln w="25400">
-            <a:solidFill>
-              <a:srgbClr val="8EDBD4"/>
-            </a:solidFill>
-          </a:ln>
-          <a:effectLst/>
-        </p:spPr>
-      </p:cxnSp>
-      <p:cxnSp>
-        <p:nvCxnSpPr>
-          <p:cNvPr id="44" name="C4-E08 line 42" descr="sci-ppt:o042"/>
-          <p:cNvCxnSpPr/>
-          <p:nvPr/>
-        </p:nvCxnSpPr>
+        </p:nvSpPr>
         <p:spPr>
           <a:xfrm>
-            <a:off x="4937760" y="1691640"/>
-            <a:ext cx="96012" cy="1197"/>
-          </a:xfrm>
-          <a:prstGeom prst="line">
-            <a:avLst/>
-          </a:prstGeom>
-          <a:ln w="25400">
-            <a:solidFill>
-              <a:srgbClr val="8EDBD4"/>
-            </a:solidFill>
-          </a:ln>
-          <a:effectLst/>
-        </p:spPr>
-      </p:cxnSp>
-      <p:cxnSp>
-        <p:nvCxnSpPr>
-          <p:cNvPr id="45" name="C4-E08 line 43" descr="sci-ppt:o043"/>
-          <p:cNvCxnSpPr/>
-          <p:nvPr/>
-        </p:nvCxnSpPr>
-        <p:spPr>
-          <a:xfrm>
-            <a:off x="5033772" y="1692837"/>
-            <a:ext cx="96012" cy="3587"/>
-          </a:xfrm>
-          <a:prstGeom prst="line">
-            <a:avLst/>
-          </a:prstGeom>
-          <a:ln w="25400">
-            <a:solidFill>
-              <a:srgbClr val="8EDBD4"/>
-            </a:solidFill>
-          </a:ln>
-          <a:effectLst/>
-        </p:spPr>
-      </p:cxnSp>
-      <p:cxnSp>
-        <p:nvCxnSpPr>
-          <p:cNvPr id="46" name="C4-E08 line 44" descr="sci-ppt:o044"/>
-          <p:cNvCxnSpPr/>
-          <p:nvPr/>
-        </p:nvCxnSpPr>
-        <p:spPr>
-          <a:xfrm>
-            <a:off x="5129784" y="1696424"/>
-            <a:ext cx="96012" cy="5953"/>
-          </a:xfrm>
-          <a:prstGeom prst="line">
-            <a:avLst/>
-          </a:prstGeom>
-          <a:ln w="25400">
-            <a:solidFill>
-              <a:srgbClr val="8EDBD4"/>
-            </a:solidFill>
-          </a:ln>
-          <a:effectLst/>
-        </p:spPr>
-      </p:cxnSp>
-      <p:cxnSp>
-        <p:nvCxnSpPr>
-          <p:cNvPr id="47" name="C4-E08 line 45" descr="sci-ppt:o045"/>
-          <p:cNvCxnSpPr/>
-          <p:nvPr/>
-        </p:nvCxnSpPr>
-        <p:spPr>
-          <a:xfrm>
-            <a:off x="5225796" y="1702377"/>
-            <a:ext cx="96012" cy="8283"/>
-          </a:xfrm>
-          <a:prstGeom prst="line">
-            <a:avLst/>
-          </a:prstGeom>
-          <a:ln w="25400">
-            <a:solidFill>
-              <a:srgbClr val="8EDBD4"/>
-            </a:solidFill>
-          </a:ln>
-          <a:effectLst/>
-        </p:spPr>
-      </p:cxnSp>
-      <p:cxnSp>
-        <p:nvCxnSpPr>
-          <p:cNvPr id="48" name="C4-E08 line 46" descr="sci-ppt:o046"/>
-          <p:cNvCxnSpPr/>
-          <p:nvPr/>
-        </p:nvCxnSpPr>
-        <p:spPr>
-          <a:xfrm>
-            <a:off x="5321808" y="1710660"/>
-            <a:ext cx="96012" cy="10561"/>
-          </a:xfrm>
-          <a:prstGeom prst="line">
-            <a:avLst/>
-          </a:prstGeom>
-          <a:ln w="25400">
-            <a:solidFill>
-              <a:srgbClr val="8EDBD4"/>
-            </a:solidFill>
-          </a:ln>
-          <a:effectLst/>
-        </p:spPr>
-      </p:cxnSp>
-      <p:cxnSp>
-        <p:nvCxnSpPr>
-          <p:cNvPr id="49" name="C4-E08 line 47" descr="sci-ppt:o047"/>
-          <p:cNvCxnSpPr/>
-          <p:nvPr/>
-        </p:nvCxnSpPr>
-        <p:spPr>
-          <a:xfrm>
-            <a:off x="5417820" y="1721221"/>
-            <a:ext cx="96012" cy="12776"/>
-          </a:xfrm>
-          <a:prstGeom prst="line">
-            <a:avLst/>
-          </a:prstGeom>
-          <a:ln w="25400">
-            <a:solidFill>
-              <a:srgbClr val="8EDBD4"/>
-            </a:solidFill>
-          </a:ln>
-          <a:effectLst/>
-        </p:spPr>
-      </p:cxnSp>
-      <p:cxnSp>
-        <p:nvCxnSpPr>
-          <p:cNvPr id="50" name="C4-E08 line 48" descr="sci-ppt:o048"/>
-          <p:cNvCxnSpPr/>
-          <p:nvPr/>
-        </p:nvCxnSpPr>
-        <p:spPr>
-          <a:xfrm>
-            <a:off x="5513832" y="1733997"/>
-            <a:ext cx="96012" cy="14909"/>
-          </a:xfrm>
-          <a:prstGeom prst="line">
-            <a:avLst/>
-          </a:prstGeom>
-          <a:ln w="25400">
-            <a:solidFill>
-              <a:srgbClr val="8EDBD4"/>
-            </a:solidFill>
-          </a:ln>
-          <a:effectLst/>
-        </p:spPr>
-      </p:cxnSp>
-      <p:cxnSp>
-        <p:nvCxnSpPr>
-          <p:cNvPr id="51" name="C4-E08 line 49" descr="sci-ppt:o049"/>
-          <p:cNvCxnSpPr/>
-          <p:nvPr/>
-        </p:nvCxnSpPr>
-        <p:spPr>
-          <a:xfrm>
-            <a:off x="5609844" y="1748906"/>
-            <a:ext cx="96012" cy="16953"/>
-          </a:xfrm>
-          <a:prstGeom prst="line">
-            <a:avLst/>
-          </a:prstGeom>
-          <a:ln w="25400">
-            <a:solidFill>
-              <a:srgbClr val="8EDBD4"/>
-            </a:solidFill>
-          </a:ln>
-          <a:effectLst/>
-        </p:spPr>
-      </p:cxnSp>
-      <p:cxnSp>
-        <p:nvCxnSpPr>
-          <p:cNvPr id="52" name="C4-E08 line 50" descr="sci-ppt:o050"/>
-          <p:cNvCxnSpPr/>
-          <p:nvPr/>
-        </p:nvCxnSpPr>
-        <p:spPr>
-          <a:xfrm>
-            <a:off x="5705856" y="1765859"/>
-            <a:ext cx="96012" cy="18892"/>
-          </a:xfrm>
-          <a:prstGeom prst="line">
-            <a:avLst/>
-          </a:prstGeom>
-          <a:ln w="25400">
-            <a:solidFill>
-              <a:srgbClr val="8EDBD4"/>
-            </a:solidFill>
-          </a:ln>
-          <a:effectLst/>
-        </p:spPr>
-      </p:cxnSp>
-      <p:cxnSp>
-        <p:nvCxnSpPr>
-          <p:cNvPr id="53" name="C4-E08 line 51" descr="sci-ppt:o051"/>
-          <p:cNvCxnSpPr/>
-          <p:nvPr/>
-        </p:nvCxnSpPr>
-        <p:spPr>
-          <a:xfrm>
-            <a:off x="5801868" y="1784751"/>
-            <a:ext cx="96012" cy="20713"/>
-          </a:xfrm>
-          <a:prstGeom prst="line">
-            <a:avLst/>
-          </a:prstGeom>
-          <a:ln w="25400">
-            <a:solidFill>
-              <a:srgbClr val="8EDBD4"/>
-            </a:solidFill>
-          </a:ln>
-          <a:effectLst/>
-        </p:spPr>
-      </p:cxnSp>
-      <p:cxnSp>
-        <p:nvCxnSpPr>
-          <p:cNvPr id="54" name="C4-E08 line 52" descr="sci-ppt:o052"/>
-          <p:cNvCxnSpPr/>
-          <p:nvPr/>
-        </p:nvCxnSpPr>
-        <p:spPr>
-          <a:xfrm>
-            <a:off x="5897880" y="1805464"/>
-            <a:ext cx="96012" cy="22407"/>
-          </a:xfrm>
-          <a:prstGeom prst="line">
-            <a:avLst/>
-          </a:prstGeom>
-          <a:ln w="25400">
-            <a:solidFill>
-              <a:srgbClr val="8EDBD4"/>
-            </a:solidFill>
-          </a:ln>
-          <a:effectLst/>
-        </p:spPr>
-      </p:cxnSp>
-      <p:cxnSp>
-        <p:nvCxnSpPr>
-          <p:cNvPr id="55" name="C4-E08 line 53" descr="sci-ppt:o053"/>
-          <p:cNvCxnSpPr/>
-          <p:nvPr/>
-        </p:nvCxnSpPr>
-        <p:spPr>
-          <a:xfrm>
-            <a:off x="5993892" y="1827871"/>
-            <a:ext cx="96012" cy="23963"/>
-          </a:xfrm>
-          <a:prstGeom prst="line">
-            <a:avLst/>
-          </a:prstGeom>
-          <a:ln w="25400">
-            <a:solidFill>
-              <a:srgbClr val="8EDBD4"/>
-            </a:solidFill>
-          </a:ln>
-          <a:effectLst/>
-        </p:spPr>
-      </p:cxnSp>
-      <p:cxnSp>
-        <p:nvCxnSpPr>
-          <p:cNvPr id="56" name="C4-E08 line 54" descr="sci-ppt:o054"/>
-          <p:cNvCxnSpPr/>
-          <p:nvPr/>
-        </p:nvCxnSpPr>
-        <p:spPr>
-          <a:xfrm>
-            <a:off x="6089904" y="1851834"/>
-            <a:ext cx="96012" cy="25372"/>
-          </a:xfrm>
-          <a:prstGeom prst="line">
-            <a:avLst/>
-          </a:prstGeom>
-          <a:ln w="25400">
-            <a:solidFill>
-              <a:srgbClr val="8EDBD4"/>
-            </a:solidFill>
-          </a:ln>
-          <a:effectLst/>
-        </p:spPr>
-      </p:cxnSp>
-      <p:cxnSp>
-        <p:nvCxnSpPr>
-          <p:cNvPr id="57" name="C4-E08 line 55" descr="sci-ppt:o055"/>
-          <p:cNvCxnSpPr/>
-          <p:nvPr/>
-        </p:nvCxnSpPr>
-        <p:spPr>
-          <a:xfrm>
-            <a:off x="6185916" y="1877206"/>
-            <a:ext cx="96012" cy="26624"/>
-          </a:xfrm>
-          <a:prstGeom prst="line">
-            <a:avLst/>
-          </a:prstGeom>
-          <a:ln w="25400">
-            <a:solidFill>
-              <a:srgbClr val="8EDBD4"/>
-            </a:solidFill>
-          </a:ln>
-          <a:effectLst/>
-        </p:spPr>
-      </p:cxnSp>
-      <p:cxnSp>
-        <p:nvCxnSpPr>
-          <p:cNvPr id="58" name="C4-E08 line 56" descr="sci-ppt:o056"/>
-          <p:cNvCxnSpPr/>
-          <p:nvPr/>
-        </p:nvCxnSpPr>
-        <p:spPr>
-          <a:xfrm>
-            <a:off x="6281928" y="1903830"/>
-            <a:ext cx="96012" cy="27711"/>
-          </a:xfrm>
-          <a:prstGeom prst="line">
-            <a:avLst/>
-          </a:prstGeom>
-          <a:ln w="25400">
-            <a:solidFill>
-              <a:srgbClr val="8EDBD4"/>
-            </a:solidFill>
-          </a:ln>
-          <a:effectLst/>
-        </p:spPr>
-      </p:cxnSp>
-      <p:cxnSp>
-        <p:nvCxnSpPr>
-          <p:cNvPr id="59" name="C4-E08 line 57" descr="sci-ppt:o057"/>
-          <p:cNvCxnSpPr/>
-          <p:nvPr/>
-        </p:nvCxnSpPr>
-        <p:spPr>
-          <a:xfrm>
-            <a:off x="6377940" y="1931541"/>
-            <a:ext cx="96012" cy="28628"/>
-          </a:xfrm>
-          <a:prstGeom prst="line">
-            <a:avLst/>
-          </a:prstGeom>
-          <a:ln w="25400">
-            <a:solidFill>
-              <a:srgbClr val="8EDBD4"/>
-            </a:solidFill>
-          </a:ln>
-          <a:effectLst/>
-        </p:spPr>
-      </p:cxnSp>
-      <p:cxnSp>
-        <p:nvCxnSpPr>
-          <p:cNvPr id="60" name="C4-E08 line 58" descr="sci-ppt:o058"/>
-          <p:cNvCxnSpPr/>
-          <p:nvPr/>
-        </p:nvCxnSpPr>
-        <p:spPr>
-          <a:xfrm>
-            <a:off x="6473952" y="1960169"/>
-            <a:ext cx="96012" cy="29369"/>
-          </a:xfrm>
-          <a:prstGeom prst="line">
-            <a:avLst/>
-          </a:prstGeom>
-          <a:ln w="25400">
-            <a:solidFill>
-              <a:srgbClr val="8EDBD4"/>
-            </a:solidFill>
-          </a:ln>
-          <a:effectLst/>
-        </p:spPr>
-      </p:cxnSp>
-      <p:cxnSp>
-        <p:nvCxnSpPr>
-          <p:cNvPr id="61" name="C4-E08 line 59" descr="sci-ppt:o059"/>
-          <p:cNvCxnSpPr/>
-          <p:nvPr/>
-        </p:nvCxnSpPr>
-        <p:spPr>
-          <a:xfrm>
-            <a:off x="6569964" y="1989538"/>
-            <a:ext cx="96012" cy="29928"/>
-          </a:xfrm>
-          <a:prstGeom prst="line">
-            <a:avLst/>
-          </a:prstGeom>
-          <a:ln w="25400">
-            <a:solidFill>
-              <a:srgbClr val="8EDBD4"/>
-            </a:solidFill>
-          </a:ln>
-          <a:effectLst/>
-        </p:spPr>
-      </p:cxnSp>
-      <p:cxnSp>
-        <p:nvCxnSpPr>
-          <p:cNvPr id="62" name="C4-E08 line 60" descr="sci-ppt:o060"/>
-          <p:cNvCxnSpPr/>
-          <p:nvPr/>
-        </p:nvCxnSpPr>
-        <p:spPr>
-          <a:xfrm>
-            <a:off x="6665976" y="2019466"/>
-            <a:ext cx="96012" cy="30303"/>
-          </a:xfrm>
-          <a:prstGeom prst="line">
-            <a:avLst/>
-          </a:prstGeom>
-          <a:ln w="25400">
-            <a:solidFill>
-              <a:srgbClr val="8EDBD4"/>
-            </a:solidFill>
-          </a:ln>
-          <a:effectLst/>
-        </p:spPr>
-      </p:cxnSp>
-      <p:cxnSp>
-        <p:nvCxnSpPr>
-          <p:cNvPr id="63" name="C4-E08 line 61" descr="sci-ppt:o061"/>
-          <p:cNvCxnSpPr/>
-          <p:nvPr/>
-        </p:nvCxnSpPr>
-        <p:spPr>
-          <a:xfrm>
-            <a:off x="6761988" y="2049769"/>
-            <a:ext cx="96012" cy="30491"/>
-          </a:xfrm>
-          <a:prstGeom prst="line">
-            <a:avLst/>
-          </a:prstGeom>
-          <a:ln w="25400">
-            <a:solidFill>
-              <a:srgbClr val="8EDBD4"/>
-            </a:solidFill>
-          </a:ln>
-          <a:effectLst/>
-        </p:spPr>
-      </p:cxnSp>
-      <p:cxnSp>
-        <p:nvCxnSpPr>
-          <p:cNvPr id="64" name="C4-E08 line 62" descr="sci-ppt:o062"/>
-          <p:cNvCxnSpPr/>
-          <p:nvPr/>
-        </p:nvCxnSpPr>
-        <p:spPr>
-          <a:xfrm>
-            <a:off x="6858000" y="2080260"/>
-            <a:ext cx="96012" cy="30490"/>
-          </a:xfrm>
-          <a:prstGeom prst="line">
-            <a:avLst/>
-          </a:prstGeom>
-          <a:ln w="25400">
-            <a:solidFill>
-              <a:srgbClr val="8EDBD4"/>
-            </a:solidFill>
-          </a:ln>
-          <a:effectLst/>
-        </p:spPr>
-      </p:cxnSp>
-      <p:cxnSp>
-        <p:nvCxnSpPr>
-          <p:cNvPr id="65" name="C4-E08 line 63" descr="sci-ppt:o063"/>
-          <p:cNvCxnSpPr/>
-          <p:nvPr/>
-        </p:nvCxnSpPr>
-        <p:spPr>
-          <a:xfrm>
-            <a:off x="6954012" y="2110750"/>
-            <a:ext cx="96012" cy="30303"/>
-          </a:xfrm>
-          <a:prstGeom prst="line">
-            <a:avLst/>
-          </a:prstGeom>
-          <a:ln w="25400">
-            <a:solidFill>
-              <a:srgbClr val="8EDBD4"/>
-            </a:solidFill>
-          </a:ln>
-          <a:effectLst/>
-        </p:spPr>
-      </p:cxnSp>
-      <p:cxnSp>
-        <p:nvCxnSpPr>
-          <p:cNvPr id="66" name="C4-E08 line 64" descr="sci-ppt:o064"/>
-          <p:cNvCxnSpPr/>
-          <p:nvPr/>
-        </p:nvCxnSpPr>
-        <p:spPr>
-          <a:xfrm>
-            <a:off x="7050024" y="2141053"/>
-            <a:ext cx="96012" cy="29928"/>
-          </a:xfrm>
-          <a:prstGeom prst="line">
-            <a:avLst/>
-          </a:prstGeom>
-          <a:ln w="25400">
-            <a:solidFill>
-              <a:srgbClr val="8EDBD4"/>
-            </a:solidFill>
-          </a:ln>
-          <a:effectLst/>
-        </p:spPr>
-      </p:cxnSp>
-      <p:cxnSp>
-        <p:nvCxnSpPr>
-          <p:cNvPr id="67" name="C4-E08 line 65" descr="sci-ppt:o065"/>
-          <p:cNvCxnSpPr/>
-          <p:nvPr/>
-        </p:nvCxnSpPr>
-        <p:spPr>
-          <a:xfrm>
-            <a:off x="7146036" y="2170981"/>
-            <a:ext cx="96012" cy="29369"/>
-          </a:xfrm>
-          <a:prstGeom prst="line">
-            <a:avLst/>
-          </a:prstGeom>
-          <a:ln w="25400">
-            <a:solidFill>
-              <a:srgbClr val="8EDBD4"/>
-            </a:solidFill>
-          </a:ln>
-          <a:effectLst/>
-        </p:spPr>
-      </p:cxnSp>
-      <p:cxnSp>
-        <p:nvCxnSpPr>
-          <p:cNvPr id="68" name="C4-E08 line 66" descr="sci-ppt:o066"/>
-          <p:cNvCxnSpPr/>
-          <p:nvPr/>
-        </p:nvCxnSpPr>
-        <p:spPr>
-          <a:xfrm>
-            <a:off x="7242048" y="2200350"/>
-            <a:ext cx="96012" cy="28628"/>
-          </a:xfrm>
-          <a:prstGeom prst="line">
-            <a:avLst/>
-          </a:prstGeom>
-          <a:ln w="25400">
-            <a:solidFill>
-              <a:srgbClr val="8EDBD4"/>
-            </a:solidFill>
-          </a:ln>
-          <a:effectLst/>
-        </p:spPr>
-      </p:cxnSp>
-      <p:cxnSp>
-        <p:nvCxnSpPr>
-          <p:cNvPr id="69" name="C4-E08 line 67" descr="sci-ppt:o067"/>
-          <p:cNvCxnSpPr/>
-          <p:nvPr/>
-        </p:nvCxnSpPr>
-        <p:spPr>
-          <a:xfrm>
-            <a:off x="7338060" y="2228978"/>
-            <a:ext cx="96011" cy="27711"/>
-          </a:xfrm>
-          <a:prstGeom prst="line">
-            <a:avLst/>
-          </a:prstGeom>
-          <a:ln w="25400">
-            <a:solidFill>
-              <a:srgbClr val="8EDBD4"/>
-            </a:solidFill>
-          </a:ln>
-          <a:effectLst/>
-        </p:spPr>
-      </p:cxnSp>
-      <p:cxnSp>
-        <p:nvCxnSpPr>
-          <p:cNvPr id="70" name="C4-E08 line 68" descr="sci-ppt:o068"/>
-          <p:cNvCxnSpPr/>
-          <p:nvPr/>
-        </p:nvCxnSpPr>
-        <p:spPr>
-          <a:xfrm>
-            <a:off x="7434071" y="2256689"/>
-            <a:ext cx="96012" cy="26624"/>
-          </a:xfrm>
-          <a:prstGeom prst="line">
-            <a:avLst/>
-          </a:prstGeom>
-          <a:ln w="25400">
-            <a:solidFill>
-              <a:srgbClr val="8EDBD4"/>
-            </a:solidFill>
-          </a:ln>
-          <a:effectLst/>
-        </p:spPr>
-      </p:cxnSp>
-      <p:cxnSp>
-        <p:nvCxnSpPr>
-          <p:cNvPr id="71" name="C4-E08 line 69" descr="sci-ppt:o069"/>
-          <p:cNvCxnSpPr/>
-          <p:nvPr/>
-        </p:nvCxnSpPr>
-        <p:spPr>
-          <a:xfrm>
-            <a:off x="7530083" y="2283313"/>
-            <a:ext cx="96013" cy="25372"/>
-          </a:xfrm>
-          <a:prstGeom prst="line">
-            <a:avLst/>
-          </a:prstGeom>
-          <a:ln w="25400">
-            <a:solidFill>
-              <a:srgbClr val="8EDBD4"/>
-            </a:solidFill>
-          </a:ln>
-          <a:effectLst/>
-        </p:spPr>
-      </p:cxnSp>
-      <p:cxnSp>
-        <p:nvCxnSpPr>
-          <p:cNvPr id="72" name="C4-E08 line 70" descr="sci-ppt:o070"/>
-          <p:cNvCxnSpPr/>
-          <p:nvPr/>
-        </p:nvCxnSpPr>
-        <p:spPr>
-          <a:xfrm>
-            <a:off x="7626096" y="2308685"/>
-            <a:ext cx="96012" cy="23963"/>
-          </a:xfrm>
-          <a:prstGeom prst="line">
-            <a:avLst/>
-          </a:prstGeom>
-          <a:ln w="25400">
-            <a:solidFill>
-              <a:srgbClr val="8EDBD4"/>
-            </a:solidFill>
-          </a:ln>
-          <a:effectLst/>
-        </p:spPr>
-      </p:cxnSp>
-      <p:cxnSp>
-        <p:nvCxnSpPr>
-          <p:cNvPr id="73" name="C4-E08 line 71" descr="sci-ppt:o071"/>
-          <p:cNvCxnSpPr/>
-          <p:nvPr/>
-        </p:nvCxnSpPr>
-        <p:spPr>
-          <a:xfrm>
-            <a:off x="7722108" y="2332648"/>
-            <a:ext cx="96011" cy="22407"/>
-          </a:xfrm>
-          <a:prstGeom prst="line">
-            <a:avLst/>
-          </a:prstGeom>
-          <a:ln w="25400">
-            <a:solidFill>
-              <a:srgbClr val="8EDBD4"/>
-            </a:solidFill>
-          </a:ln>
-          <a:effectLst/>
-        </p:spPr>
-      </p:cxnSp>
-      <p:cxnSp>
-        <p:nvCxnSpPr>
-          <p:cNvPr id="74" name="C4-E08 line 72" descr="sci-ppt:o072"/>
-          <p:cNvCxnSpPr/>
-          <p:nvPr/>
-        </p:nvCxnSpPr>
-        <p:spPr>
-          <a:xfrm>
-            <a:off x="7818119" y="2355055"/>
-            <a:ext cx="96012" cy="20713"/>
-          </a:xfrm>
-          <a:prstGeom prst="line">
-            <a:avLst/>
-          </a:prstGeom>
-          <a:ln w="25400">
-            <a:solidFill>
-              <a:srgbClr val="8EDBD4"/>
-            </a:solidFill>
-          </a:ln>
-          <a:effectLst/>
-        </p:spPr>
-      </p:cxnSp>
-      <p:cxnSp>
-        <p:nvCxnSpPr>
-          <p:cNvPr id="75" name="C4-E08 line 73" descr="sci-ppt:o073"/>
-          <p:cNvCxnSpPr/>
-          <p:nvPr/>
-        </p:nvCxnSpPr>
-        <p:spPr>
-          <a:xfrm>
-            <a:off x="7914131" y="2375768"/>
-            <a:ext cx="96013" cy="18892"/>
-          </a:xfrm>
-          <a:prstGeom prst="line">
-            <a:avLst/>
-          </a:prstGeom>
-          <a:ln w="25400">
-            <a:solidFill>
-              <a:srgbClr val="8EDBD4"/>
-            </a:solidFill>
-          </a:ln>
-          <a:effectLst/>
-        </p:spPr>
-      </p:cxnSp>
-      <p:cxnSp>
-        <p:nvCxnSpPr>
-          <p:cNvPr id="76" name="C4-E08 line 74" descr="sci-ppt:o074"/>
-          <p:cNvCxnSpPr/>
-          <p:nvPr/>
-        </p:nvCxnSpPr>
-        <p:spPr>
-          <a:xfrm>
-            <a:off x="8010144" y="2394660"/>
-            <a:ext cx="96012" cy="16953"/>
-          </a:xfrm>
-          <a:prstGeom prst="line">
-            <a:avLst/>
-          </a:prstGeom>
-          <a:ln w="25400">
-            <a:solidFill>
-              <a:srgbClr val="8EDBD4"/>
-            </a:solidFill>
-          </a:ln>
-          <a:effectLst/>
-        </p:spPr>
-      </p:cxnSp>
-      <p:cxnSp>
-        <p:nvCxnSpPr>
-          <p:cNvPr id="77" name="C4-E08 line 75" descr="sci-ppt:o075"/>
-          <p:cNvCxnSpPr/>
-          <p:nvPr/>
-        </p:nvCxnSpPr>
-        <p:spPr>
-          <a:xfrm>
-            <a:off x="8106156" y="2411613"/>
-            <a:ext cx="96011" cy="14909"/>
-          </a:xfrm>
-          <a:prstGeom prst="line">
-            <a:avLst/>
-          </a:prstGeom>
-          <a:ln w="25400">
-            <a:solidFill>
-              <a:srgbClr val="8EDBD4"/>
-            </a:solidFill>
-          </a:ln>
-          <a:effectLst/>
-        </p:spPr>
-      </p:cxnSp>
-      <p:cxnSp>
-        <p:nvCxnSpPr>
-          <p:cNvPr id="78" name="C4-E08 line 76" descr="sci-ppt:o076"/>
-          <p:cNvCxnSpPr/>
-          <p:nvPr/>
-        </p:nvCxnSpPr>
-        <p:spPr>
-          <a:xfrm>
-            <a:off x="8202167" y="2426522"/>
-            <a:ext cx="96012" cy="12776"/>
-          </a:xfrm>
-          <a:prstGeom prst="line">
-            <a:avLst/>
-          </a:prstGeom>
-          <a:ln w="25400">
-            <a:solidFill>
-              <a:srgbClr val="8EDBD4"/>
-            </a:solidFill>
-          </a:ln>
-          <a:effectLst/>
-        </p:spPr>
-      </p:cxnSp>
-      <p:cxnSp>
-        <p:nvCxnSpPr>
-          <p:cNvPr id="79" name="C4-E08 line 77" descr="sci-ppt:o077"/>
-          <p:cNvCxnSpPr/>
-          <p:nvPr/>
-        </p:nvCxnSpPr>
-        <p:spPr>
-          <a:xfrm>
-            <a:off x="8298179" y="2439298"/>
-            <a:ext cx="96013" cy="10561"/>
-          </a:xfrm>
-          <a:prstGeom prst="line">
-            <a:avLst/>
-          </a:prstGeom>
-          <a:ln w="25400">
-            <a:solidFill>
-              <a:srgbClr val="8EDBD4"/>
-            </a:solidFill>
-          </a:ln>
-          <a:effectLst/>
-        </p:spPr>
-      </p:cxnSp>
-      <p:cxnSp>
-        <p:nvCxnSpPr>
-          <p:cNvPr id="80" name="C4-E08 line 78" descr="sci-ppt:o078"/>
-          <p:cNvCxnSpPr/>
-          <p:nvPr/>
-        </p:nvCxnSpPr>
-        <p:spPr>
-          <a:xfrm>
-            <a:off x="8394192" y="2449859"/>
-            <a:ext cx="96011" cy="8283"/>
-          </a:xfrm>
-          <a:prstGeom prst="line">
-            <a:avLst/>
-          </a:prstGeom>
-          <a:ln w="25400">
-            <a:solidFill>
-              <a:srgbClr val="8EDBD4"/>
-            </a:solidFill>
-          </a:ln>
-          <a:effectLst/>
-        </p:spPr>
-      </p:cxnSp>
-      <p:cxnSp>
-        <p:nvCxnSpPr>
-          <p:cNvPr id="81" name="C4-E08 line 79" descr="sci-ppt:o079"/>
-          <p:cNvCxnSpPr/>
-          <p:nvPr/>
-        </p:nvCxnSpPr>
-        <p:spPr>
-          <a:xfrm>
-            <a:off x="8490203" y="2458142"/>
-            <a:ext cx="96012" cy="5953"/>
-          </a:xfrm>
-          <a:prstGeom prst="line">
-            <a:avLst/>
-          </a:prstGeom>
-          <a:ln w="25400">
-            <a:solidFill>
-              <a:srgbClr val="8EDBD4"/>
-            </a:solidFill>
-          </a:ln>
-          <a:effectLst/>
-        </p:spPr>
-      </p:cxnSp>
-      <p:cxnSp>
-        <p:nvCxnSpPr>
-          <p:cNvPr id="82" name="C4-E08 line 80" descr="sci-ppt:o080"/>
-          <p:cNvCxnSpPr/>
-          <p:nvPr/>
-        </p:nvCxnSpPr>
-        <p:spPr>
-          <a:xfrm>
-            <a:off x="8586215" y="2464095"/>
-            <a:ext cx="96013" cy="3587"/>
-          </a:xfrm>
-          <a:prstGeom prst="line">
-            <a:avLst/>
-          </a:prstGeom>
-          <a:ln w="25400">
-            <a:solidFill>
-              <a:srgbClr val="8EDBD4"/>
-            </a:solidFill>
-          </a:ln>
-          <a:effectLst/>
-        </p:spPr>
-      </p:cxnSp>
-      <p:cxnSp>
-        <p:nvCxnSpPr>
-          <p:cNvPr id="83" name="C4-E08 line 81" descr="sci-ppt:o081"/>
-          <p:cNvCxnSpPr/>
-          <p:nvPr/>
-        </p:nvCxnSpPr>
-        <p:spPr>
-          <a:xfrm>
-            <a:off x="8682228" y="2467682"/>
-            <a:ext cx="96012" cy="1198"/>
-          </a:xfrm>
-          <a:prstGeom prst="line">
-            <a:avLst/>
-          </a:prstGeom>
-          <a:ln w="25400">
-            <a:solidFill>
-              <a:srgbClr val="8EDBD4"/>
-            </a:solidFill>
-          </a:ln>
-          <a:effectLst/>
-        </p:spPr>
-      </p:cxnSp>
-      <p:sp>
-        <p:nvSpPr>
-          <p:cNvPr id="84" name="C4-E08 rect 82" descr="sci-ppt:o082"/>
-          <p:cNvSpPr/>
-          <p:nvPr/>
-        </p:nvSpPr>
-        <p:spPr>
-          <a:xfrm>
-            <a:off x="868680" y="2194560"/>
-            <a:ext cx="274320" cy="548640"/>
-          </a:xfrm>
-          <a:prstGeom prst="rect">
-            <a:avLst/>
-          </a:prstGeom>
-          <a:solidFill>
-            <a:srgbClr val="213E4B"/>
-          </a:solidFill>
-          <a:ln w="19050">
-            <a:solidFill>
-              <a:srgbClr val="B4C7D2"/>
-            </a:solidFill>
-          </a:ln>
-          <a:effectLst/>
-        </p:spPr>
-        <p:txBody>
-          <a:bodyPr rtlCol="0" anchor="ctr"/>
-          <a:lstStyle/>
-          <a:p>
-            <a:pPr algn="ctr"/>
-          </a:p>
-        </p:txBody>
-      </p:sp>
-      <p:sp>
-        <p:nvSpPr>
-          <p:cNvPr id="85" name="C4-E08 rect 83" descr="sci-ppt:o083"/>
-          <p:cNvSpPr/>
-          <p:nvPr/>
-        </p:nvSpPr>
-        <p:spPr>
-          <a:xfrm>
-            <a:off x="8732520" y="2194560"/>
-            <a:ext cx="274320" cy="548640"/>
-          </a:xfrm>
-          <a:prstGeom prst="rect">
-            <a:avLst/>
-          </a:prstGeom>
-          <a:solidFill>
-            <a:srgbClr val="213E4B"/>
-          </a:solidFill>
-          <a:ln w="19050">
-            <a:solidFill>
-              <a:srgbClr val="B4C7D2"/>
-            </a:solidFill>
-          </a:ln>
-          <a:effectLst/>
-        </p:spPr>
-        <p:txBody>
-          <a:bodyPr rtlCol="0" anchor="ctr"/>
-          <a:lstStyle/>
-          <a:p>
-            <a:pPr algn="ctr"/>
-          </a:p>
-        </p:txBody>
-      </p:sp>
-      <p:cxnSp>
-        <p:nvCxnSpPr>
-          <p:cNvPr id="86" name="C4-E08 arrow 84" descr="sci-ppt:o084"/>
-          <p:cNvCxnSpPr/>
-          <p:nvPr/>
-        </p:nvCxnSpPr>
-        <p:spPr>
-          <a:xfrm flipV="1">
-            <a:off x="2743200" y="2606040"/>
-            <a:ext cx="0" cy="822960"/>
-          </a:xfrm>
-          <a:prstGeom prst="line">
-            <a:avLst/>
-          </a:prstGeom>
-          <a:ln w="25400">
-            <a:solidFill>
-              <a:srgbClr val="8EDBD4"/>
-            </a:solidFill>
-            <a:headEnd type="none" w="med" len="med"/>
-            <a:tailEnd type="triangle" w="med" len="med"/>
-          </a:ln>
-          <a:effectLst/>
-        </p:spPr>
-      </p:cxnSp>
-      <p:cxnSp>
-        <p:nvCxnSpPr>
-          <p:cNvPr id="87" name="C4-E08 arrow 85" descr="sci-ppt:o085"/>
-          <p:cNvCxnSpPr/>
-          <p:nvPr/>
-        </p:nvCxnSpPr>
-        <p:spPr>
-          <a:xfrm flipV="1">
-            <a:off x="4937760" y="2606040"/>
-            <a:ext cx="0" cy="822960"/>
-          </a:xfrm>
-          <a:prstGeom prst="line">
-            <a:avLst/>
-          </a:prstGeom>
-          <a:ln w="25400">
-            <a:solidFill>
-              <a:srgbClr val="8EDBD4"/>
-            </a:solidFill>
-            <a:headEnd type="none" w="med" len="med"/>
-            <a:tailEnd type="triangle" w="med" len="med"/>
-          </a:ln>
-          <a:effectLst/>
-        </p:spPr>
-      </p:cxnSp>
-      <p:cxnSp>
-        <p:nvCxnSpPr>
-          <p:cNvPr id="88" name="C4-E08 arrow 86" descr="sci-ppt:o086"/>
-          <p:cNvCxnSpPr/>
-          <p:nvPr/>
-        </p:nvCxnSpPr>
-        <p:spPr>
-          <a:xfrm flipV="1">
-            <a:off x="7132320" y="2606040"/>
-            <a:ext cx="0" cy="822960"/>
-          </a:xfrm>
-          <a:prstGeom prst="line">
-            <a:avLst/>
-          </a:prstGeom>
-          <a:ln w="25400">
-            <a:solidFill>
-              <a:srgbClr val="8EDBD4"/>
-            </a:solidFill>
-            <a:headEnd type="none" w="med" len="med"/>
-            <a:tailEnd type="triangle" w="med" len="med"/>
-          </a:ln>
-          <a:effectLst/>
-        </p:spPr>
-      </p:cxnSp>
-      <p:cxnSp>
-        <p:nvCxnSpPr>
-          <p:cNvPr id="89" name="C4-E08 arrow 87" descr="sci-ppt:o087"/>
-          <p:cNvCxnSpPr/>
-          <p:nvPr/>
-        </p:nvCxnSpPr>
-        <p:spPr>
-          <a:xfrm>
-            <a:off x="4937760" y="914400"/>
-            <a:ext cx="0" cy="594360"/>
-          </a:xfrm>
-          <a:prstGeom prst="line">
-            <a:avLst/>
-          </a:prstGeom>
-          <a:ln w="25400">
-            <a:solidFill>
-              <a:srgbClr val="8EDBD4"/>
-            </a:solidFill>
-            <a:headEnd type="none" w="med" len="med"/>
-            <a:tailEnd type="triangle" w="med" len="med"/>
-          </a:ln>
-          <a:effectLst/>
-        </p:spPr>
-      </p:cxnSp>
-      <p:sp>
-        <p:nvSpPr>
-          <p:cNvPr id="90" name="C4-E08 text 88" descr="sci-ppt:o088"/>
-          <p:cNvSpPr txBox="1"/>
-          <p:nvPr/>
-        </p:nvSpPr>
-        <p:spPr>
-          <a:xfrm>
-            <a:off x="5486400" y="960120"/>
-            <a:ext cx="5486400" cy="411480"/>
+            <a:off x="45720" y="1837943"/>
+            <a:ext cx="777240" cy="208407"/>
           </a:xfrm>
           <a:prstGeom prst="rect">
             <a:avLst/>
@@ -5096,38 +3768,38 @@
           <a:effectLst/>
         </p:spPr>
         <p:txBody>
-          <a:bodyPr wrap="square" lIns="27432" rIns="27432" tIns="18288" bIns="18288" anchor="ctr">
+          <a:bodyPr wrap="none" lIns="18288" rIns="18288" tIns="18288" bIns="18288" anchor="t">
             <a:spAutoFit/>
           </a:bodyPr>
           <a:lstStyle/>
           <a:p>
-            <a:pPr algn="l">
+            <a:pPr algn="r">
               <a:spcAft>
                 <a:spcPts val="0"/>
               </a:spcAft>
             </a:pPr>
             <a:r>
-              <a:rPr sz="1800" b="0" i="0">
+              <a:rPr sz="1050" b="0" i="0">
                 <a:solidFill>
-                  <a:srgbClr val="E7F0F3"/>
+                  <a:srgbClr val="B4C7D2"/>
                 </a:solidFill>
                 <a:latin typeface="Arial"/>
               </a:rPr>
-              <a:t>t_coh ↓: opening resistance</a:t>
+              <a:t>1.0</a:t>
             </a:r>
           </a:p>
         </p:txBody>
       </p:sp>
       <p:sp>
         <p:nvSpPr>
-          <p:cNvPr id="91" name="C4-E08 text 89" descr="sci-ppt:o089"/>
+          <p:cNvPr id="27" name="C4-E08 text 25" descr="sci-ppt:o025"/>
           <p:cNvSpPr txBox="1"/>
           <p:nvPr/>
         </p:nvSpPr>
         <p:spPr>
           <a:xfrm>
-            <a:off x="2194560" y="3474720"/>
-            <a:ext cx="6400800" cy="320040"/>
+            <a:off x="914400" y="4946903"/>
+            <a:ext cx="5852160" cy="231648"/>
           </a:xfrm>
           <a:prstGeom prst="rect">
             <a:avLst/>
@@ -5136,38 +3808,38 @@
           <a:effectLst/>
         </p:spPr>
         <p:txBody>
-          <a:bodyPr wrap="square" lIns="27432" rIns="27432" tIns="18288" bIns="18288" anchor="ctr">
+          <a:bodyPr wrap="none" lIns="18288" rIns="18288" tIns="18288" bIns="18288" anchor="t">
             <a:spAutoFit/>
           </a:bodyPr>
           <a:lstStyle/>
           <a:p>
-            <a:pPr algn="l">
+            <a:pPr algn="ctr">
               <a:spcAft>
                 <a:spcPts val="0"/>
               </a:spcAft>
             </a:pPr>
             <a:r>
-              <a:rPr sz="1700" b="0" i="0">
+              <a:rPr sz="1200" b="0" i="0">
                 <a:solidFill>
                   <a:srgbClr val="E7F0F3"/>
                 </a:solidFill>
                 <a:latin typeface="Arial"/>
               </a:rPr>
-              <a:t>p_load ↑: applied positive departure load</a:t>
+              <a:t>time (ns)</a:t>
             </a:r>
           </a:p>
         </p:txBody>
       </p:sp>
       <p:sp>
         <p:nvSpPr>
-          <p:cNvPr id="92" name="C4-E08 text 90" descr="sci-ppt:o090"/>
+          <p:cNvPr id="28" name="C4-E08 text 26" descr="sci-ppt:o026"/>
           <p:cNvSpPr txBox="1"/>
           <p:nvPr/>
         </p:nvSpPr>
         <p:spPr>
           <a:xfrm>
-            <a:off x="914400" y="731520"/>
-            <a:ext cx="3657600" cy="365760"/>
+            <a:off x="365760" y="1024128"/>
+            <a:ext cx="5852160" cy="231648"/>
           </a:xfrm>
           <a:prstGeom prst="rect">
             <a:avLst/>
@@ -5176,7 +3848,7 @@
           <a:effectLst/>
         </p:spPr>
         <p:txBody>
-          <a:bodyPr wrap="square" lIns="27432" rIns="27432" tIns="18288" bIns="18288" anchor="ctr">
+          <a:bodyPr wrap="none" lIns="18288" rIns="18288" tIns="18288" bIns="18288" anchor="t">
             <a:spAutoFit/>
           </a:bodyPr>
           <a:lstStyle/>
@@ -5187,27 +3859,3754 @@
               </a:spcAft>
             </a:pPr>
             <a:r>
-              <a:rPr sz="1800" b="0" i="0">
+              <a:rPr sz="1200" b="0" i="0">
                 <a:solidFill>
                   <a:srgbClr val="E7F0F3"/>
                 </a:solidFill>
                 <a:latin typeface="Arial"/>
               </a:rPr>
-              <a:t>Film: w ↑; fixed clamps</a:t>
+              <a:t>pressure / reaction (rel.)</a:t>
             </a:r>
           </a:p>
         </p:txBody>
       </p:sp>
       <p:sp>
         <p:nvSpPr>
-          <p:cNvPr id="93" name="C4-E08 text 91" descr="sci-ppt:o091"/>
+          <p:cNvPr id="29" name="C4-E08 polygon 27" descr="sci-ppt:o027"/>
+          <p:cNvSpPr/>
+          <p:nvPr/>
+        </p:nvSpPr>
+        <p:spPr>
+          <a:xfrm>
+            <a:off x="914400" y="1920239"/>
+            <a:ext cx="5852160" cy="2743201"/>
+          </a:xfrm>
+          <a:custGeom>
+            <a:avLst/>
+            <a:gdLst/>
+            <a:ahLst/>
+            <a:cxnLst/>
+            <a:rect l="l" t="t" r="r" b="b"/>
+            <a:pathLst>
+              <a:path w="5852160" h="2743201">
+                <a:moveTo>
+                  <a:pt x="0" y="0"/>
+                </a:moveTo>
+                <a:lnTo>
+                  <a:pt x="14667" y="0"/>
+                </a:lnTo>
+                <a:lnTo>
+                  <a:pt x="29334" y="0"/>
+                </a:lnTo>
+                <a:lnTo>
+                  <a:pt x="44001" y="0"/>
+                </a:lnTo>
+                <a:lnTo>
+                  <a:pt x="58668" y="0"/>
+                </a:lnTo>
+                <a:lnTo>
+                  <a:pt x="73335" y="0"/>
+                </a:lnTo>
+                <a:lnTo>
+                  <a:pt x="88002" y="0"/>
+                </a:lnTo>
+                <a:lnTo>
+                  <a:pt x="102669" y="0"/>
+                </a:lnTo>
+                <a:lnTo>
+                  <a:pt x="117336" y="0"/>
+                </a:lnTo>
+                <a:lnTo>
+                  <a:pt x="132003" y="0"/>
+                </a:lnTo>
+                <a:lnTo>
+                  <a:pt x="146670" y="0"/>
+                </a:lnTo>
+                <a:lnTo>
+                  <a:pt x="161337" y="0"/>
+                </a:lnTo>
+                <a:lnTo>
+                  <a:pt x="176004" y="0"/>
+                </a:lnTo>
+                <a:lnTo>
+                  <a:pt x="190671" y="0"/>
+                </a:lnTo>
+                <a:lnTo>
+                  <a:pt x="205338" y="0"/>
+                </a:lnTo>
+                <a:lnTo>
+                  <a:pt x="220006" y="0"/>
+                </a:lnTo>
+                <a:lnTo>
+                  <a:pt x="234673" y="0"/>
+                </a:lnTo>
+                <a:lnTo>
+                  <a:pt x="249340" y="0"/>
+                </a:lnTo>
+                <a:lnTo>
+                  <a:pt x="264007" y="0"/>
+                </a:lnTo>
+                <a:lnTo>
+                  <a:pt x="278674" y="0"/>
+                </a:lnTo>
+                <a:lnTo>
+                  <a:pt x="293341" y="0"/>
+                </a:lnTo>
+                <a:lnTo>
+                  <a:pt x="308008" y="0"/>
+                </a:lnTo>
+                <a:lnTo>
+                  <a:pt x="322675" y="0"/>
+                </a:lnTo>
+                <a:lnTo>
+                  <a:pt x="337342" y="0"/>
+                </a:lnTo>
+                <a:lnTo>
+                  <a:pt x="352009" y="0"/>
+                </a:lnTo>
+                <a:lnTo>
+                  <a:pt x="366676" y="0"/>
+                </a:lnTo>
+                <a:lnTo>
+                  <a:pt x="381343" y="0"/>
+                </a:lnTo>
+                <a:lnTo>
+                  <a:pt x="396010" y="0"/>
+                </a:lnTo>
+                <a:lnTo>
+                  <a:pt x="410677" y="0"/>
+                </a:lnTo>
+                <a:lnTo>
+                  <a:pt x="425344" y="0"/>
+                </a:lnTo>
+                <a:lnTo>
+                  <a:pt x="440012" y="0"/>
+                </a:lnTo>
+                <a:lnTo>
+                  <a:pt x="454679" y="0"/>
+                </a:lnTo>
+                <a:lnTo>
+                  <a:pt x="469346" y="0"/>
+                </a:lnTo>
+                <a:lnTo>
+                  <a:pt x="484013" y="0"/>
+                </a:lnTo>
+                <a:lnTo>
+                  <a:pt x="498680" y="0"/>
+                </a:lnTo>
+                <a:lnTo>
+                  <a:pt x="513347" y="0"/>
+                </a:lnTo>
+                <a:lnTo>
+                  <a:pt x="528014" y="0"/>
+                </a:lnTo>
+                <a:lnTo>
+                  <a:pt x="542681" y="0"/>
+                </a:lnTo>
+                <a:lnTo>
+                  <a:pt x="557348" y="0"/>
+                </a:lnTo>
+                <a:lnTo>
+                  <a:pt x="572015" y="0"/>
+                </a:lnTo>
+                <a:lnTo>
+                  <a:pt x="586682" y="0"/>
+                </a:lnTo>
+                <a:lnTo>
+                  <a:pt x="601349" y="0"/>
+                </a:lnTo>
+                <a:lnTo>
+                  <a:pt x="616016" y="0"/>
+                </a:lnTo>
+                <a:lnTo>
+                  <a:pt x="630683" y="0"/>
+                </a:lnTo>
+                <a:lnTo>
+                  <a:pt x="645350" y="0"/>
+                </a:lnTo>
+                <a:lnTo>
+                  <a:pt x="660018" y="0"/>
+                </a:lnTo>
+                <a:lnTo>
+                  <a:pt x="674685" y="0"/>
+                </a:lnTo>
+                <a:lnTo>
+                  <a:pt x="689352" y="0"/>
+                </a:lnTo>
+                <a:lnTo>
+                  <a:pt x="704019" y="0"/>
+                </a:lnTo>
+                <a:lnTo>
+                  <a:pt x="718686" y="0"/>
+                </a:lnTo>
+                <a:lnTo>
+                  <a:pt x="733353" y="0"/>
+                </a:lnTo>
+                <a:lnTo>
+                  <a:pt x="748020" y="0"/>
+                </a:lnTo>
+                <a:lnTo>
+                  <a:pt x="762687" y="0"/>
+                </a:lnTo>
+                <a:lnTo>
+                  <a:pt x="777354" y="0"/>
+                </a:lnTo>
+                <a:lnTo>
+                  <a:pt x="792021" y="0"/>
+                </a:lnTo>
+                <a:lnTo>
+                  <a:pt x="806688" y="0"/>
+                </a:lnTo>
+                <a:lnTo>
+                  <a:pt x="821355" y="0"/>
+                </a:lnTo>
+                <a:lnTo>
+                  <a:pt x="836022" y="0"/>
+                </a:lnTo>
+                <a:lnTo>
+                  <a:pt x="850689" y="0"/>
+                </a:lnTo>
+                <a:lnTo>
+                  <a:pt x="865356" y="0"/>
+                </a:lnTo>
+                <a:lnTo>
+                  <a:pt x="880024" y="0"/>
+                </a:lnTo>
+                <a:lnTo>
+                  <a:pt x="894691" y="0"/>
+                </a:lnTo>
+                <a:lnTo>
+                  <a:pt x="909358" y="0"/>
+                </a:lnTo>
+                <a:lnTo>
+                  <a:pt x="924025" y="0"/>
+                </a:lnTo>
+                <a:lnTo>
+                  <a:pt x="938692" y="0"/>
+                </a:lnTo>
+                <a:lnTo>
+                  <a:pt x="953359" y="0"/>
+                </a:lnTo>
+                <a:lnTo>
+                  <a:pt x="968026" y="0"/>
+                </a:lnTo>
+                <a:lnTo>
+                  <a:pt x="982693" y="0"/>
+                </a:lnTo>
+                <a:lnTo>
+                  <a:pt x="997360" y="0"/>
+                </a:lnTo>
+                <a:lnTo>
+                  <a:pt x="1012027" y="0"/>
+                </a:lnTo>
+                <a:lnTo>
+                  <a:pt x="1026694" y="0"/>
+                </a:lnTo>
+                <a:lnTo>
+                  <a:pt x="1041361" y="0"/>
+                </a:lnTo>
+                <a:lnTo>
+                  <a:pt x="1056028" y="0"/>
+                </a:lnTo>
+                <a:lnTo>
+                  <a:pt x="1070695" y="0"/>
+                </a:lnTo>
+                <a:lnTo>
+                  <a:pt x="1085363" y="0"/>
+                </a:lnTo>
+                <a:lnTo>
+                  <a:pt x="1100030" y="0"/>
+                </a:lnTo>
+                <a:lnTo>
+                  <a:pt x="1114697" y="0"/>
+                </a:lnTo>
+                <a:lnTo>
+                  <a:pt x="1129364" y="0"/>
+                </a:lnTo>
+                <a:lnTo>
+                  <a:pt x="1144031" y="0"/>
+                </a:lnTo>
+                <a:lnTo>
+                  <a:pt x="1158698" y="0"/>
+                </a:lnTo>
+                <a:lnTo>
+                  <a:pt x="1173365" y="0"/>
+                </a:lnTo>
+                <a:lnTo>
+                  <a:pt x="1188032" y="0"/>
+                </a:lnTo>
+                <a:lnTo>
+                  <a:pt x="1202699" y="0"/>
+                </a:lnTo>
+                <a:lnTo>
+                  <a:pt x="1217366" y="0"/>
+                </a:lnTo>
+                <a:lnTo>
+                  <a:pt x="1232033" y="0"/>
+                </a:lnTo>
+                <a:lnTo>
+                  <a:pt x="1246700" y="0"/>
+                </a:lnTo>
+                <a:lnTo>
+                  <a:pt x="1261367" y="0"/>
+                </a:lnTo>
+                <a:lnTo>
+                  <a:pt x="1276034" y="0"/>
+                </a:lnTo>
+                <a:lnTo>
+                  <a:pt x="1290701" y="0"/>
+                </a:lnTo>
+                <a:lnTo>
+                  <a:pt x="1305369" y="0"/>
+                </a:lnTo>
+                <a:lnTo>
+                  <a:pt x="1320036" y="0"/>
+                </a:lnTo>
+                <a:lnTo>
+                  <a:pt x="1334703" y="0"/>
+                </a:lnTo>
+                <a:lnTo>
+                  <a:pt x="1349370" y="0"/>
+                </a:lnTo>
+                <a:lnTo>
+                  <a:pt x="1364037" y="0"/>
+                </a:lnTo>
+                <a:lnTo>
+                  <a:pt x="1378704" y="0"/>
+                </a:lnTo>
+                <a:lnTo>
+                  <a:pt x="1393371" y="0"/>
+                </a:lnTo>
+                <a:lnTo>
+                  <a:pt x="1408038" y="0"/>
+                </a:lnTo>
+                <a:lnTo>
+                  <a:pt x="1422705" y="0"/>
+                </a:lnTo>
+                <a:lnTo>
+                  <a:pt x="1437372" y="0"/>
+                </a:lnTo>
+                <a:lnTo>
+                  <a:pt x="1452039" y="0"/>
+                </a:lnTo>
+                <a:lnTo>
+                  <a:pt x="1466706" y="0"/>
+                </a:lnTo>
+                <a:lnTo>
+                  <a:pt x="1481373" y="0"/>
+                </a:lnTo>
+                <a:lnTo>
+                  <a:pt x="1496040" y="0"/>
+                </a:lnTo>
+                <a:lnTo>
+                  <a:pt x="1510707" y="0"/>
+                </a:lnTo>
+                <a:lnTo>
+                  <a:pt x="1525375" y="0"/>
+                </a:lnTo>
+                <a:lnTo>
+                  <a:pt x="1540042" y="0"/>
+                </a:lnTo>
+                <a:lnTo>
+                  <a:pt x="1554709" y="0"/>
+                </a:lnTo>
+                <a:lnTo>
+                  <a:pt x="1569376" y="0"/>
+                </a:lnTo>
+                <a:lnTo>
+                  <a:pt x="1584043" y="0"/>
+                </a:lnTo>
+                <a:lnTo>
+                  <a:pt x="1598710" y="0"/>
+                </a:lnTo>
+                <a:lnTo>
+                  <a:pt x="1613377" y="0"/>
+                </a:lnTo>
+                <a:lnTo>
+                  <a:pt x="1628044" y="0"/>
+                </a:lnTo>
+                <a:lnTo>
+                  <a:pt x="1642711" y="0"/>
+                </a:lnTo>
+                <a:lnTo>
+                  <a:pt x="1657378" y="0"/>
+                </a:lnTo>
+                <a:lnTo>
+                  <a:pt x="1672045" y="0"/>
+                </a:lnTo>
+                <a:lnTo>
+                  <a:pt x="1686712" y="0"/>
+                </a:lnTo>
+                <a:lnTo>
+                  <a:pt x="1701379" y="0"/>
+                </a:lnTo>
+                <a:lnTo>
+                  <a:pt x="1716046" y="0"/>
+                </a:lnTo>
+                <a:lnTo>
+                  <a:pt x="1730713" y="0"/>
+                </a:lnTo>
+                <a:lnTo>
+                  <a:pt x="1745381" y="0"/>
+                </a:lnTo>
+                <a:lnTo>
+                  <a:pt x="1760048" y="0"/>
+                </a:lnTo>
+                <a:lnTo>
+                  <a:pt x="1774715" y="0"/>
+                </a:lnTo>
+                <a:lnTo>
+                  <a:pt x="1789382" y="0"/>
+                </a:lnTo>
+                <a:lnTo>
+                  <a:pt x="1804049" y="0"/>
+                </a:lnTo>
+                <a:lnTo>
+                  <a:pt x="1818716" y="0"/>
+                </a:lnTo>
+                <a:lnTo>
+                  <a:pt x="1833383" y="0"/>
+                </a:lnTo>
+                <a:lnTo>
+                  <a:pt x="1848050" y="0"/>
+                </a:lnTo>
+                <a:lnTo>
+                  <a:pt x="1862717" y="0"/>
+                </a:lnTo>
+                <a:lnTo>
+                  <a:pt x="1877384" y="0"/>
+                </a:lnTo>
+                <a:lnTo>
+                  <a:pt x="1892051" y="0"/>
+                </a:lnTo>
+                <a:lnTo>
+                  <a:pt x="1906718" y="0"/>
+                </a:lnTo>
+                <a:lnTo>
+                  <a:pt x="1921385" y="0"/>
+                </a:lnTo>
+                <a:lnTo>
+                  <a:pt x="1936052" y="0"/>
+                </a:lnTo>
+                <a:lnTo>
+                  <a:pt x="1950720" y="0"/>
+                </a:lnTo>
+                <a:lnTo>
+                  <a:pt x="1965387" y="0"/>
+                </a:lnTo>
+                <a:lnTo>
+                  <a:pt x="1980054" y="0"/>
+                </a:lnTo>
+                <a:lnTo>
+                  <a:pt x="1994721" y="0"/>
+                </a:lnTo>
+                <a:lnTo>
+                  <a:pt x="2009388" y="0"/>
+                </a:lnTo>
+                <a:lnTo>
+                  <a:pt x="2024055" y="0"/>
+                </a:lnTo>
+                <a:lnTo>
+                  <a:pt x="2038722" y="0"/>
+                </a:lnTo>
+                <a:lnTo>
+                  <a:pt x="2053389" y="0"/>
+                </a:lnTo>
+                <a:lnTo>
+                  <a:pt x="2068056" y="0"/>
+                </a:lnTo>
+                <a:lnTo>
+                  <a:pt x="2082723" y="0"/>
+                </a:lnTo>
+                <a:lnTo>
+                  <a:pt x="2097390" y="0"/>
+                </a:lnTo>
+                <a:lnTo>
+                  <a:pt x="2112057" y="0"/>
+                </a:lnTo>
+                <a:lnTo>
+                  <a:pt x="2126724" y="0"/>
+                </a:lnTo>
+                <a:lnTo>
+                  <a:pt x="2141391" y="0"/>
+                </a:lnTo>
+                <a:lnTo>
+                  <a:pt x="2156058" y="0"/>
+                </a:lnTo>
+                <a:lnTo>
+                  <a:pt x="2170726" y="0"/>
+                </a:lnTo>
+                <a:lnTo>
+                  <a:pt x="2185393" y="0"/>
+                </a:lnTo>
+                <a:lnTo>
+                  <a:pt x="2200060" y="0"/>
+                </a:lnTo>
+                <a:lnTo>
+                  <a:pt x="2214727" y="0"/>
+                </a:lnTo>
+                <a:lnTo>
+                  <a:pt x="2229394" y="0"/>
+                </a:lnTo>
+                <a:lnTo>
+                  <a:pt x="2244061" y="0"/>
+                </a:lnTo>
+                <a:lnTo>
+                  <a:pt x="2258728" y="0"/>
+                </a:lnTo>
+                <a:lnTo>
+                  <a:pt x="2273395" y="0"/>
+                </a:lnTo>
+                <a:lnTo>
+                  <a:pt x="2288062" y="0"/>
+                </a:lnTo>
+                <a:lnTo>
+                  <a:pt x="2302729" y="0"/>
+                </a:lnTo>
+                <a:lnTo>
+                  <a:pt x="2317396" y="0"/>
+                </a:lnTo>
+                <a:lnTo>
+                  <a:pt x="2332063" y="0"/>
+                </a:lnTo>
+                <a:lnTo>
+                  <a:pt x="2346730" y="0"/>
+                </a:lnTo>
+                <a:lnTo>
+                  <a:pt x="2361397" y="0"/>
+                </a:lnTo>
+                <a:lnTo>
+                  <a:pt x="2376064" y="0"/>
+                </a:lnTo>
+                <a:lnTo>
+                  <a:pt x="2390732" y="0"/>
+                </a:lnTo>
+                <a:lnTo>
+                  <a:pt x="2405399" y="0"/>
+                </a:lnTo>
+                <a:lnTo>
+                  <a:pt x="2420066" y="0"/>
+                </a:lnTo>
+                <a:lnTo>
+                  <a:pt x="2434733" y="0"/>
+                </a:lnTo>
+                <a:lnTo>
+                  <a:pt x="2449400" y="0"/>
+                </a:lnTo>
+                <a:lnTo>
+                  <a:pt x="2464067" y="0"/>
+                </a:lnTo>
+                <a:lnTo>
+                  <a:pt x="2478734" y="0"/>
+                </a:lnTo>
+                <a:lnTo>
+                  <a:pt x="2493401" y="0"/>
+                </a:lnTo>
+                <a:lnTo>
+                  <a:pt x="2508068" y="0"/>
+                </a:lnTo>
+                <a:lnTo>
+                  <a:pt x="2522735" y="0"/>
+                </a:lnTo>
+                <a:lnTo>
+                  <a:pt x="2537402" y="0"/>
+                </a:lnTo>
+                <a:lnTo>
+                  <a:pt x="2552069" y="0"/>
+                </a:lnTo>
+                <a:lnTo>
+                  <a:pt x="2566736" y="0"/>
+                </a:lnTo>
+                <a:lnTo>
+                  <a:pt x="2581403" y="0"/>
+                </a:lnTo>
+                <a:lnTo>
+                  <a:pt x="2596070" y="0"/>
+                </a:lnTo>
+                <a:lnTo>
+                  <a:pt x="2610738" y="0"/>
+                </a:lnTo>
+                <a:lnTo>
+                  <a:pt x="2625405" y="0"/>
+                </a:lnTo>
+                <a:lnTo>
+                  <a:pt x="2640072" y="0"/>
+                </a:lnTo>
+                <a:lnTo>
+                  <a:pt x="2654739" y="0"/>
+                </a:lnTo>
+                <a:lnTo>
+                  <a:pt x="2669406" y="0"/>
+                </a:lnTo>
+                <a:lnTo>
+                  <a:pt x="2684073" y="0"/>
+                </a:lnTo>
+                <a:lnTo>
+                  <a:pt x="2698740" y="0"/>
+                </a:lnTo>
+                <a:lnTo>
+                  <a:pt x="2713407" y="0"/>
+                </a:lnTo>
+                <a:lnTo>
+                  <a:pt x="2728074" y="0"/>
+                </a:lnTo>
+                <a:lnTo>
+                  <a:pt x="2742741" y="0"/>
+                </a:lnTo>
+                <a:lnTo>
+                  <a:pt x="2757408" y="0"/>
+                </a:lnTo>
+                <a:lnTo>
+                  <a:pt x="2772075" y="0"/>
+                </a:lnTo>
+                <a:lnTo>
+                  <a:pt x="2786742" y="0"/>
+                </a:lnTo>
+                <a:lnTo>
+                  <a:pt x="2801409" y="0"/>
+                </a:lnTo>
+                <a:lnTo>
+                  <a:pt x="2816076" y="0"/>
+                </a:lnTo>
+                <a:lnTo>
+                  <a:pt x="2830744" y="0"/>
+                </a:lnTo>
+                <a:lnTo>
+                  <a:pt x="2845411" y="0"/>
+                </a:lnTo>
+                <a:lnTo>
+                  <a:pt x="2860078" y="0"/>
+                </a:lnTo>
+                <a:lnTo>
+                  <a:pt x="2874745" y="0"/>
+                </a:lnTo>
+                <a:lnTo>
+                  <a:pt x="2889412" y="0"/>
+                </a:lnTo>
+                <a:lnTo>
+                  <a:pt x="2904079" y="0"/>
+                </a:lnTo>
+                <a:lnTo>
+                  <a:pt x="2918746" y="0"/>
+                </a:lnTo>
+                <a:lnTo>
+                  <a:pt x="2933413" y="0"/>
+                </a:lnTo>
+                <a:lnTo>
+                  <a:pt x="2948080" y="0"/>
+                </a:lnTo>
+                <a:lnTo>
+                  <a:pt x="2962747" y="0"/>
+                </a:lnTo>
+                <a:lnTo>
+                  <a:pt x="2977414" y="0"/>
+                </a:lnTo>
+                <a:lnTo>
+                  <a:pt x="2992081" y="0"/>
+                </a:lnTo>
+                <a:lnTo>
+                  <a:pt x="3006748" y="0"/>
+                </a:lnTo>
+                <a:lnTo>
+                  <a:pt x="3021415" y="0"/>
+                </a:lnTo>
+                <a:lnTo>
+                  <a:pt x="3036083" y="0"/>
+                </a:lnTo>
+                <a:lnTo>
+                  <a:pt x="3050750" y="0"/>
+                </a:lnTo>
+                <a:lnTo>
+                  <a:pt x="3065417" y="0"/>
+                </a:lnTo>
+                <a:lnTo>
+                  <a:pt x="3080084" y="0"/>
+                </a:lnTo>
+                <a:lnTo>
+                  <a:pt x="3094751" y="0"/>
+                </a:lnTo>
+                <a:lnTo>
+                  <a:pt x="3109418" y="0"/>
+                </a:lnTo>
+                <a:lnTo>
+                  <a:pt x="3124085" y="0"/>
+                </a:lnTo>
+                <a:lnTo>
+                  <a:pt x="3138752" y="0"/>
+                </a:lnTo>
+                <a:lnTo>
+                  <a:pt x="3153419" y="0"/>
+                </a:lnTo>
+                <a:lnTo>
+                  <a:pt x="3168086" y="0"/>
+                </a:lnTo>
+                <a:lnTo>
+                  <a:pt x="3182753" y="0"/>
+                </a:lnTo>
+                <a:lnTo>
+                  <a:pt x="3197420" y="0"/>
+                </a:lnTo>
+                <a:lnTo>
+                  <a:pt x="3212087" y="0"/>
+                </a:lnTo>
+                <a:lnTo>
+                  <a:pt x="3226754" y="0"/>
+                </a:lnTo>
+                <a:lnTo>
+                  <a:pt x="3241421" y="0"/>
+                </a:lnTo>
+                <a:lnTo>
+                  <a:pt x="3256089" y="0"/>
+                </a:lnTo>
+                <a:lnTo>
+                  <a:pt x="3270756" y="0"/>
+                </a:lnTo>
+                <a:lnTo>
+                  <a:pt x="3285423" y="0"/>
+                </a:lnTo>
+                <a:lnTo>
+                  <a:pt x="3300090" y="0"/>
+                </a:lnTo>
+                <a:lnTo>
+                  <a:pt x="3314757" y="0"/>
+                </a:lnTo>
+                <a:lnTo>
+                  <a:pt x="3329424" y="0"/>
+                </a:lnTo>
+                <a:lnTo>
+                  <a:pt x="3344091" y="0"/>
+                </a:lnTo>
+                <a:lnTo>
+                  <a:pt x="3358758" y="0"/>
+                </a:lnTo>
+                <a:lnTo>
+                  <a:pt x="3373425" y="0"/>
+                </a:lnTo>
+                <a:lnTo>
+                  <a:pt x="3388092" y="0"/>
+                </a:lnTo>
+                <a:lnTo>
+                  <a:pt x="3402759" y="0"/>
+                </a:lnTo>
+                <a:lnTo>
+                  <a:pt x="3417426" y="0"/>
+                </a:lnTo>
+                <a:lnTo>
+                  <a:pt x="3432093" y="0"/>
+                </a:lnTo>
+                <a:lnTo>
+                  <a:pt x="3446760" y="0"/>
+                </a:lnTo>
+                <a:lnTo>
+                  <a:pt x="3461427" y="0"/>
+                </a:lnTo>
+                <a:lnTo>
+                  <a:pt x="3476095" y="0"/>
+                </a:lnTo>
+                <a:lnTo>
+                  <a:pt x="3490762" y="0"/>
+                </a:lnTo>
+                <a:lnTo>
+                  <a:pt x="3505429" y="0"/>
+                </a:lnTo>
+                <a:lnTo>
+                  <a:pt x="3520096" y="0"/>
+                </a:lnTo>
+                <a:lnTo>
+                  <a:pt x="3534763" y="0"/>
+                </a:lnTo>
+                <a:lnTo>
+                  <a:pt x="3549430" y="0"/>
+                </a:lnTo>
+                <a:lnTo>
+                  <a:pt x="3564097" y="0"/>
+                </a:lnTo>
+                <a:lnTo>
+                  <a:pt x="3578764" y="0"/>
+                </a:lnTo>
+                <a:lnTo>
+                  <a:pt x="3593431" y="0"/>
+                </a:lnTo>
+                <a:lnTo>
+                  <a:pt x="3608098" y="0"/>
+                </a:lnTo>
+                <a:lnTo>
+                  <a:pt x="3622765" y="0"/>
+                </a:lnTo>
+                <a:lnTo>
+                  <a:pt x="3637432" y="0"/>
+                </a:lnTo>
+                <a:lnTo>
+                  <a:pt x="3652099" y="0"/>
+                </a:lnTo>
+                <a:lnTo>
+                  <a:pt x="3666766" y="0"/>
+                </a:lnTo>
+                <a:lnTo>
+                  <a:pt x="3681433" y="0"/>
+                </a:lnTo>
+                <a:lnTo>
+                  <a:pt x="3696101" y="0"/>
+                </a:lnTo>
+                <a:lnTo>
+                  <a:pt x="3710768" y="0"/>
+                </a:lnTo>
+                <a:lnTo>
+                  <a:pt x="3725435" y="0"/>
+                </a:lnTo>
+                <a:lnTo>
+                  <a:pt x="3740102" y="0"/>
+                </a:lnTo>
+                <a:lnTo>
+                  <a:pt x="3754769" y="0"/>
+                </a:lnTo>
+                <a:lnTo>
+                  <a:pt x="3769436" y="0"/>
+                </a:lnTo>
+                <a:lnTo>
+                  <a:pt x="3784103" y="0"/>
+                </a:lnTo>
+                <a:lnTo>
+                  <a:pt x="3798770" y="0"/>
+                </a:lnTo>
+                <a:lnTo>
+                  <a:pt x="3813437" y="0"/>
+                </a:lnTo>
+                <a:lnTo>
+                  <a:pt x="3828104" y="0"/>
+                </a:lnTo>
+                <a:lnTo>
+                  <a:pt x="3842771" y="0"/>
+                </a:lnTo>
+                <a:lnTo>
+                  <a:pt x="3857438" y="0"/>
+                </a:lnTo>
+                <a:lnTo>
+                  <a:pt x="3872105" y="0"/>
+                </a:lnTo>
+                <a:lnTo>
+                  <a:pt x="3886772" y="0"/>
+                </a:lnTo>
+                <a:lnTo>
+                  <a:pt x="3901440" y="0"/>
+                </a:lnTo>
+                <a:lnTo>
+                  <a:pt x="3916107" y="0"/>
+                </a:lnTo>
+                <a:lnTo>
+                  <a:pt x="3930774" y="0"/>
+                </a:lnTo>
+                <a:lnTo>
+                  <a:pt x="3945441" y="0"/>
+                </a:lnTo>
+                <a:lnTo>
+                  <a:pt x="3960108" y="0"/>
+                </a:lnTo>
+                <a:lnTo>
+                  <a:pt x="3974775" y="0"/>
+                </a:lnTo>
+                <a:lnTo>
+                  <a:pt x="3989442" y="0"/>
+                </a:lnTo>
+                <a:lnTo>
+                  <a:pt x="4004109" y="0"/>
+                </a:lnTo>
+                <a:lnTo>
+                  <a:pt x="4018776" y="0"/>
+                </a:lnTo>
+                <a:lnTo>
+                  <a:pt x="4033443" y="0"/>
+                </a:lnTo>
+                <a:lnTo>
+                  <a:pt x="4048110" y="0"/>
+                </a:lnTo>
+                <a:lnTo>
+                  <a:pt x="4062777" y="0"/>
+                </a:lnTo>
+                <a:lnTo>
+                  <a:pt x="4077444" y="0"/>
+                </a:lnTo>
+                <a:lnTo>
+                  <a:pt x="4092111" y="0"/>
+                </a:lnTo>
+                <a:lnTo>
+                  <a:pt x="4106778" y="0"/>
+                </a:lnTo>
+                <a:lnTo>
+                  <a:pt x="4121446" y="0"/>
+                </a:lnTo>
+                <a:lnTo>
+                  <a:pt x="4136113" y="0"/>
+                </a:lnTo>
+                <a:lnTo>
+                  <a:pt x="4150780" y="0"/>
+                </a:lnTo>
+                <a:lnTo>
+                  <a:pt x="4165447" y="0"/>
+                </a:lnTo>
+                <a:lnTo>
+                  <a:pt x="4180114" y="0"/>
+                </a:lnTo>
+                <a:lnTo>
+                  <a:pt x="4194781" y="0"/>
+                </a:lnTo>
+                <a:lnTo>
+                  <a:pt x="4209448" y="0"/>
+                </a:lnTo>
+                <a:lnTo>
+                  <a:pt x="4224115" y="0"/>
+                </a:lnTo>
+                <a:lnTo>
+                  <a:pt x="4238782" y="0"/>
+                </a:lnTo>
+                <a:lnTo>
+                  <a:pt x="4253449" y="0"/>
+                </a:lnTo>
+                <a:lnTo>
+                  <a:pt x="4268116" y="0"/>
+                </a:lnTo>
+                <a:lnTo>
+                  <a:pt x="4282783" y="0"/>
+                </a:lnTo>
+                <a:lnTo>
+                  <a:pt x="4297450" y="0"/>
+                </a:lnTo>
+                <a:lnTo>
+                  <a:pt x="4312117" y="0"/>
+                </a:lnTo>
+                <a:lnTo>
+                  <a:pt x="4326784" y="0"/>
+                </a:lnTo>
+                <a:lnTo>
+                  <a:pt x="4341452" y="0"/>
+                </a:lnTo>
+                <a:lnTo>
+                  <a:pt x="4356119" y="0"/>
+                </a:lnTo>
+                <a:lnTo>
+                  <a:pt x="4370786" y="0"/>
+                </a:lnTo>
+                <a:lnTo>
+                  <a:pt x="4385453" y="0"/>
+                </a:lnTo>
+                <a:lnTo>
+                  <a:pt x="4400120" y="0"/>
+                </a:lnTo>
+                <a:lnTo>
+                  <a:pt x="4414787" y="0"/>
+                </a:lnTo>
+                <a:lnTo>
+                  <a:pt x="4429454" y="0"/>
+                </a:lnTo>
+                <a:lnTo>
+                  <a:pt x="4444121" y="0"/>
+                </a:lnTo>
+                <a:lnTo>
+                  <a:pt x="4458788" y="0"/>
+                </a:lnTo>
+                <a:lnTo>
+                  <a:pt x="4473455" y="0"/>
+                </a:lnTo>
+                <a:lnTo>
+                  <a:pt x="4488122" y="0"/>
+                </a:lnTo>
+                <a:lnTo>
+                  <a:pt x="4502789" y="0"/>
+                </a:lnTo>
+                <a:lnTo>
+                  <a:pt x="4517456" y="0"/>
+                </a:lnTo>
+                <a:lnTo>
+                  <a:pt x="4532123" y="0"/>
+                </a:lnTo>
+                <a:lnTo>
+                  <a:pt x="4546790" y="0"/>
+                </a:lnTo>
+                <a:lnTo>
+                  <a:pt x="4561458" y="0"/>
+                </a:lnTo>
+                <a:lnTo>
+                  <a:pt x="4576125" y="0"/>
+                </a:lnTo>
+                <a:lnTo>
+                  <a:pt x="4590792" y="0"/>
+                </a:lnTo>
+                <a:lnTo>
+                  <a:pt x="4605459" y="0"/>
+                </a:lnTo>
+                <a:lnTo>
+                  <a:pt x="4620126" y="0"/>
+                </a:lnTo>
+                <a:lnTo>
+                  <a:pt x="4634793" y="0"/>
+                </a:lnTo>
+                <a:lnTo>
+                  <a:pt x="4649460" y="0"/>
+                </a:lnTo>
+                <a:lnTo>
+                  <a:pt x="4664127" y="0"/>
+                </a:lnTo>
+                <a:lnTo>
+                  <a:pt x="4678794" y="0"/>
+                </a:lnTo>
+                <a:lnTo>
+                  <a:pt x="4693461" y="0"/>
+                </a:lnTo>
+                <a:lnTo>
+                  <a:pt x="4708128" y="0"/>
+                </a:lnTo>
+                <a:lnTo>
+                  <a:pt x="4722795" y="0"/>
+                </a:lnTo>
+                <a:lnTo>
+                  <a:pt x="4737462" y="0"/>
+                </a:lnTo>
+                <a:lnTo>
+                  <a:pt x="4752129" y="0"/>
+                </a:lnTo>
+                <a:lnTo>
+                  <a:pt x="4766796" y="0"/>
+                </a:lnTo>
+                <a:lnTo>
+                  <a:pt x="4781464" y="0"/>
+                </a:lnTo>
+                <a:lnTo>
+                  <a:pt x="4796131" y="0"/>
+                </a:lnTo>
+                <a:lnTo>
+                  <a:pt x="4810798" y="0"/>
+                </a:lnTo>
+                <a:lnTo>
+                  <a:pt x="4825465" y="0"/>
+                </a:lnTo>
+                <a:lnTo>
+                  <a:pt x="4840132" y="0"/>
+                </a:lnTo>
+                <a:lnTo>
+                  <a:pt x="4854799" y="0"/>
+                </a:lnTo>
+                <a:lnTo>
+                  <a:pt x="4869466" y="0"/>
+                </a:lnTo>
+                <a:lnTo>
+                  <a:pt x="4884133" y="0"/>
+                </a:lnTo>
+                <a:lnTo>
+                  <a:pt x="4898800" y="0"/>
+                </a:lnTo>
+                <a:lnTo>
+                  <a:pt x="4913467" y="0"/>
+                </a:lnTo>
+                <a:lnTo>
+                  <a:pt x="4928134" y="0"/>
+                </a:lnTo>
+                <a:lnTo>
+                  <a:pt x="4942801" y="0"/>
+                </a:lnTo>
+                <a:lnTo>
+                  <a:pt x="4957468" y="0"/>
+                </a:lnTo>
+                <a:lnTo>
+                  <a:pt x="4972135" y="0"/>
+                </a:lnTo>
+                <a:lnTo>
+                  <a:pt x="4986803" y="2743201"/>
+                </a:lnTo>
+                <a:lnTo>
+                  <a:pt x="5001470" y="2743201"/>
+                </a:lnTo>
+                <a:lnTo>
+                  <a:pt x="5016137" y="2743201"/>
+                </a:lnTo>
+                <a:lnTo>
+                  <a:pt x="5030804" y="2743201"/>
+                </a:lnTo>
+                <a:lnTo>
+                  <a:pt x="5045471" y="2743201"/>
+                </a:lnTo>
+                <a:lnTo>
+                  <a:pt x="5060138" y="2743201"/>
+                </a:lnTo>
+                <a:lnTo>
+                  <a:pt x="5074805" y="2743201"/>
+                </a:lnTo>
+                <a:lnTo>
+                  <a:pt x="5089472" y="2743201"/>
+                </a:lnTo>
+                <a:lnTo>
+                  <a:pt x="5104139" y="2743201"/>
+                </a:lnTo>
+                <a:lnTo>
+                  <a:pt x="5118806" y="2743201"/>
+                </a:lnTo>
+                <a:lnTo>
+                  <a:pt x="5133473" y="2743201"/>
+                </a:lnTo>
+                <a:lnTo>
+                  <a:pt x="5148140" y="2743201"/>
+                </a:lnTo>
+                <a:lnTo>
+                  <a:pt x="5162807" y="2743201"/>
+                </a:lnTo>
+                <a:lnTo>
+                  <a:pt x="5177474" y="2743201"/>
+                </a:lnTo>
+                <a:lnTo>
+                  <a:pt x="5192141" y="2743201"/>
+                </a:lnTo>
+                <a:lnTo>
+                  <a:pt x="5206809" y="2743201"/>
+                </a:lnTo>
+                <a:lnTo>
+                  <a:pt x="5221476" y="2743201"/>
+                </a:lnTo>
+                <a:lnTo>
+                  <a:pt x="5236143" y="2743201"/>
+                </a:lnTo>
+                <a:lnTo>
+                  <a:pt x="5250810" y="2743201"/>
+                </a:lnTo>
+                <a:lnTo>
+                  <a:pt x="5265477" y="2743201"/>
+                </a:lnTo>
+                <a:lnTo>
+                  <a:pt x="5280144" y="2743201"/>
+                </a:lnTo>
+                <a:lnTo>
+                  <a:pt x="5294811" y="2743201"/>
+                </a:lnTo>
+                <a:lnTo>
+                  <a:pt x="5309478" y="2743201"/>
+                </a:lnTo>
+                <a:lnTo>
+                  <a:pt x="5324145" y="2743201"/>
+                </a:lnTo>
+                <a:lnTo>
+                  <a:pt x="5338812" y="2743201"/>
+                </a:lnTo>
+                <a:lnTo>
+                  <a:pt x="5353479" y="2743201"/>
+                </a:lnTo>
+                <a:lnTo>
+                  <a:pt x="5368146" y="2743201"/>
+                </a:lnTo>
+                <a:lnTo>
+                  <a:pt x="5382813" y="2743201"/>
+                </a:lnTo>
+                <a:lnTo>
+                  <a:pt x="5397480" y="2743201"/>
+                </a:lnTo>
+                <a:lnTo>
+                  <a:pt x="5412147" y="2743201"/>
+                </a:lnTo>
+                <a:lnTo>
+                  <a:pt x="5426815" y="2743201"/>
+                </a:lnTo>
+                <a:lnTo>
+                  <a:pt x="5441482" y="2743201"/>
+                </a:lnTo>
+                <a:lnTo>
+                  <a:pt x="5456149" y="2743201"/>
+                </a:lnTo>
+                <a:lnTo>
+                  <a:pt x="5470816" y="2743201"/>
+                </a:lnTo>
+                <a:lnTo>
+                  <a:pt x="5485483" y="2743201"/>
+                </a:lnTo>
+                <a:lnTo>
+                  <a:pt x="5500150" y="2743201"/>
+                </a:lnTo>
+                <a:lnTo>
+                  <a:pt x="5514817" y="2743201"/>
+                </a:lnTo>
+                <a:lnTo>
+                  <a:pt x="5529484" y="2743201"/>
+                </a:lnTo>
+                <a:lnTo>
+                  <a:pt x="5544151" y="2743201"/>
+                </a:lnTo>
+                <a:lnTo>
+                  <a:pt x="5558818" y="2743201"/>
+                </a:lnTo>
+                <a:lnTo>
+                  <a:pt x="5573485" y="2743201"/>
+                </a:lnTo>
+                <a:lnTo>
+                  <a:pt x="5588152" y="2743201"/>
+                </a:lnTo>
+                <a:lnTo>
+                  <a:pt x="5602819" y="2743201"/>
+                </a:lnTo>
+                <a:lnTo>
+                  <a:pt x="5617486" y="2743201"/>
+                </a:lnTo>
+                <a:lnTo>
+                  <a:pt x="5632153" y="2743201"/>
+                </a:lnTo>
+                <a:lnTo>
+                  <a:pt x="5646821" y="2743201"/>
+                </a:lnTo>
+                <a:lnTo>
+                  <a:pt x="5661488" y="2743201"/>
+                </a:lnTo>
+                <a:lnTo>
+                  <a:pt x="5676155" y="2743201"/>
+                </a:lnTo>
+                <a:lnTo>
+                  <a:pt x="5690822" y="2743201"/>
+                </a:lnTo>
+                <a:lnTo>
+                  <a:pt x="5705489" y="2743201"/>
+                </a:lnTo>
+                <a:lnTo>
+                  <a:pt x="5720156" y="2743201"/>
+                </a:lnTo>
+                <a:lnTo>
+                  <a:pt x="5734823" y="2743201"/>
+                </a:lnTo>
+                <a:lnTo>
+                  <a:pt x="5749490" y="2743201"/>
+                </a:lnTo>
+                <a:lnTo>
+                  <a:pt x="5764157" y="2743201"/>
+                </a:lnTo>
+                <a:lnTo>
+                  <a:pt x="5778824" y="2743201"/>
+                </a:lnTo>
+                <a:lnTo>
+                  <a:pt x="5793491" y="2743201"/>
+                </a:lnTo>
+                <a:lnTo>
+                  <a:pt x="5808158" y="2743201"/>
+                </a:lnTo>
+                <a:lnTo>
+                  <a:pt x="5822825" y="2743201"/>
+                </a:lnTo>
+                <a:lnTo>
+                  <a:pt x="5837492" y="2743201"/>
+                </a:lnTo>
+                <a:lnTo>
+                  <a:pt x="5852160" y="2743201"/>
+                </a:lnTo>
+                <a:lnTo>
+                  <a:pt x="5852160" y="2743201"/>
+                </a:lnTo>
+                <a:lnTo>
+                  <a:pt x="5837492" y="2743201"/>
+                </a:lnTo>
+                <a:lnTo>
+                  <a:pt x="5822825" y="2743201"/>
+                </a:lnTo>
+                <a:lnTo>
+                  <a:pt x="5808158" y="2743201"/>
+                </a:lnTo>
+                <a:lnTo>
+                  <a:pt x="5793491" y="2743201"/>
+                </a:lnTo>
+                <a:lnTo>
+                  <a:pt x="5778824" y="2743201"/>
+                </a:lnTo>
+                <a:lnTo>
+                  <a:pt x="5764157" y="2743201"/>
+                </a:lnTo>
+                <a:lnTo>
+                  <a:pt x="5749490" y="2743201"/>
+                </a:lnTo>
+                <a:lnTo>
+                  <a:pt x="5734823" y="2743201"/>
+                </a:lnTo>
+                <a:lnTo>
+                  <a:pt x="5720156" y="2743201"/>
+                </a:lnTo>
+                <a:lnTo>
+                  <a:pt x="5705489" y="2743201"/>
+                </a:lnTo>
+                <a:lnTo>
+                  <a:pt x="5690822" y="2743201"/>
+                </a:lnTo>
+                <a:lnTo>
+                  <a:pt x="5676155" y="2743201"/>
+                </a:lnTo>
+                <a:lnTo>
+                  <a:pt x="5661488" y="2743201"/>
+                </a:lnTo>
+                <a:lnTo>
+                  <a:pt x="5646821" y="2743201"/>
+                </a:lnTo>
+                <a:lnTo>
+                  <a:pt x="5632153" y="2743201"/>
+                </a:lnTo>
+                <a:lnTo>
+                  <a:pt x="5617486" y="2743201"/>
+                </a:lnTo>
+                <a:lnTo>
+                  <a:pt x="5602819" y="2743201"/>
+                </a:lnTo>
+                <a:lnTo>
+                  <a:pt x="5588152" y="2743201"/>
+                </a:lnTo>
+                <a:lnTo>
+                  <a:pt x="5573485" y="2743201"/>
+                </a:lnTo>
+                <a:lnTo>
+                  <a:pt x="5558818" y="2743201"/>
+                </a:lnTo>
+                <a:lnTo>
+                  <a:pt x="5544151" y="2743201"/>
+                </a:lnTo>
+                <a:lnTo>
+                  <a:pt x="5529484" y="2743201"/>
+                </a:lnTo>
+                <a:lnTo>
+                  <a:pt x="5514817" y="2743201"/>
+                </a:lnTo>
+                <a:lnTo>
+                  <a:pt x="5500150" y="2743201"/>
+                </a:lnTo>
+                <a:lnTo>
+                  <a:pt x="5485483" y="2743201"/>
+                </a:lnTo>
+                <a:lnTo>
+                  <a:pt x="5470816" y="2743201"/>
+                </a:lnTo>
+                <a:lnTo>
+                  <a:pt x="5456149" y="2743201"/>
+                </a:lnTo>
+                <a:lnTo>
+                  <a:pt x="5441482" y="2743201"/>
+                </a:lnTo>
+                <a:lnTo>
+                  <a:pt x="5426815" y="2743201"/>
+                </a:lnTo>
+                <a:lnTo>
+                  <a:pt x="5412147" y="2743201"/>
+                </a:lnTo>
+                <a:lnTo>
+                  <a:pt x="5397480" y="2743201"/>
+                </a:lnTo>
+                <a:lnTo>
+                  <a:pt x="5382813" y="2743201"/>
+                </a:lnTo>
+                <a:lnTo>
+                  <a:pt x="5368146" y="2743201"/>
+                </a:lnTo>
+                <a:lnTo>
+                  <a:pt x="5353479" y="2743201"/>
+                </a:lnTo>
+                <a:lnTo>
+                  <a:pt x="5338812" y="2743201"/>
+                </a:lnTo>
+                <a:lnTo>
+                  <a:pt x="5324145" y="2743201"/>
+                </a:lnTo>
+                <a:lnTo>
+                  <a:pt x="5309478" y="2743201"/>
+                </a:lnTo>
+                <a:lnTo>
+                  <a:pt x="5294811" y="2743201"/>
+                </a:lnTo>
+                <a:lnTo>
+                  <a:pt x="5280144" y="2743201"/>
+                </a:lnTo>
+                <a:lnTo>
+                  <a:pt x="5265477" y="2743201"/>
+                </a:lnTo>
+                <a:lnTo>
+                  <a:pt x="5250810" y="2743201"/>
+                </a:lnTo>
+                <a:lnTo>
+                  <a:pt x="5236143" y="2743201"/>
+                </a:lnTo>
+                <a:lnTo>
+                  <a:pt x="5221476" y="2743201"/>
+                </a:lnTo>
+                <a:lnTo>
+                  <a:pt x="5206809" y="2743201"/>
+                </a:lnTo>
+                <a:lnTo>
+                  <a:pt x="5192141" y="2743201"/>
+                </a:lnTo>
+                <a:lnTo>
+                  <a:pt x="5177474" y="2743201"/>
+                </a:lnTo>
+                <a:lnTo>
+                  <a:pt x="5162807" y="2743201"/>
+                </a:lnTo>
+                <a:lnTo>
+                  <a:pt x="5148140" y="2743201"/>
+                </a:lnTo>
+                <a:lnTo>
+                  <a:pt x="5133473" y="2743201"/>
+                </a:lnTo>
+                <a:lnTo>
+                  <a:pt x="5118806" y="2743201"/>
+                </a:lnTo>
+                <a:lnTo>
+                  <a:pt x="5104139" y="2743201"/>
+                </a:lnTo>
+                <a:lnTo>
+                  <a:pt x="5089472" y="2743201"/>
+                </a:lnTo>
+                <a:lnTo>
+                  <a:pt x="5074805" y="2743201"/>
+                </a:lnTo>
+                <a:lnTo>
+                  <a:pt x="5060138" y="2743201"/>
+                </a:lnTo>
+                <a:lnTo>
+                  <a:pt x="5045471" y="2743201"/>
+                </a:lnTo>
+                <a:lnTo>
+                  <a:pt x="5030804" y="2743201"/>
+                </a:lnTo>
+                <a:lnTo>
+                  <a:pt x="5016137" y="2743201"/>
+                </a:lnTo>
+                <a:lnTo>
+                  <a:pt x="5001470" y="2743201"/>
+                </a:lnTo>
+                <a:lnTo>
+                  <a:pt x="4986803" y="2743201"/>
+                </a:lnTo>
+                <a:lnTo>
+                  <a:pt x="4972135" y="2743201"/>
+                </a:lnTo>
+                <a:lnTo>
+                  <a:pt x="4957468" y="2743201"/>
+                </a:lnTo>
+                <a:lnTo>
+                  <a:pt x="4942801" y="2743201"/>
+                </a:lnTo>
+                <a:lnTo>
+                  <a:pt x="4928134" y="2743201"/>
+                </a:lnTo>
+                <a:lnTo>
+                  <a:pt x="4913467" y="2743201"/>
+                </a:lnTo>
+                <a:lnTo>
+                  <a:pt x="4898800" y="2743201"/>
+                </a:lnTo>
+                <a:lnTo>
+                  <a:pt x="4884133" y="2743201"/>
+                </a:lnTo>
+                <a:lnTo>
+                  <a:pt x="4869466" y="2743201"/>
+                </a:lnTo>
+                <a:lnTo>
+                  <a:pt x="4854799" y="2743201"/>
+                </a:lnTo>
+                <a:lnTo>
+                  <a:pt x="4840132" y="2743201"/>
+                </a:lnTo>
+                <a:lnTo>
+                  <a:pt x="4825465" y="2743201"/>
+                </a:lnTo>
+                <a:lnTo>
+                  <a:pt x="4810798" y="2743201"/>
+                </a:lnTo>
+                <a:lnTo>
+                  <a:pt x="4796131" y="2743201"/>
+                </a:lnTo>
+                <a:lnTo>
+                  <a:pt x="4781464" y="2743201"/>
+                </a:lnTo>
+                <a:lnTo>
+                  <a:pt x="4766796" y="2743201"/>
+                </a:lnTo>
+                <a:lnTo>
+                  <a:pt x="4752129" y="2743201"/>
+                </a:lnTo>
+                <a:lnTo>
+                  <a:pt x="4737462" y="2743201"/>
+                </a:lnTo>
+                <a:lnTo>
+                  <a:pt x="4722795" y="2743201"/>
+                </a:lnTo>
+                <a:lnTo>
+                  <a:pt x="4708128" y="2743201"/>
+                </a:lnTo>
+                <a:lnTo>
+                  <a:pt x="4693461" y="2743201"/>
+                </a:lnTo>
+                <a:lnTo>
+                  <a:pt x="4678794" y="2743201"/>
+                </a:lnTo>
+                <a:lnTo>
+                  <a:pt x="4664127" y="2743201"/>
+                </a:lnTo>
+                <a:lnTo>
+                  <a:pt x="4649460" y="2743201"/>
+                </a:lnTo>
+                <a:lnTo>
+                  <a:pt x="4634793" y="2743201"/>
+                </a:lnTo>
+                <a:lnTo>
+                  <a:pt x="4620126" y="2743201"/>
+                </a:lnTo>
+                <a:lnTo>
+                  <a:pt x="4605459" y="2743201"/>
+                </a:lnTo>
+                <a:lnTo>
+                  <a:pt x="4590792" y="2743201"/>
+                </a:lnTo>
+                <a:lnTo>
+                  <a:pt x="4576125" y="2743201"/>
+                </a:lnTo>
+                <a:lnTo>
+                  <a:pt x="4561458" y="2743201"/>
+                </a:lnTo>
+                <a:lnTo>
+                  <a:pt x="4546790" y="2743201"/>
+                </a:lnTo>
+                <a:lnTo>
+                  <a:pt x="4532123" y="2743201"/>
+                </a:lnTo>
+                <a:lnTo>
+                  <a:pt x="4517456" y="2743201"/>
+                </a:lnTo>
+                <a:lnTo>
+                  <a:pt x="4502789" y="2743201"/>
+                </a:lnTo>
+                <a:lnTo>
+                  <a:pt x="4488122" y="2743201"/>
+                </a:lnTo>
+                <a:lnTo>
+                  <a:pt x="4473455" y="2743201"/>
+                </a:lnTo>
+                <a:lnTo>
+                  <a:pt x="4458788" y="2743201"/>
+                </a:lnTo>
+                <a:lnTo>
+                  <a:pt x="4444121" y="2743201"/>
+                </a:lnTo>
+                <a:lnTo>
+                  <a:pt x="4429454" y="2743201"/>
+                </a:lnTo>
+                <a:lnTo>
+                  <a:pt x="4414787" y="2743201"/>
+                </a:lnTo>
+                <a:lnTo>
+                  <a:pt x="4400120" y="2743201"/>
+                </a:lnTo>
+                <a:lnTo>
+                  <a:pt x="4385453" y="2743201"/>
+                </a:lnTo>
+                <a:lnTo>
+                  <a:pt x="4370786" y="2743201"/>
+                </a:lnTo>
+                <a:lnTo>
+                  <a:pt x="4356119" y="2743201"/>
+                </a:lnTo>
+                <a:lnTo>
+                  <a:pt x="4341452" y="2743201"/>
+                </a:lnTo>
+                <a:lnTo>
+                  <a:pt x="4326784" y="2743201"/>
+                </a:lnTo>
+                <a:lnTo>
+                  <a:pt x="4312117" y="2743201"/>
+                </a:lnTo>
+                <a:lnTo>
+                  <a:pt x="4297450" y="2743201"/>
+                </a:lnTo>
+                <a:lnTo>
+                  <a:pt x="4282783" y="2743201"/>
+                </a:lnTo>
+                <a:lnTo>
+                  <a:pt x="4268116" y="2743201"/>
+                </a:lnTo>
+                <a:lnTo>
+                  <a:pt x="4253449" y="2743201"/>
+                </a:lnTo>
+                <a:lnTo>
+                  <a:pt x="4238782" y="2743201"/>
+                </a:lnTo>
+                <a:lnTo>
+                  <a:pt x="4224115" y="2743201"/>
+                </a:lnTo>
+                <a:lnTo>
+                  <a:pt x="4209448" y="2743201"/>
+                </a:lnTo>
+                <a:lnTo>
+                  <a:pt x="4194781" y="2743201"/>
+                </a:lnTo>
+                <a:lnTo>
+                  <a:pt x="4180114" y="2743201"/>
+                </a:lnTo>
+                <a:lnTo>
+                  <a:pt x="4165447" y="2743201"/>
+                </a:lnTo>
+                <a:lnTo>
+                  <a:pt x="4150780" y="2743201"/>
+                </a:lnTo>
+                <a:lnTo>
+                  <a:pt x="4136113" y="2743201"/>
+                </a:lnTo>
+                <a:lnTo>
+                  <a:pt x="4121446" y="2743201"/>
+                </a:lnTo>
+                <a:lnTo>
+                  <a:pt x="4106778" y="2743201"/>
+                </a:lnTo>
+                <a:lnTo>
+                  <a:pt x="4092111" y="2743201"/>
+                </a:lnTo>
+                <a:lnTo>
+                  <a:pt x="4077444" y="2743201"/>
+                </a:lnTo>
+                <a:lnTo>
+                  <a:pt x="4062777" y="2743201"/>
+                </a:lnTo>
+                <a:lnTo>
+                  <a:pt x="4048110" y="2743201"/>
+                </a:lnTo>
+                <a:lnTo>
+                  <a:pt x="4033443" y="2743201"/>
+                </a:lnTo>
+                <a:lnTo>
+                  <a:pt x="4018776" y="2743201"/>
+                </a:lnTo>
+                <a:lnTo>
+                  <a:pt x="4004109" y="2743201"/>
+                </a:lnTo>
+                <a:lnTo>
+                  <a:pt x="3989442" y="2743201"/>
+                </a:lnTo>
+                <a:lnTo>
+                  <a:pt x="3974775" y="2743201"/>
+                </a:lnTo>
+                <a:lnTo>
+                  <a:pt x="3960108" y="2743201"/>
+                </a:lnTo>
+                <a:lnTo>
+                  <a:pt x="3945441" y="2743201"/>
+                </a:lnTo>
+                <a:lnTo>
+                  <a:pt x="3930774" y="2743201"/>
+                </a:lnTo>
+                <a:lnTo>
+                  <a:pt x="3916107" y="2743201"/>
+                </a:lnTo>
+                <a:lnTo>
+                  <a:pt x="3901440" y="2743201"/>
+                </a:lnTo>
+                <a:lnTo>
+                  <a:pt x="3886772" y="2743201"/>
+                </a:lnTo>
+                <a:lnTo>
+                  <a:pt x="3872105" y="2743201"/>
+                </a:lnTo>
+                <a:lnTo>
+                  <a:pt x="3857438" y="2743201"/>
+                </a:lnTo>
+                <a:lnTo>
+                  <a:pt x="3842771" y="2743201"/>
+                </a:lnTo>
+                <a:lnTo>
+                  <a:pt x="3828104" y="2743201"/>
+                </a:lnTo>
+                <a:lnTo>
+                  <a:pt x="3813437" y="2743201"/>
+                </a:lnTo>
+                <a:lnTo>
+                  <a:pt x="3798770" y="2743201"/>
+                </a:lnTo>
+                <a:lnTo>
+                  <a:pt x="3784103" y="2743201"/>
+                </a:lnTo>
+                <a:lnTo>
+                  <a:pt x="3769436" y="2743201"/>
+                </a:lnTo>
+                <a:lnTo>
+                  <a:pt x="3754769" y="2743201"/>
+                </a:lnTo>
+                <a:lnTo>
+                  <a:pt x="3740102" y="2743201"/>
+                </a:lnTo>
+                <a:lnTo>
+                  <a:pt x="3725435" y="2743201"/>
+                </a:lnTo>
+                <a:lnTo>
+                  <a:pt x="3710768" y="2743201"/>
+                </a:lnTo>
+                <a:lnTo>
+                  <a:pt x="3696101" y="2743201"/>
+                </a:lnTo>
+                <a:lnTo>
+                  <a:pt x="3681433" y="2743201"/>
+                </a:lnTo>
+                <a:lnTo>
+                  <a:pt x="3666766" y="2743201"/>
+                </a:lnTo>
+                <a:lnTo>
+                  <a:pt x="3652099" y="2743201"/>
+                </a:lnTo>
+                <a:lnTo>
+                  <a:pt x="3637432" y="2743201"/>
+                </a:lnTo>
+                <a:lnTo>
+                  <a:pt x="3622765" y="2743201"/>
+                </a:lnTo>
+                <a:lnTo>
+                  <a:pt x="3608098" y="2743201"/>
+                </a:lnTo>
+                <a:lnTo>
+                  <a:pt x="3593431" y="2743201"/>
+                </a:lnTo>
+                <a:lnTo>
+                  <a:pt x="3578764" y="2743201"/>
+                </a:lnTo>
+                <a:lnTo>
+                  <a:pt x="3564097" y="2743201"/>
+                </a:lnTo>
+                <a:lnTo>
+                  <a:pt x="3549430" y="2743201"/>
+                </a:lnTo>
+                <a:lnTo>
+                  <a:pt x="3534763" y="2743201"/>
+                </a:lnTo>
+                <a:lnTo>
+                  <a:pt x="3520096" y="2743201"/>
+                </a:lnTo>
+                <a:lnTo>
+                  <a:pt x="3505429" y="2743201"/>
+                </a:lnTo>
+                <a:lnTo>
+                  <a:pt x="3490762" y="2743201"/>
+                </a:lnTo>
+                <a:lnTo>
+                  <a:pt x="3476095" y="2743201"/>
+                </a:lnTo>
+                <a:lnTo>
+                  <a:pt x="3461427" y="2743201"/>
+                </a:lnTo>
+                <a:lnTo>
+                  <a:pt x="3446760" y="2743201"/>
+                </a:lnTo>
+                <a:lnTo>
+                  <a:pt x="3432093" y="2743201"/>
+                </a:lnTo>
+                <a:lnTo>
+                  <a:pt x="3417426" y="2743201"/>
+                </a:lnTo>
+                <a:lnTo>
+                  <a:pt x="3402759" y="2743201"/>
+                </a:lnTo>
+                <a:lnTo>
+                  <a:pt x="3388092" y="2743201"/>
+                </a:lnTo>
+                <a:lnTo>
+                  <a:pt x="3373425" y="2743201"/>
+                </a:lnTo>
+                <a:lnTo>
+                  <a:pt x="3358758" y="2743201"/>
+                </a:lnTo>
+                <a:lnTo>
+                  <a:pt x="3344091" y="2743201"/>
+                </a:lnTo>
+                <a:lnTo>
+                  <a:pt x="3329424" y="2743201"/>
+                </a:lnTo>
+                <a:lnTo>
+                  <a:pt x="3314757" y="2743201"/>
+                </a:lnTo>
+                <a:lnTo>
+                  <a:pt x="3300090" y="2743201"/>
+                </a:lnTo>
+                <a:lnTo>
+                  <a:pt x="3285423" y="2743201"/>
+                </a:lnTo>
+                <a:lnTo>
+                  <a:pt x="3270756" y="2743201"/>
+                </a:lnTo>
+                <a:lnTo>
+                  <a:pt x="3256089" y="2743201"/>
+                </a:lnTo>
+                <a:lnTo>
+                  <a:pt x="3241421" y="2743201"/>
+                </a:lnTo>
+                <a:lnTo>
+                  <a:pt x="3226754" y="2743201"/>
+                </a:lnTo>
+                <a:lnTo>
+                  <a:pt x="3212087" y="2743201"/>
+                </a:lnTo>
+                <a:lnTo>
+                  <a:pt x="3197420" y="2743201"/>
+                </a:lnTo>
+                <a:lnTo>
+                  <a:pt x="3182753" y="2743201"/>
+                </a:lnTo>
+                <a:lnTo>
+                  <a:pt x="3168086" y="2743201"/>
+                </a:lnTo>
+                <a:lnTo>
+                  <a:pt x="3153419" y="2743201"/>
+                </a:lnTo>
+                <a:lnTo>
+                  <a:pt x="3138752" y="2743201"/>
+                </a:lnTo>
+                <a:lnTo>
+                  <a:pt x="3124085" y="2743201"/>
+                </a:lnTo>
+                <a:lnTo>
+                  <a:pt x="3109418" y="2743201"/>
+                </a:lnTo>
+                <a:lnTo>
+                  <a:pt x="3094751" y="2743201"/>
+                </a:lnTo>
+                <a:lnTo>
+                  <a:pt x="3080084" y="2743201"/>
+                </a:lnTo>
+                <a:lnTo>
+                  <a:pt x="3065417" y="2743201"/>
+                </a:lnTo>
+                <a:lnTo>
+                  <a:pt x="3050750" y="2743201"/>
+                </a:lnTo>
+                <a:lnTo>
+                  <a:pt x="3036083" y="2743201"/>
+                </a:lnTo>
+                <a:lnTo>
+                  <a:pt x="3021415" y="2743201"/>
+                </a:lnTo>
+                <a:lnTo>
+                  <a:pt x="3006748" y="2743201"/>
+                </a:lnTo>
+                <a:lnTo>
+                  <a:pt x="2992081" y="2743201"/>
+                </a:lnTo>
+                <a:lnTo>
+                  <a:pt x="2977414" y="2743201"/>
+                </a:lnTo>
+                <a:lnTo>
+                  <a:pt x="2962747" y="2743201"/>
+                </a:lnTo>
+                <a:lnTo>
+                  <a:pt x="2948080" y="2743201"/>
+                </a:lnTo>
+                <a:lnTo>
+                  <a:pt x="2933413" y="2743201"/>
+                </a:lnTo>
+                <a:lnTo>
+                  <a:pt x="2918746" y="2743201"/>
+                </a:lnTo>
+                <a:lnTo>
+                  <a:pt x="2904079" y="2743201"/>
+                </a:lnTo>
+                <a:lnTo>
+                  <a:pt x="2889412" y="2743201"/>
+                </a:lnTo>
+                <a:lnTo>
+                  <a:pt x="2874745" y="2743201"/>
+                </a:lnTo>
+                <a:lnTo>
+                  <a:pt x="2860078" y="2743201"/>
+                </a:lnTo>
+                <a:lnTo>
+                  <a:pt x="2845411" y="2743201"/>
+                </a:lnTo>
+                <a:lnTo>
+                  <a:pt x="2830744" y="2743201"/>
+                </a:lnTo>
+                <a:lnTo>
+                  <a:pt x="2816076" y="2743201"/>
+                </a:lnTo>
+                <a:lnTo>
+                  <a:pt x="2801409" y="2743201"/>
+                </a:lnTo>
+                <a:lnTo>
+                  <a:pt x="2786742" y="2743201"/>
+                </a:lnTo>
+                <a:lnTo>
+                  <a:pt x="2772075" y="2743201"/>
+                </a:lnTo>
+                <a:lnTo>
+                  <a:pt x="2757408" y="2743201"/>
+                </a:lnTo>
+                <a:lnTo>
+                  <a:pt x="2742741" y="2743201"/>
+                </a:lnTo>
+                <a:lnTo>
+                  <a:pt x="2728074" y="2743201"/>
+                </a:lnTo>
+                <a:lnTo>
+                  <a:pt x="2713407" y="2743201"/>
+                </a:lnTo>
+                <a:lnTo>
+                  <a:pt x="2698740" y="2743201"/>
+                </a:lnTo>
+                <a:lnTo>
+                  <a:pt x="2684073" y="2743201"/>
+                </a:lnTo>
+                <a:lnTo>
+                  <a:pt x="2669406" y="2743201"/>
+                </a:lnTo>
+                <a:lnTo>
+                  <a:pt x="2654739" y="2743201"/>
+                </a:lnTo>
+                <a:lnTo>
+                  <a:pt x="2640072" y="2743201"/>
+                </a:lnTo>
+                <a:lnTo>
+                  <a:pt x="2625405" y="2743201"/>
+                </a:lnTo>
+                <a:lnTo>
+                  <a:pt x="2610738" y="2743201"/>
+                </a:lnTo>
+                <a:lnTo>
+                  <a:pt x="2596070" y="2743201"/>
+                </a:lnTo>
+                <a:lnTo>
+                  <a:pt x="2581403" y="2743201"/>
+                </a:lnTo>
+                <a:lnTo>
+                  <a:pt x="2566736" y="2743201"/>
+                </a:lnTo>
+                <a:lnTo>
+                  <a:pt x="2552069" y="2743201"/>
+                </a:lnTo>
+                <a:lnTo>
+                  <a:pt x="2537402" y="2743201"/>
+                </a:lnTo>
+                <a:lnTo>
+                  <a:pt x="2522735" y="2743201"/>
+                </a:lnTo>
+                <a:lnTo>
+                  <a:pt x="2508068" y="2743201"/>
+                </a:lnTo>
+                <a:lnTo>
+                  <a:pt x="2493401" y="2743201"/>
+                </a:lnTo>
+                <a:lnTo>
+                  <a:pt x="2478734" y="2743201"/>
+                </a:lnTo>
+                <a:lnTo>
+                  <a:pt x="2464067" y="2743201"/>
+                </a:lnTo>
+                <a:lnTo>
+                  <a:pt x="2449400" y="2743201"/>
+                </a:lnTo>
+                <a:lnTo>
+                  <a:pt x="2434733" y="2743201"/>
+                </a:lnTo>
+                <a:lnTo>
+                  <a:pt x="2420066" y="2743201"/>
+                </a:lnTo>
+                <a:lnTo>
+                  <a:pt x="2405399" y="2743201"/>
+                </a:lnTo>
+                <a:lnTo>
+                  <a:pt x="2390732" y="2743201"/>
+                </a:lnTo>
+                <a:lnTo>
+                  <a:pt x="2376064" y="2743201"/>
+                </a:lnTo>
+                <a:lnTo>
+                  <a:pt x="2361397" y="2743201"/>
+                </a:lnTo>
+                <a:lnTo>
+                  <a:pt x="2346730" y="2743201"/>
+                </a:lnTo>
+                <a:lnTo>
+                  <a:pt x="2332063" y="2743201"/>
+                </a:lnTo>
+                <a:lnTo>
+                  <a:pt x="2317396" y="2743201"/>
+                </a:lnTo>
+                <a:lnTo>
+                  <a:pt x="2302729" y="2743201"/>
+                </a:lnTo>
+                <a:lnTo>
+                  <a:pt x="2288062" y="2743201"/>
+                </a:lnTo>
+                <a:lnTo>
+                  <a:pt x="2273395" y="2743201"/>
+                </a:lnTo>
+                <a:lnTo>
+                  <a:pt x="2258728" y="2743201"/>
+                </a:lnTo>
+                <a:lnTo>
+                  <a:pt x="2244061" y="2743201"/>
+                </a:lnTo>
+                <a:lnTo>
+                  <a:pt x="2229394" y="2743201"/>
+                </a:lnTo>
+                <a:lnTo>
+                  <a:pt x="2214727" y="2743201"/>
+                </a:lnTo>
+                <a:lnTo>
+                  <a:pt x="2200060" y="2743201"/>
+                </a:lnTo>
+                <a:lnTo>
+                  <a:pt x="2185393" y="2743201"/>
+                </a:lnTo>
+                <a:lnTo>
+                  <a:pt x="2170726" y="2743201"/>
+                </a:lnTo>
+                <a:lnTo>
+                  <a:pt x="2156058" y="2743201"/>
+                </a:lnTo>
+                <a:lnTo>
+                  <a:pt x="2141391" y="2743201"/>
+                </a:lnTo>
+                <a:lnTo>
+                  <a:pt x="2126724" y="2743201"/>
+                </a:lnTo>
+                <a:lnTo>
+                  <a:pt x="2112057" y="2743201"/>
+                </a:lnTo>
+                <a:lnTo>
+                  <a:pt x="2097390" y="2743201"/>
+                </a:lnTo>
+                <a:lnTo>
+                  <a:pt x="2082723" y="2743201"/>
+                </a:lnTo>
+                <a:lnTo>
+                  <a:pt x="2068056" y="2743201"/>
+                </a:lnTo>
+                <a:lnTo>
+                  <a:pt x="2053389" y="2743201"/>
+                </a:lnTo>
+                <a:lnTo>
+                  <a:pt x="2038722" y="2743201"/>
+                </a:lnTo>
+                <a:lnTo>
+                  <a:pt x="2024055" y="2743201"/>
+                </a:lnTo>
+                <a:lnTo>
+                  <a:pt x="2009388" y="2743201"/>
+                </a:lnTo>
+                <a:lnTo>
+                  <a:pt x="1994721" y="2743201"/>
+                </a:lnTo>
+                <a:lnTo>
+                  <a:pt x="1980054" y="2743201"/>
+                </a:lnTo>
+                <a:lnTo>
+                  <a:pt x="1965387" y="2743201"/>
+                </a:lnTo>
+                <a:lnTo>
+                  <a:pt x="1950720" y="2743201"/>
+                </a:lnTo>
+                <a:lnTo>
+                  <a:pt x="1936052" y="2743201"/>
+                </a:lnTo>
+                <a:lnTo>
+                  <a:pt x="1921385" y="2743201"/>
+                </a:lnTo>
+                <a:lnTo>
+                  <a:pt x="1906718" y="2743201"/>
+                </a:lnTo>
+                <a:lnTo>
+                  <a:pt x="1892051" y="2743201"/>
+                </a:lnTo>
+                <a:lnTo>
+                  <a:pt x="1877384" y="2743201"/>
+                </a:lnTo>
+                <a:lnTo>
+                  <a:pt x="1862717" y="2743201"/>
+                </a:lnTo>
+                <a:lnTo>
+                  <a:pt x="1848050" y="2743201"/>
+                </a:lnTo>
+                <a:lnTo>
+                  <a:pt x="1833383" y="2743201"/>
+                </a:lnTo>
+                <a:lnTo>
+                  <a:pt x="1818716" y="2743201"/>
+                </a:lnTo>
+                <a:lnTo>
+                  <a:pt x="1804049" y="2743201"/>
+                </a:lnTo>
+                <a:lnTo>
+                  <a:pt x="1789382" y="2743201"/>
+                </a:lnTo>
+                <a:lnTo>
+                  <a:pt x="1774715" y="2743201"/>
+                </a:lnTo>
+                <a:lnTo>
+                  <a:pt x="1760048" y="2743201"/>
+                </a:lnTo>
+                <a:lnTo>
+                  <a:pt x="1745381" y="2743201"/>
+                </a:lnTo>
+                <a:lnTo>
+                  <a:pt x="1730713" y="2743201"/>
+                </a:lnTo>
+                <a:lnTo>
+                  <a:pt x="1716046" y="2743201"/>
+                </a:lnTo>
+                <a:lnTo>
+                  <a:pt x="1701379" y="2743201"/>
+                </a:lnTo>
+                <a:lnTo>
+                  <a:pt x="1686712" y="2743201"/>
+                </a:lnTo>
+                <a:lnTo>
+                  <a:pt x="1672045" y="2743201"/>
+                </a:lnTo>
+                <a:lnTo>
+                  <a:pt x="1657378" y="2743201"/>
+                </a:lnTo>
+                <a:lnTo>
+                  <a:pt x="1642711" y="2743201"/>
+                </a:lnTo>
+                <a:lnTo>
+                  <a:pt x="1628044" y="2743201"/>
+                </a:lnTo>
+                <a:lnTo>
+                  <a:pt x="1613377" y="2743201"/>
+                </a:lnTo>
+                <a:lnTo>
+                  <a:pt x="1598710" y="2743201"/>
+                </a:lnTo>
+                <a:lnTo>
+                  <a:pt x="1584043" y="2743201"/>
+                </a:lnTo>
+                <a:lnTo>
+                  <a:pt x="1569376" y="2743201"/>
+                </a:lnTo>
+                <a:lnTo>
+                  <a:pt x="1554709" y="2743201"/>
+                </a:lnTo>
+                <a:lnTo>
+                  <a:pt x="1540042" y="2743201"/>
+                </a:lnTo>
+                <a:lnTo>
+                  <a:pt x="1525375" y="2743201"/>
+                </a:lnTo>
+                <a:lnTo>
+                  <a:pt x="1510707" y="2743201"/>
+                </a:lnTo>
+                <a:lnTo>
+                  <a:pt x="1496040" y="2743201"/>
+                </a:lnTo>
+                <a:lnTo>
+                  <a:pt x="1481373" y="2743201"/>
+                </a:lnTo>
+                <a:lnTo>
+                  <a:pt x="1466706" y="2743201"/>
+                </a:lnTo>
+                <a:lnTo>
+                  <a:pt x="1452039" y="2743201"/>
+                </a:lnTo>
+                <a:lnTo>
+                  <a:pt x="1437372" y="2743201"/>
+                </a:lnTo>
+                <a:lnTo>
+                  <a:pt x="1422705" y="2743201"/>
+                </a:lnTo>
+                <a:lnTo>
+                  <a:pt x="1408038" y="2743201"/>
+                </a:lnTo>
+                <a:lnTo>
+                  <a:pt x="1393371" y="2743201"/>
+                </a:lnTo>
+                <a:lnTo>
+                  <a:pt x="1378704" y="2743201"/>
+                </a:lnTo>
+                <a:lnTo>
+                  <a:pt x="1364037" y="2743201"/>
+                </a:lnTo>
+                <a:lnTo>
+                  <a:pt x="1349370" y="2743201"/>
+                </a:lnTo>
+                <a:lnTo>
+                  <a:pt x="1334703" y="2743201"/>
+                </a:lnTo>
+                <a:lnTo>
+                  <a:pt x="1320036" y="2743201"/>
+                </a:lnTo>
+                <a:lnTo>
+                  <a:pt x="1305369" y="2743201"/>
+                </a:lnTo>
+                <a:lnTo>
+                  <a:pt x="1290701" y="2743201"/>
+                </a:lnTo>
+                <a:lnTo>
+                  <a:pt x="1276034" y="2743201"/>
+                </a:lnTo>
+                <a:lnTo>
+                  <a:pt x="1261367" y="2743201"/>
+                </a:lnTo>
+                <a:lnTo>
+                  <a:pt x="1246700" y="2743201"/>
+                </a:lnTo>
+                <a:lnTo>
+                  <a:pt x="1232033" y="2743201"/>
+                </a:lnTo>
+                <a:lnTo>
+                  <a:pt x="1217366" y="2743201"/>
+                </a:lnTo>
+                <a:lnTo>
+                  <a:pt x="1202699" y="2743201"/>
+                </a:lnTo>
+                <a:lnTo>
+                  <a:pt x="1188032" y="2743201"/>
+                </a:lnTo>
+                <a:lnTo>
+                  <a:pt x="1173365" y="2743201"/>
+                </a:lnTo>
+                <a:lnTo>
+                  <a:pt x="1158698" y="2743201"/>
+                </a:lnTo>
+                <a:lnTo>
+                  <a:pt x="1144031" y="2743201"/>
+                </a:lnTo>
+                <a:lnTo>
+                  <a:pt x="1129364" y="2743201"/>
+                </a:lnTo>
+                <a:lnTo>
+                  <a:pt x="1114697" y="2743201"/>
+                </a:lnTo>
+                <a:lnTo>
+                  <a:pt x="1100030" y="2743201"/>
+                </a:lnTo>
+                <a:lnTo>
+                  <a:pt x="1085363" y="2743201"/>
+                </a:lnTo>
+                <a:lnTo>
+                  <a:pt x="1070695" y="2743201"/>
+                </a:lnTo>
+                <a:lnTo>
+                  <a:pt x="1056028" y="2743201"/>
+                </a:lnTo>
+                <a:lnTo>
+                  <a:pt x="1041361" y="2743201"/>
+                </a:lnTo>
+                <a:lnTo>
+                  <a:pt x="1026694" y="2743201"/>
+                </a:lnTo>
+                <a:lnTo>
+                  <a:pt x="1012027" y="2743201"/>
+                </a:lnTo>
+                <a:lnTo>
+                  <a:pt x="997360" y="2743201"/>
+                </a:lnTo>
+                <a:lnTo>
+                  <a:pt x="982693" y="2743201"/>
+                </a:lnTo>
+                <a:lnTo>
+                  <a:pt x="968026" y="2743201"/>
+                </a:lnTo>
+                <a:lnTo>
+                  <a:pt x="953359" y="2743201"/>
+                </a:lnTo>
+                <a:lnTo>
+                  <a:pt x="938692" y="2743201"/>
+                </a:lnTo>
+                <a:lnTo>
+                  <a:pt x="924025" y="2743201"/>
+                </a:lnTo>
+                <a:lnTo>
+                  <a:pt x="909358" y="2743201"/>
+                </a:lnTo>
+                <a:lnTo>
+                  <a:pt x="894691" y="2743201"/>
+                </a:lnTo>
+                <a:lnTo>
+                  <a:pt x="880024" y="2743201"/>
+                </a:lnTo>
+                <a:lnTo>
+                  <a:pt x="865356" y="2743201"/>
+                </a:lnTo>
+                <a:lnTo>
+                  <a:pt x="850689" y="2743201"/>
+                </a:lnTo>
+                <a:lnTo>
+                  <a:pt x="836022" y="2743201"/>
+                </a:lnTo>
+                <a:lnTo>
+                  <a:pt x="821355" y="2743201"/>
+                </a:lnTo>
+                <a:lnTo>
+                  <a:pt x="806688" y="2743201"/>
+                </a:lnTo>
+                <a:lnTo>
+                  <a:pt x="792021" y="2743201"/>
+                </a:lnTo>
+                <a:lnTo>
+                  <a:pt x="777354" y="2743201"/>
+                </a:lnTo>
+                <a:lnTo>
+                  <a:pt x="762687" y="2743201"/>
+                </a:lnTo>
+                <a:lnTo>
+                  <a:pt x="748020" y="2743201"/>
+                </a:lnTo>
+                <a:lnTo>
+                  <a:pt x="733353" y="2743201"/>
+                </a:lnTo>
+                <a:lnTo>
+                  <a:pt x="718686" y="2743201"/>
+                </a:lnTo>
+                <a:lnTo>
+                  <a:pt x="704019" y="2743201"/>
+                </a:lnTo>
+                <a:lnTo>
+                  <a:pt x="689352" y="2743201"/>
+                </a:lnTo>
+                <a:lnTo>
+                  <a:pt x="674685" y="2743201"/>
+                </a:lnTo>
+                <a:lnTo>
+                  <a:pt x="660018" y="2743201"/>
+                </a:lnTo>
+                <a:lnTo>
+                  <a:pt x="645350" y="2743201"/>
+                </a:lnTo>
+                <a:lnTo>
+                  <a:pt x="630683" y="2743201"/>
+                </a:lnTo>
+                <a:lnTo>
+                  <a:pt x="616016" y="2743201"/>
+                </a:lnTo>
+                <a:lnTo>
+                  <a:pt x="601349" y="2743201"/>
+                </a:lnTo>
+                <a:lnTo>
+                  <a:pt x="586682" y="2743201"/>
+                </a:lnTo>
+                <a:lnTo>
+                  <a:pt x="572015" y="2743201"/>
+                </a:lnTo>
+                <a:lnTo>
+                  <a:pt x="557348" y="2743201"/>
+                </a:lnTo>
+                <a:lnTo>
+                  <a:pt x="542681" y="2743201"/>
+                </a:lnTo>
+                <a:lnTo>
+                  <a:pt x="528014" y="2743201"/>
+                </a:lnTo>
+                <a:lnTo>
+                  <a:pt x="513347" y="2743201"/>
+                </a:lnTo>
+                <a:lnTo>
+                  <a:pt x="498680" y="2743201"/>
+                </a:lnTo>
+                <a:lnTo>
+                  <a:pt x="484013" y="2743201"/>
+                </a:lnTo>
+                <a:lnTo>
+                  <a:pt x="469346" y="2743201"/>
+                </a:lnTo>
+                <a:lnTo>
+                  <a:pt x="454679" y="2743201"/>
+                </a:lnTo>
+                <a:lnTo>
+                  <a:pt x="440012" y="2743201"/>
+                </a:lnTo>
+                <a:lnTo>
+                  <a:pt x="425344" y="2743201"/>
+                </a:lnTo>
+                <a:lnTo>
+                  <a:pt x="410677" y="2743201"/>
+                </a:lnTo>
+                <a:lnTo>
+                  <a:pt x="396010" y="2743201"/>
+                </a:lnTo>
+                <a:lnTo>
+                  <a:pt x="381343" y="2743201"/>
+                </a:lnTo>
+                <a:lnTo>
+                  <a:pt x="366676" y="2743201"/>
+                </a:lnTo>
+                <a:lnTo>
+                  <a:pt x="352009" y="2743201"/>
+                </a:lnTo>
+                <a:lnTo>
+                  <a:pt x="337342" y="2743201"/>
+                </a:lnTo>
+                <a:lnTo>
+                  <a:pt x="322675" y="2743201"/>
+                </a:lnTo>
+                <a:lnTo>
+                  <a:pt x="308008" y="2743201"/>
+                </a:lnTo>
+                <a:lnTo>
+                  <a:pt x="293341" y="2743201"/>
+                </a:lnTo>
+                <a:lnTo>
+                  <a:pt x="278674" y="2743201"/>
+                </a:lnTo>
+                <a:lnTo>
+                  <a:pt x="264007" y="2743201"/>
+                </a:lnTo>
+                <a:lnTo>
+                  <a:pt x="249340" y="2743201"/>
+                </a:lnTo>
+                <a:lnTo>
+                  <a:pt x="234673" y="2743201"/>
+                </a:lnTo>
+                <a:lnTo>
+                  <a:pt x="220006" y="2743201"/>
+                </a:lnTo>
+                <a:lnTo>
+                  <a:pt x="205338" y="2743201"/>
+                </a:lnTo>
+                <a:lnTo>
+                  <a:pt x="190671" y="2743201"/>
+                </a:lnTo>
+                <a:lnTo>
+                  <a:pt x="176004" y="2743201"/>
+                </a:lnTo>
+                <a:lnTo>
+                  <a:pt x="161337" y="2743201"/>
+                </a:lnTo>
+                <a:lnTo>
+                  <a:pt x="146670" y="2743201"/>
+                </a:lnTo>
+                <a:lnTo>
+                  <a:pt x="132003" y="2743201"/>
+                </a:lnTo>
+                <a:lnTo>
+                  <a:pt x="117336" y="2743201"/>
+                </a:lnTo>
+                <a:lnTo>
+                  <a:pt x="102669" y="2743201"/>
+                </a:lnTo>
+                <a:lnTo>
+                  <a:pt x="88002" y="2743201"/>
+                </a:lnTo>
+                <a:lnTo>
+                  <a:pt x="73335" y="2743201"/>
+                </a:lnTo>
+                <a:lnTo>
+                  <a:pt x="58668" y="2743201"/>
+                </a:lnTo>
+                <a:lnTo>
+                  <a:pt x="44001" y="2743201"/>
+                </a:lnTo>
+                <a:lnTo>
+                  <a:pt x="29334" y="2743201"/>
+                </a:lnTo>
+                <a:lnTo>
+                  <a:pt x="14667" y="2743201"/>
+                </a:lnTo>
+                <a:lnTo>
+                  <a:pt x="0" y="2743201"/>
+                </a:lnTo>
+                <a:close/>
+              </a:path>
+            </a:pathLst>
+          </a:custGeom>
+          <a:solidFill>
+            <a:srgbClr val="8EDBD4">
+              <a:alpha val="25000"/>
+            </a:srgbClr>
+          </a:solidFill>
+          <a:ln w="10160">
+            <a:solidFill>
+              <a:srgbClr val="8EDBD4">
+                <a:alpha val="25000"/>
+              </a:srgbClr>
+            </a:solidFill>
+          </a:ln>
+          <a:effectLst/>
+        </p:spPr>
+        <p:txBody>
+          <a:bodyPr rtlCol="0" anchor="ctr"/>
+          <a:lstStyle/>
+          <a:p>
+            <a:pPr algn="ctr"/>
+          </a:p>
+        </p:txBody>
+      </p:sp>
+      <p:sp>
+        <p:nvSpPr>
+          <p:cNvPr id="30" name="C4-E08 polygon 28" descr="sci-ppt:o028"/>
+          <p:cNvSpPr/>
+          <p:nvPr/>
+        </p:nvSpPr>
+        <p:spPr>
+          <a:xfrm>
+            <a:off x="914400" y="1920239"/>
+            <a:ext cx="5852160" cy="2743201"/>
+          </a:xfrm>
+          <a:custGeom>
+            <a:avLst/>
+            <a:gdLst/>
+            <a:ahLst/>
+            <a:cxnLst/>
+            <a:rect l="l" t="t" r="r" b="b"/>
+            <a:pathLst>
+              <a:path w="5852160" h="2743201">
+                <a:moveTo>
+                  <a:pt x="0" y="0"/>
+                </a:moveTo>
+                <a:lnTo>
+                  <a:pt x="29334" y="0"/>
+                </a:lnTo>
+                <a:lnTo>
+                  <a:pt x="58668" y="0"/>
+                </a:lnTo>
+                <a:lnTo>
+                  <a:pt x="88002" y="0"/>
+                </a:lnTo>
+                <a:lnTo>
+                  <a:pt x="117336" y="0"/>
+                </a:lnTo>
+                <a:lnTo>
+                  <a:pt x="146670" y="0"/>
+                </a:lnTo>
+                <a:lnTo>
+                  <a:pt x="176004" y="0"/>
+                </a:lnTo>
+                <a:lnTo>
+                  <a:pt x="205338" y="0"/>
+                </a:lnTo>
+                <a:lnTo>
+                  <a:pt x="234673" y="0"/>
+                </a:lnTo>
+                <a:lnTo>
+                  <a:pt x="264007" y="0"/>
+                </a:lnTo>
+                <a:lnTo>
+                  <a:pt x="293341" y="0"/>
+                </a:lnTo>
+                <a:lnTo>
+                  <a:pt x="322675" y="0"/>
+                </a:lnTo>
+                <a:lnTo>
+                  <a:pt x="352009" y="0"/>
+                </a:lnTo>
+                <a:lnTo>
+                  <a:pt x="381343" y="0"/>
+                </a:lnTo>
+                <a:lnTo>
+                  <a:pt x="410677" y="0"/>
+                </a:lnTo>
+                <a:lnTo>
+                  <a:pt x="440012" y="0"/>
+                </a:lnTo>
+                <a:lnTo>
+                  <a:pt x="469346" y="0"/>
+                </a:lnTo>
+                <a:lnTo>
+                  <a:pt x="498680" y="0"/>
+                </a:lnTo>
+                <a:lnTo>
+                  <a:pt x="528014" y="0"/>
+                </a:lnTo>
+                <a:lnTo>
+                  <a:pt x="557348" y="0"/>
+                </a:lnTo>
+                <a:lnTo>
+                  <a:pt x="586682" y="0"/>
+                </a:lnTo>
+                <a:lnTo>
+                  <a:pt x="616016" y="0"/>
+                </a:lnTo>
+                <a:lnTo>
+                  <a:pt x="645350" y="0"/>
+                </a:lnTo>
+                <a:lnTo>
+                  <a:pt x="674685" y="0"/>
+                </a:lnTo>
+                <a:lnTo>
+                  <a:pt x="704019" y="0"/>
+                </a:lnTo>
+                <a:lnTo>
+                  <a:pt x="733353" y="0"/>
+                </a:lnTo>
+                <a:lnTo>
+                  <a:pt x="762687" y="0"/>
+                </a:lnTo>
+                <a:lnTo>
+                  <a:pt x="792021" y="0"/>
+                </a:lnTo>
+                <a:lnTo>
+                  <a:pt x="821355" y="0"/>
+                </a:lnTo>
+                <a:lnTo>
+                  <a:pt x="850689" y="0"/>
+                </a:lnTo>
+                <a:lnTo>
+                  <a:pt x="880024" y="0"/>
+                </a:lnTo>
+                <a:lnTo>
+                  <a:pt x="909358" y="0"/>
+                </a:lnTo>
+                <a:lnTo>
+                  <a:pt x="938692" y="0"/>
+                </a:lnTo>
+                <a:lnTo>
+                  <a:pt x="968026" y="0"/>
+                </a:lnTo>
+                <a:lnTo>
+                  <a:pt x="997360" y="0"/>
+                </a:lnTo>
+                <a:lnTo>
+                  <a:pt x="1026694" y="0"/>
+                </a:lnTo>
+                <a:lnTo>
+                  <a:pt x="1056028" y="0"/>
+                </a:lnTo>
+                <a:lnTo>
+                  <a:pt x="1085363" y="0"/>
+                </a:lnTo>
+                <a:lnTo>
+                  <a:pt x="1114697" y="0"/>
+                </a:lnTo>
+                <a:lnTo>
+                  <a:pt x="1144031" y="0"/>
+                </a:lnTo>
+                <a:lnTo>
+                  <a:pt x="1173365" y="0"/>
+                </a:lnTo>
+                <a:lnTo>
+                  <a:pt x="1202699" y="0"/>
+                </a:lnTo>
+                <a:lnTo>
+                  <a:pt x="1232033" y="0"/>
+                </a:lnTo>
+                <a:lnTo>
+                  <a:pt x="1261367" y="0"/>
+                </a:lnTo>
+                <a:lnTo>
+                  <a:pt x="1290701" y="0"/>
+                </a:lnTo>
+                <a:lnTo>
+                  <a:pt x="1320036" y="0"/>
+                </a:lnTo>
+                <a:lnTo>
+                  <a:pt x="1349370" y="0"/>
+                </a:lnTo>
+                <a:lnTo>
+                  <a:pt x="1378704" y="0"/>
+                </a:lnTo>
+                <a:lnTo>
+                  <a:pt x="1408038" y="0"/>
+                </a:lnTo>
+                <a:lnTo>
+                  <a:pt x="1437372" y="0"/>
+                </a:lnTo>
+                <a:lnTo>
+                  <a:pt x="1466706" y="0"/>
+                </a:lnTo>
+                <a:lnTo>
+                  <a:pt x="1496040" y="0"/>
+                </a:lnTo>
+                <a:lnTo>
+                  <a:pt x="1525375" y="0"/>
+                </a:lnTo>
+                <a:lnTo>
+                  <a:pt x="1554709" y="0"/>
+                </a:lnTo>
+                <a:lnTo>
+                  <a:pt x="1584043" y="0"/>
+                </a:lnTo>
+                <a:lnTo>
+                  <a:pt x="1613377" y="0"/>
+                </a:lnTo>
+                <a:lnTo>
+                  <a:pt x="1642711" y="0"/>
+                </a:lnTo>
+                <a:lnTo>
+                  <a:pt x="1672045" y="0"/>
+                </a:lnTo>
+                <a:lnTo>
+                  <a:pt x="1701379" y="0"/>
+                </a:lnTo>
+                <a:lnTo>
+                  <a:pt x="1730713" y="0"/>
+                </a:lnTo>
+                <a:lnTo>
+                  <a:pt x="1760048" y="0"/>
+                </a:lnTo>
+                <a:lnTo>
+                  <a:pt x="1789382" y="0"/>
+                </a:lnTo>
+                <a:lnTo>
+                  <a:pt x="1818716" y="0"/>
+                </a:lnTo>
+                <a:lnTo>
+                  <a:pt x="1848050" y="0"/>
+                </a:lnTo>
+                <a:lnTo>
+                  <a:pt x="1877384" y="0"/>
+                </a:lnTo>
+                <a:lnTo>
+                  <a:pt x="1906718" y="0"/>
+                </a:lnTo>
+                <a:lnTo>
+                  <a:pt x="1936052" y="0"/>
+                </a:lnTo>
+                <a:lnTo>
+                  <a:pt x="1965387" y="0"/>
+                </a:lnTo>
+                <a:lnTo>
+                  <a:pt x="1994721" y="0"/>
+                </a:lnTo>
+                <a:lnTo>
+                  <a:pt x="2024055" y="0"/>
+                </a:lnTo>
+                <a:lnTo>
+                  <a:pt x="2053389" y="0"/>
+                </a:lnTo>
+                <a:lnTo>
+                  <a:pt x="2082723" y="0"/>
+                </a:lnTo>
+                <a:lnTo>
+                  <a:pt x="2112057" y="0"/>
+                </a:lnTo>
+                <a:lnTo>
+                  <a:pt x="2141391" y="0"/>
+                </a:lnTo>
+                <a:lnTo>
+                  <a:pt x="2170726" y="0"/>
+                </a:lnTo>
+                <a:lnTo>
+                  <a:pt x="2200060" y="0"/>
+                </a:lnTo>
+                <a:lnTo>
+                  <a:pt x="2229394" y="0"/>
+                </a:lnTo>
+                <a:lnTo>
+                  <a:pt x="2258728" y="0"/>
+                </a:lnTo>
+                <a:lnTo>
+                  <a:pt x="2288062" y="0"/>
+                </a:lnTo>
+                <a:lnTo>
+                  <a:pt x="2317396" y="0"/>
+                </a:lnTo>
+                <a:lnTo>
+                  <a:pt x="2346730" y="0"/>
+                </a:lnTo>
+                <a:lnTo>
+                  <a:pt x="2376064" y="0"/>
+                </a:lnTo>
+                <a:lnTo>
+                  <a:pt x="2405399" y="0"/>
+                </a:lnTo>
+                <a:lnTo>
+                  <a:pt x="2434733" y="0"/>
+                </a:lnTo>
+                <a:lnTo>
+                  <a:pt x="2464067" y="0"/>
+                </a:lnTo>
+                <a:lnTo>
+                  <a:pt x="2493401" y="0"/>
+                </a:lnTo>
+                <a:lnTo>
+                  <a:pt x="2522735" y="0"/>
+                </a:lnTo>
+                <a:lnTo>
+                  <a:pt x="2552069" y="0"/>
+                </a:lnTo>
+                <a:lnTo>
+                  <a:pt x="2581403" y="0"/>
+                </a:lnTo>
+                <a:lnTo>
+                  <a:pt x="2610738" y="0"/>
+                </a:lnTo>
+                <a:lnTo>
+                  <a:pt x="2640072" y="0"/>
+                </a:lnTo>
+                <a:lnTo>
+                  <a:pt x="2669406" y="0"/>
+                </a:lnTo>
+                <a:lnTo>
+                  <a:pt x="2698740" y="0"/>
+                </a:lnTo>
+                <a:lnTo>
+                  <a:pt x="2728074" y="0"/>
+                </a:lnTo>
+                <a:lnTo>
+                  <a:pt x="2757408" y="0"/>
+                </a:lnTo>
+                <a:lnTo>
+                  <a:pt x="2786742" y="0"/>
+                </a:lnTo>
+                <a:lnTo>
+                  <a:pt x="2816076" y="0"/>
+                </a:lnTo>
+                <a:lnTo>
+                  <a:pt x="2845411" y="0"/>
+                </a:lnTo>
+                <a:lnTo>
+                  <a:pt x="2874745" y="0"/>
+                </a:lnTo>
+                <a:lnTo>
+                  <a:pt x="2904079" y="0"/>
+                </a:lnTo>
+                <a:lnTo>
+                  <a:pt x="2933413" y="0"/>
+                </a:lnTo>
+                <a:lnTo>
+                  <a:pt x="2962747" y="0"/>
+                </a:lnTo>
+                <a:lnTo>
+                  <a:pt x="2992081" y="0"/>
+                </a:lnTo>
+                <a:lnTo>
+                  <a:pt x="3021415" y="0"/>
+                </a:lnTo>
+                <a:lnTo>
+                  <a:pt x="3050750" y="0"/>
+                </a:lnTo>
+                <a:lnTo>
+                  <a:pt x="3080084" y="0"/>
+                </a:lnTo>
+                <a:lnTo>
+                  <a:pt x="3109418" y="0"/>
+                </a:lnTo>
+                <a:lnTo>
+                  <a:pt x="3138752" y="0"/>
+                </a:lnTo>
+                <a:lnTo>
+                  <a:pt x="3168086" y="0"/>
+                </a:lnTo>
+                <a:lnTo>
+                  <a:pt x="3197420" y="0"/>
+                </a:lnTo>
+                <a:lnTo>
+                  <a:pt x="3226754" y="0"/>
+                </a:lnTo>
+                <a:lnTo>
+                  <a:pt x="3256089" y="0"/>
+                </a:lnTo>
+                <a:lnTo>
+                  <a:pt x="3285423" y="0"/>
+                </a:lnTo>
+                <a:lnTo>
+                  <a:pt x="3314757" y="0"/>
+                </a:lnTo>
+                <a:lnTo>
+                  <a:pt x="3344091" y="0"/>
+                </a:lnTo>
+                <a:lnTo>
+                  <a:pt x="3373425" y="0"/>
+                </a:lnTo>
+                <a:lnTo>
+                  <a:pt x="3402759" y="0"/>
+                </a:lnTo>
+                <a:lnTo>
+                  <a:pt x="3432093" y="0"/>
+                </a:lnTo>
+                <a:lnTo>
+                  <a:pt x="3461427" y="0"/>
+                </a:lnTo>
+                <a:lnTo>
+                  <a:pt x="3490762" y="0"/>
+                </a:lnTo>
+                <a:lnTo>
+                  <a:pt x="3520096" y="0"/>
+                </a:lnTo>
+                <a:lnTo>
+                  <a:pt x="3549430" y="0"/>
+                </a:lnTo>
+                <a:lnTo>
+                  <a:pt x="3578764" y="0"/>
+                </a:lnTo>
+                <a:lnTo>
+                  <a:pt x="3608098" y="0"/>
+                </a:lnTo>
+                <a:lnTo>
+                  <a:pt x="3637432" y="0"/>
+                </a:lnTo>
+                <a:lnTo>
+                  <a:pt x="3666766" y="0"/>
+                </a:lnTo>
+                <a:lnTo>
+                  <a:pt x="3696101" y="0"/>
+                </a:lnTo>
+                <a:lnTo>
+                  <a:pt x="3725435" y="0"/>
+                </a:lnTo>
+                <a:lnTo>
+                  <a:pt x="3754769" y="0"/>
+                </a:lnTo>
+                <a:lnTo>
+                  <a:pt x="3784103" y="0"/>
+                </a:lnTo>
+                <a:lnTo>
+                  <a:pt x="3813437" y="0"/>
+                </a:lnTo>
+                <a:lnTo>
+                  <a:pt x="3842771" y="0"/>
+                </a:lnTo>
+                <a:lnTo>
+                  <a:pt x="3872105" y="0"/>
+                </a:lnTo>
+                <a:lnTo>
+                  <a:pt x="3901440" y="0"/>
+                </a:lnTo>
+                <a:lnTo>
+                  <a:pt x="3930774" y="0"/>
+                </a:lnTo>
+                <a:lnTo>
+                  <a:pt x="3960108" y="0"/>
+                </a:lnTo>
+                <a:lnTo>
+                  <a:pt x="3989442" y="0"/>
+                </a:lnTo>
+                <a:lnTo>
+                  <a:pt x="4018776" y="0"/>
+                </a:lnTo>
+                <a:lnTo>
+                  <a:pt x="4048110" y="0"/>
+                </a:lnTo>
+                <a:lnTo>
+                  <a:pt x="4077444" y="0"/>
+                </a:lnTo>
+                <a:lnTo>
+                  <a:pt x="4106778" y="0"/>
+                </a:lnTo>
+                <a:lnTo>
+                  <a:pt x="4136113" y="0"/>
+                </a:lnTo>
+                <a:lnTo>
+                  <a:pt x="4165447" y="0"/>
+                </a:lnTo>
+                <a:lnTo>
+                  <a:pt x="4194781" y="0"/>
+                </a:lnTo>
+                <a:lnTo>
+                  <a:pt x="4224115" y="0"/>
+                </a:lnTo>
+                <a:lnTo>
+                  <a:pt x="4253449" y="0"/>
+                </a:lnTo>
+                <a:lnTo>
+                  <a:pt x="4282783" y="0"/>
+                </a:lnTo>
+                <a:lnTo>
+                  <a:pt x="4312117" y="0"/>
+                </a:lnTo>
+                <a:lnTo>
+                  <a:pt x="4341452" y="0"/>
+                </a:lnTo>
+                <a:lnTo>
+                  <a:pt x="4370786" y="0"/>
+                </a:lnTo>
+                <a:lnTo>
+                  <a:pt x="4400120" y="0"/>
+                </a:lnTo>
+                <a:lnTo>
+                  <a:pt x="4429454" y="0"/>
+                </a:lnTo>
+                <a:lnTo>
+                  <a:pt x="4458788" y="0"/>
+                </a:lnTo>
+                <a:lnTo>
+                  <a:pt x="4488122" y="0"/>
+                </a:lnTo>
+                <a:lnTo>
+                  <a:pt x="4517456" y="0"/>
+                </a:lnTo>
+                <a:lnTo>
+                  <a:pt x="4546790" y="0"/>
+                </a:lnTo>
+                <a:lnTo>
+                  <a:pt x="4576125" y="0"/>
+                </a:lnTo>
+                <a:lnTo>
+                  <a:pt x="4605459" y="0"/>
+                </a:lnTo>
+                <a:lnTo>
+                  <a:pt x="4634793" y="0"/>
+                </a:lnTo>
+                <a:lnTo>
+                  <a:pt x="4664127" y="0"/>
+                </a:lnTo>
+                <a:lnTo>
+                  <a:pt x="4693461" y="0"/>
+                </a:lnTo>
+                <a:lnTo>
+                  <a:pt x="4722795" y="0"/>
+                </a:lnTo>
+                <a:lnTo>
+                  <a:pt x="4752129" y="0"/>
+                </a:lnTo>
+                <a:lnTo>
+                  <a:pt x="4781464" y="0"/>
+                </a:lnTo>
+                <a:lnTo>
+                  <a:pt x="4810798" y="0"/>
+                </a:lnTo>
+                <a:lnTo>
+                  <a:pt x="4840132" y="0"/>
+                </a:lnTo>
+                <a:lnTo>
+                  <a:pt x="4869466" y="0"/>
+                </a:lnTo>
+                <a:lnTo>
+                  <a:pt x="4898800" y="0"/>
+                </a:lnTo>
+                <a:lnTo>
+                  <a:pt x="4928134" y="0"/>
+                </a:lnTo>
+                <a:lnTo>
+                  <a:pt x="4957468" y="0"/>
+                </a:lnTo>
+                <a:lnTo>
+                  <a:pt x="4986803" y="2743201"/>
+                </a:lnTo>
+                <a:lnTo>
+                  <a:pt x="5016137" y="2743201"/>
+                </a:lnTo>
+                <a:lnTo>
+                  <a:pt x="5045471" y="2743201"/>
+                </a:lnTo>
+                <a:lnTo>
+                  <a:pt x="5074805" y="2743201"/>
+                </a:lnTo>
+                <a:lnTo>
+                  <a:pt x="5104139" y="2743201"/>
+                </a:lnTo>
+                <a:lnTo>
+                  <a:pt x="5133473" y="2743201"/>
+                </a:lnTo>
+                <a:lnTo>
+                  <a:pt x="5162807" y="2743201"/>
+                </a:lnTo>
+                <a:lnTo>
+                  <a:pt x="5192141" y="2743201"/>
+                </a:lnTo>
+                <a:lnTo>
+                  <a:pt x="5221476" y="2743201"/>
+                </a:lnTo>
+                <a:lnTo>
+                  <a:pt x="5250810" y="2743201"/>
+                </a:lnTo>
+                <a:lnTo>
+                  <a:pt x="5280144" y="2743201"/>
+                </a:lnTo>
+                <a:lnTo>
+                  <a:pt x="5309478" y="2743201"/>
+                </a:lnTo>
+                <a:lnTo>
+                  <a:pt x="5338812" y="2743201"/>
+                </a:lnTo>
+                <a:lnTo>
+                  <a:pt x="5368146" y="2743201"/>
+                </a:lnTo>
+                <a:lnTo>
+                  <a:pt x="5397480" y="2743201"/>
+                </a:lnTo>
+                <a:lnTo>
+                  <a:pt x="5426815" y="2743201"/>
+                </a:lnTo>
+                <a:lnTo>
+                  <a:pt x="5456149" y="2743201"/>
+                </a:lnTo>
+                <a:lnTo>
+                  <a:pt x="5485483" y="2743201"/>
+                </a:lnTo>
+                <a:lnTo>
+                  <a:pt x="5514817" y="2743201"/>
+                </a:lnTo>
+                <a:lnTo>
+                  <a:pt x="5544151" y="2743201"/>
+                </a:lnTo>
+                <a:lnTo>
+                  <a:pt x="5573485" y="2743201"/>
+                </a:lnTo>
+                <a:lnTo>
+                  <a:pt x="5602819" y="2743201"/>
+                </a:lnTo>
+                <a:lnTo>
+                  <a:pt x="5632153" y="2743201"/>
+                </a:lnTo>
+                <a:lnTo>
+                  <a:pt x="5661488" y="2743201"/>
+                </a:lnTo>
+                <a:lnTo>
+                  <a:pt x="5690822" y="2743201"/>
+                </a:lnTo>
+                <a:lnTo>
+                  <a:pt x="5720156" y="2743201"/>
+                </a:lnTo>
+                <a:lnTo>
+                  <a:pt x="5749490" y="2743201"/>
+                </a:lnTo>
+                <a:lnTo>
+                  <a:pt x="5778824" y="2743201"/>
+                </a:lnTo>
+                <a:lnTo>
+                  <a:pt x="5808158" y="2743201"/>
+                </a:lnTo>
+                <a:lnTo>
+                  <a:pt x="5837492" y="2743201"/>
+                </a:lnTo>
+                <a:lnTo>
+                  <a:pt x="5852160" y="2743201"/>
+                </a:lnTo>
+              </a:path>
+            </a:pathLst>
+          </a:custGeom>
+          <a:noFill/>
+          <a:ln w="38100">
+            <a:solidFill>
+              <a:srgbClr val="8EDBD4"/>
+            </a:solidFill>
+          </a:ln>
+          <a:effectLst/>
+        </p:spPr>
+        <p:txBody>
+          <a:bodyPr rtlCol="0" anchor="ctr"/>
+          <a:lstStyle/>
+          <a:p>
+            <a:pPr algn="ctr"/>
+          </a:p>
+        </p:txBody>
+      </p:sp>
+      <p:sp>
+        <p:nvSpPr>
+          <p:cNvPr id="31" name="C4-E08 polygon 29" descr="sci-ppt:o029"/>
+          <p:cNvSpPr/>
+          <p:nvPr/>
+        </p:nvSpPr>
+        <p:spPr>
+          <a:xfrm>
+            <a:off x="914400" y="4334366"/>
+            <a:ext cx="5852160" cy="329074"/>
+          </a:xfrm>
+          <a:custGeom>
+            <a:avLst/>
+            <a:gdLst/>
+            <a:ahLst/>
+            <a:cxnLst/>
+            <a:rect l="l" t="t" r="r" b="b"/>
+            <a:pathLst>
+              <a:path w="5852160" h="329074">
+                <a:moveTo>
+                  <a:pt x="0" y="329074"/>
+                </a:moveTo>
+                <a:lnTo>
+                  <a:pt x="29334" y="329009"/>
+                </a:lnTo>
+                <a:lnTo>
+                  <a:pt x="58668" y="328819"/>
+                </a:lnTo>
+                <a:lnTo>
+                  <a:pt x="88002" y="328512"/>
+                </a:lnTo>
+                <a:lnTo>
+                  <a:pt x="117336" y="328095"/>
+                </a:lnTo>
+                <a:lnTo>
+                  <a:pt x="146670" y="327575"/>
+                </a:lnTo>
+                <a:lnTo>
+                  <a:pt x="176004" y="326956"/>
+                </a:lnTo>
+                <a:lnTo>
+                  <a:pt x="205338" y="326247"/>
+                </a:lnTo>
+                <a:lnTo>
+                  <a:pt x="234673" y="325451"/>
+                </a:lnTo>
+                <a:lnTo>
+                  <a:pt x="264007" y="324575"/>
+                </a:lnTo>
+                <a:lnTo>
+                  <a:pt x="293341" y="323623"/>
+                </a:lnTo>
+                <a:lnTo>
+                  <a:pt x="322675" y="322600"/>
+                </a:lnTo>
+                <a:lnTo>
+                  <a:pt x="352009" y="321510"/>
+                </a:lnTo>
+                <a:lnTo>
+                  <a:pt x="381343" y="320359"/>
+                </a:lnTo>
+                <a:lnTo>
+                  <a:pt x="410677" y="319150"/>
+                </a:lnTo>
+                <a:lnTo>
+                  <a:pt x="440012" y="317886"/>
+                </a:lnTo>
+                <a:lnTo>
+                  <a:pt x="469346" y="316571"/>
+                </a:lnTo>
+                <a:lnTo>
+                  <a:pt x="498680" y="315210"/>
+                </a:lnTo>
+                <a:lnTo>
+                  <a:pt x="528014" y="313804"/>
+                </a:lnTo>
+                <a:lnTo>
+                  <a:pt x="557348" y="312356"/>
+                </a:lnTo>
+                <a:lnTo>
+                  <a:pt x="586682" y="310871"/>
+                </a:lnTo>
+                <a:lnTo>
+                  <a:pt x="616016" y="309350"/>
+                </a:lnTo>
+                <a:lnTo>
+                  <a:pt x="645350" y="307796"/>
+                </a:lnTo>
+                <a:lnTo>
+                  <a:pt x="674685" y="306212"/>
+                </a:lnTo>
+                <a:lnTo>
+                  <a:pt x="704019" y="304599"/>
+                </a:lnTo>
+                <a:lnTo>
+                  <a:pt x="733353" y="302960"/>
+                </a:lnTo>
+                <a:lnTo>
+                  <a:pt x="762687" y="301296"/>
+                </a:lnTo>
+                <a:lnTo>
+                  <a:pt x="792021" y="299611"/>
+                </a:lnTo>
+                <a:lnTo>
+                  <a:pt x="821355" y="297905"/>
+                </a:lnTo>
+                <a:lnTo>
+                  <a:pt x="850689" y="296179"/>
+                </a:lnTo>
+                <a:lnTo>
+                  <a:pt x="880024" y="294437"/>
+                </a:lnTo>
+                <a:lnTo>
+                  <a:pt x="909358" y="292679"/>
+                </a:lnTo>
+                <a:lnTo>
+                  <a:pt x="938692" y="290906"/>
+                </a:lnTo>
+                <a:lnTo>
+                  <a:pt x="968026" y="289120"/>
+                </a:lnTo>
+                <a:lnTo>
+                  <a:pt x="997360" y="287322"/>
+                </a:lnTo>
+                <a:lnTo>
+                  <a:pt x="1026694" y="285513"/>
+                </a:lnTo>
+                <a:lnTo>
+                  <a:pt x="1056028" y="283695"/>
+                </a:lnTo>
+                <a:lnTo>
+                  <a:pt x="1085363" y="281868"/>
+                </a:lnTo>
+                <a:lnTo>
+                  <a:pt x="1114697" y="280033"/>
+                </a:lnTo>
+                <a:lnTo>
+                  <a:pt x="1144031" y="278192"/>
+                </a:lnTo>
+                <a:lnTo>
+                  <a:pt x="1173365" y="276344"/>
+                </a:lnTo>
+                <a:lnTo>
+                  <a:pt x="1202699" y="274491"/>
+                </a:lnTo>
+                <a:lnTo>
+                  <a:pt x="1232033" y="272633"/>
+                </a:lnTo>
+                <a:lnTo>
+                  <a:pt x="1261367" y="270772"/>
+                </a:lnTo>
+                <a:lnTo>
+                  <a:pt x="1290701" y="268907"/>
+                </a:lnTo>
+                <a:lnTo>
+                  <a:pt x="1320036" y="267040"/>
+                </a:lnTo>
+                <a:lnTo>
+                  <a:pt x="1349370" y="265171"/>
+                </a:lnTo>
+                <a:lnTo>
+                  <a:pt x="1378704" y="263299"/>
+                </a:lnTo>
+                <a:lnTo>
+                  <a:pt x="1408038" y="261427"/>
+                </a:lnTo>
+                <a:lnTo>
+                  <a:pt x="1437372" y="259554"/>
+                </a:lnTo>
+                <a:lnTo>
+                  <a:pt x="1466706" y="257681"/>
+                </a:lnTo>
+                <a:lnTo>
+                  <a:pt x="1496040" y="255808"/>
+                </a:lnTo>
+                <a:lnTo>
+                  <a:pt x="1525375" y="253935"/>
+                </a:lnTo>
+                <a:lnTo>
+                  <a:pt x="1554709" y="252063"/>
+                </a:lnTo>
+                <a:lnTo>
+                  <a:pt x="1584043" y="250191"/>
+                </a:lnTo>
+                <a:lnTo>
+                  <a:pt x="1613377" y="248321"/>
+                </a:lnTo>
+                <a:lnTo>
+                  <a:pt x="1642711" y="246453"/>
+                </a:lnTo>
+                <a:lnTo>
+                  <a:pt x="1672045" y="244586"/>
+                </a:lnTo>
+                <a:lnTo>
+                  <a:pt x="1701379" y="242721"/>
+                </a:lnTo>
+                <a:lnTo>
+                  <a:pt x="1730713" y="240859"/>
+                </a:lnTo>
+                <a:lnTo>
+                  <a:pt x="1760048" y="238998"/>
+                </a:lnTo>
+                <a:lnTo>
+                  <a:pt x="1789382" y="237140"/>
+                </a:lnTo>
+                <a:lnTo>
+                  <a:pt x="1818716" y="235285"/>
+                </a:lnTo>
+                <a:lnTo>
+                  <a:pt x="1848050" y="233432"/>
+                </a:lnTo>
+                <a:lnTo>
+                  <a:pt x="1877384" y="231582"/>
+                </a:lnTo>
+                <a:lnTo>
+                  <a:pt x="1906718" y="229735"/>
+                </a:lnTo>
+                <a:lnTo>
+                  <a:pt x="1936052" y="227891"/>
+                </a:lnTo>
+                <a:lnTo>
+                  <a:pt x="1965387" y="226050"/>
+                </a:lnTo>
+                <a:lnTo>
+                  <a:pt x="1994721" y="224212"/>
+                </a:lnTo>
+                <a:lnTo>
+                  <a:pt x="2024055" y="222377"/>
+                </a:lnTo>
+                <a:lnTo>
+                  <a:pt x="2053389" y="220545"/>
+                </a:lnTo>
+                <a:lnTo>
+                  <a:pt x="2082723" y="218717"/>
+                </a:lnTo>
+                <a:lnTo>
+                  <a:pt x="2112057" y="216891"/>
+                </a:lnTo>
+                <a:lnTo>
+                  <a:pt x="2141391" y="215069"/>
+                </a:lnTo>
+                <a:lnTo>
+                  <a:pt x="2170726" y="213251"/>
+                </a:lnTo>
+                <a:lnTo>
+                  <a:pt x="2200060" y="211435"/>
+                </a:lnTo>
+                <a:lnTo>
+                  <a:pt x="2229394" y="209623"/>
+                </a:lnTo>
+                <a:lnTo>
+                  <a:pt x="2258728" y="207814"/>
+                </a:lnTo>
+                <a:lnTo>
+                  <a:pt x="2288062" y="206009"/>
+                </a:lnTo>
+                <a:lnTo>
+                  <a:pt x="2317396" y="204207"/>
+                </a:lnTo>
+                <a:lnTo>
+                  <a:pt x="2346730" y="202408"/>
+                </a:lnTo>
+                <a:lnTo>
+                  <a:pt x="2376064" y="200612"/>
+                </a:lnTo>
+                <a:lnTo>
+                  <a:pt x="2405399" y="198819"/>
+                </a:lnTo>
+                <a:lnTo>
+                  <a:pt x="2434733" y="197030"/>
+                </a:lnTo>
+                <a:lnTo>
+                  <a:pt x="2464067" y="195244"/>
+                </a:lnTo>
+                <a:lnTo>
+                  <a:pt x="2493401" y="193461"/>
+                </a:lnTo>
+                <a:lnTo>
+                  <a:pt x="2522735" y="191681"/>
+                </a:lnTo>
+                <a:lnTo>
+                  <a:pt x="2552069" y="189904"/>
+                </a:lnTo>
+                <a:lnTo>
+                  <a:pt x="2581403" y="188130"/>
+                </a:lnTo>
+                <a:lnTo>
+                  <a:pt x="2610738" y="186359"/>
+                </a:lnTo>
+                <a:lnTo>
+                  <a:pt x="2640072" y="184591"/>
+                </a:lnTo>
+                <a:lnTo>
+                  <a:pt x="2669406" y="182825"/>
+                </a:lnTo>
+                <a:lnTo>
+                  <a:pt x="2698740" y="181063"/>
+                </a:lnTo>
+                <a:lnTo>
+                  <a:pt x="2728074" y="179304"/>
+                </a:lnTo>
+                <a:lnTo>
+                  <a:pt x="2757408" y="177547"/>
+                </a:lnTo>
+                <a:lnTo>
+                  <a:pt x="2786742" y="175793"/>
+                </a:lnTo>
+                <a:lnTo>
+                  <a:pt x="2816076" y="174041"/>
+                </a:lnTo>
+                <a:lnTo>
+                  <a:pt x="2845411" y="172292"/>
+                </a:lnTo>
+                <a:lnTo>
+                  <a:pt x="2874745" y="170546"/>
+                </a:lnTo>
+                <a:lnTo>
+                  <a:pt x="2904079" y="168802"/>
+                </a:lnTo>
+                <a:lnTo>
+                  <a:pt x="2933413" y="167061"/>
+                </a:lnTo>
+                <a:lnTo>
+                  <a:pt x="2962747" y="165322"/>
+                </a:lnTo>
+                <a:lnTo>
+                  <a:pt x="2992081" y="163586"/>
+                </a:lnTo>
+                <a:lnTo>
+                  <a:pt x="3021415" y="161851"/>
+                </a:lnTo>
+                <a:lnTo>
+                  <a:pt x="3050750" y="160119"/>
+                </a:lnTo>
+                <a:lnTo>
+                  <a:pt x="3080084" y="158390"/>
+                </a:lnTo>
+                <a:lnTo>
+                  <a:pt x="3109418" y="156662"/>
+                </a:lnTo>
+                <a:lnTo>
+                  <a:pt x="3138752" y="154937"/>
+                </a:lnTo>
+                <a:lnTo>
+                  <a:pt x="3168086" y="153213"/>
+                </a:lnTo>
+                <a:lnTo>
+                  <a:pt x="3197420" y="151492"/>
+                </a:lnTo>
+                <a:lnTo>
+                  <a:pt x="3226754" y="149772"/>
+                </a:lnTo>
+                <a:lnTo>
+                  <a:pt x="3256089" y="148055"/>
+                </a:lnTo>
+                <a:lnTo>
+                  <a:pt x="3285423" y="146340"/>
+                </a:lnTo>
+                <a:lnTo>
+                  <a:pt x="3314757" y="144626"/>
+                </a:lnTo>
+                <a:lnTo>
+                  <a:pt x="3344091" y="142914"/>
+                </a:lnTo>
+                <a:lnTo>
+                  <a:pt x="3373425" y="141204"/>
+                </a:lnTo>
+                <a:lnTo>
+                  <a:pt x="3402759" y="139495"/>
+                </a:lnTo>
+                <a:lnTo>
+                  <a:pt x="3432093" y="137789"/>
+                </a:lnTo>
+                <a:lnTo>
+                  <a:pt x="3461427" y="136084"/>
+                </a:lnTo>
+                <a:lnTo>
+                  <a:pt x="3490762" y="134380"/>
+                </a:lnTo>
+                <a:lnTo>
+                  <a:pt x="3520096" y="132678"/>
+                </a:lnTo>
+                <a:lnTo>
+                  <a:pt x="3549430" y="130978"/>
+                </a:lnTo>
+                <a:lnTo>
+                  <a:pt x="3578764" y="129279"/>
+                </a:lnTo>
+                <a:lnTo>
+                  <a:pt x="3608098" y="127581"/>
+                </a:lnTo>
+                <a:lnTo>
+                  <a:pt x="3637432" y="125885"/>
+                </a:lnTo>
+                <a:lnTo>
+                  <a:pt x="3666766" y="124190"/>
+                </a:lnTo>
+                <a:lnTo>
+                  <a:pt x="3696101" y="122497"/>
+                </a:lnTo>
+                <a:lnTo>
+                  <a:pt x="3725435" y="120805"/>
+                </a:lnTo>
+                <a:lnTo>
+                  <a:pt x="3754769" y="119114"/>
+                </a:lnTo>
+                <a:lnTo>
+                  <a:pt x="3784103" y="117424"/>
+                </a:lnTo>
+                <a:lnTo>
+                  <a:pt x="3813437" y="115736"/>
+                </a:lnTo>
+                <a:lnTo>
+                  <a:pt x="3842771" y="114048"/>
+                </a:lnTo>
+                <a:lnTo>
+                  <a:pt x="3872105" y="112362"/>
+                </a:lnTo>
+                <a:lnTo>
+                  <a:pt x="3901440" y="110677"/>
+                </a:lnTo>
+                <a:lnTo>
+                  <a:pt x="3930774" y="108993"/>
+                </a:lnTo>
+                <a:lnTo>
+                  <a:pt x="3960108" y="107310"/>
+                </a:lnTo>
+                <a:lnTo>
+                  <a:pt x="3989442" y="105628"/>
+                </a:lnTo>
+                <a:lnTo>
+                  <a:pt x="4018776" y="103947"/>
+                </a:lnTo>
+                <a:lnTo>
+                  <a:pt x="4048110" y="102267"/>
+                </a:lnTo>
+                <a:lnTo>
+                  <a:pt x="4077444" y="100588"/>
+                </a:lnTo>
+                <a:lnTo>
+                  <a:pt x="4106778" y="98910"/>
+                </a:lnTo>
+                <a:lnTo>
+                  <a:pt x="4136113" y="97232"/>
+                </a:lnTo>
+                <a:lnTo>
+                  <a:pt x="4165447" y="95556"/>
+                </a:lnTo>
+                <a:lnTo>
+                  <a:pt x="4194781" y="93880"/>
+                </a:lnTo>
+                <a:lnTo>
+                  <a:pt x="4224115" y="92205"/>
+                </a:lnTo>
+                <a:lnTo>
+                  <a:pt x="4253449" y="90531"/>
+                </a:lnTo>
+                <a:lnTo>
+                  <a:pt x="4282783" y="88857"/>
+                </a:lnTo>
+                <a:lnTo>
+                  <a:pt x="4312117" y="87185"/>
+                </a:lnTo>
+                <a:lnTo>
+                  <a:pt x="4341452" y="85513"/>
+                </a:lnTo>
+                <a:lnTo>
+                  <a:pt x="4370786" y="83842"/>
+                </a:lnTo>
+                <a:lnTo>
+                  <a:pt x="4400120" y="82171"/>
+                </a:lnTo>
+                <a:lnTo>
+                  <a:pt x="4429454" y="80501"/>
+                </a:lnTo>
+                <a:lnTo>
+                  <a:pt x="4458788" y="78832"/>
+                </a:lnTo>
+                <a:lnTo>
+                  <a:pt x="4488122" y="77163"/>
+                </a:lnTo>
+                <a:lnTo>
+                  <a:pt x="4517456" y="75495"/>
+                </a:lnTo>
+                <a:lnTo>
+                  <a:pt x="4546790" y="73828"/>
+                </a:lnTo>
+                <a:lnTo>
+                  <a:pt x="4576125" y="72161"/>
+                </a:lnTo>
+                <a:lnTo>
+                  <a:pt x="4605459" y="70494"/>
+                </a:lnTo>
+                <a:lnTo>
+                  <a:pt x="4634793" y="68828"/>
+                </a:lnTo>
+                <a:lnTo>
+                  <a:pt x="4664127" y="67163"/>
+                </a:lnTo>
+                <a:lnTo>
+                  <a:pt x="4693461" y="65498"/>
+                </a:lnTo>
+                <a:lnTo>
+                  <a:pt x="4722795" y="63834"/>
+                </a:lnTo>
+                <a:lnTo>
+                  <a:pt x="4752129" y="62170"/>
+                </a:lnTo>
+                <a:lnTo>
+                  <a:pt x="4781464" y="60506"/>
+                </a:lnTo>
+                <a:lnTo>
+                  <a:pt x="4810798" y="58843"/>
+                </a:lnTo>
+                <a:lnTo>
+                  <a:pt x="4840132" y="57180"/>
+                </a:lnTo>
+                <a:lnTo>
+                  <a:pt x="4869466" y="55518"/>
+                </a:lnTo>
+                <a:lnTo>
+                  <a:pt x="4898800" y="53856"/>
+                </a:lnTo>
+                <a:lnTo>
+                  <a:pt x="4928134" y="52195"/>
+                </a:lnTo>
+                <a:lnTo>
+                  <a:pt x="4957468" y="50534"/>
+                </a:lnTo>
+                <a:lnTo>
+                  <a:pt x="4986803" y="48873"/>
+                </a:lnTo>
+                <a:lnTo>
+                  <a:pt x="5016137" y="47213"/>
+                </a:lnTo>
+                <a:lnTo>
+                  <a:pt x="5045471" y="45553"/>
+                </a:lnTo>
+                <a:lnTo>
+                  <a:pt x="5074805" y="43893"/>
+                </a:lnTo>
+                <a:lnTo>
+                  <a:pt x="5104139" y="42233"/>
+                </a:lnTo>
+                <a:lnTo>
+                  <a:pt x="5133473" y="40574"/>
+                </a:lnTo>
+                <a:lnTo>
+                  <a:pt x="5162807" y="38916"/>
+                </a:lnTo>
+                <a:lnTo>
+                  <a:pt x="5192141" y="37257"/>
+                </a:lnTo>
+                <a:lnTo>
+                  <a:pt x="5221476" y="35599"/>
+                </a:lnTo>
+                <a:lnTo>
+                  <a:pt x="5250810" y="33941"/>
+                </a:lnTo>
+                <a:lnTo>
+                  <a:pt x="5280144" y="32283"/>
+                </a:lnTo>
+                <a:lnTo>
+                  <a:pt x="5309478" y="30626"/>
+                </a:lnTo>
+                <a:lnTo>
+                  <a:pt x="5338812" y="28969"/>
+                </a:lnTo>
+                <a:lnTo>
+                  <a:pt x="5368146" y="27312"/>
+                </a:lnTo>
+                <a:lnTo>
+                  <a:pt x="5397480" y="25655"/>
+                </a:lnTo>
+                <a:lnTo>
+                  <a:pt x="5426815" y="23998"/>
+                </a:lnTo>
+                <a:lnTo>
+                  <a:pt x="5456149" y="22342"/>
+                </a:lnTo>
+                <a:lnTo>
+                  <a:pt x="5485483" y="20686"/>
+                </a:lnTo>
+                <a:lnTo>
+                  <a:pt x="5514817" y="19030"/>
+                </a:lnTo>
+                <a:lnTo>
+                  <a:pt x="5544151" y="17374"/>
+                </a:lnTo>
+                <a:lnTo>
+                  <a:pt x="5573485" y="15719"/>
+                </a:lnTo>
+                <a:lnTo>
+                  <a:pt x="5602819" y="14064"/>
+                </a:lnTo>
+                <a:lnTo>
+                  <a:pt x="5632153" y="12408"/>
+                </a:lnTo>
+                <a:lnTo>
+                  <a:pt x="5661488" y="10753"/>
+                </a:lnTo>
+                <a:lnTo>
+                  <a:pt x="5690822" y="9099"/>
+                </a:lnTo>
+                <a:lnTo>
+                  <a:pt x="5720156" y="7444"/>
+                </a:lnTo>
+                <a:lnTo>
+                  <a:pt x="5749490" y="5789"/>
+                </a:lnTo>
+                <a:lnTo>
+                  <a:pt x="5778824" y="4135"/>
+                </a:lnTo>
+                <a:lnTo>
+                  <a:pt x="5808158" y="2481"/>
+                </a:lnTo>
+                <a:lnTo>
+                  <a:pt x="5837492" y="827"/>
+                </a:lnTo>
+                <a:lnTo>
+                  <a:pt x="5852160" y="0"/>
+                </a:lnTo>
+              </a:path>
+            </a:pathLst>
+          </a:custGeom>
+          <a:noFill/>
+          <a:ln w="38100">
+            <a:solidFill>
+              <a:srgbClr val="F2B880"/>
+            </a:solidFill>
+          </a:ln>
+          <a:effectLst/>
+        </p:spPr>
+        <p:txBody>
+          <a:bodyPr rtlCol="0" anchor="ctr"/>
+          <a:lstStyle/>
+          <a:p>
+            <a:pPr algn="ctr"/>
+          </a:p>
+        </p:txBody>
+      </p:sp>
+      <p:sp>
+        <p:nvSpPr>
+          <p:cNvPr id="32" name="C4-E08 text 30" descr="sci-ppt:o030"/>
           <p:cNvSpPr txBox="1"/>
           <p:nvPr/>
         </p:nvSpPr>
         <p:spPr>
           <a:xfrm>
-            <a:off x="9326880" y="1920240"/>
-            <a:ext cx="2468880" cy="822960"/>
+            <a:off x="1719072" y="2377439"/>
+            <a:ext cx="2926080" cy="231648"/>
           </a:xfrm>
           <a:prstGeom prst="rect">
             <a:avLst/>
@@ -5216,7 +7615,7 @@
           <a:effectLst/>
         </p:spPr>
         <p:txBody>
-          <a:bodyPr wrap="square" lIns="27432" rIns="27432" tIns="18288" bIns="18288" anchor="ctr">
+          <a:bodyPr wrap="none" lIns="18288" rIns="18288" tIns="18288" bIns="18288" anchor="t">
             <a:spAutoFit/>
           </a:bodyPr>
           <a:lstStyle/>
@@ -5227,81 +7626,27 @@
               </a:spcAft>
             </a:pPr>
             <a:r>
-              <a:rPr sz="1700" b="0" i="0">
+              <a:rPr sz="1200" b="0" i="0">
                 <a:solidFill>
                   <a:srgbClr val="8EDBD4"/>
                 </a:solidFill>
                 <a:latin typeface="Arial"/>
               </a:rPr>
-              <a:t>Inertia</a:t>
+              <a:t>J_A = ∫ p_load dt (applied)</a:t>
             </a:r>
           </a:p>
-          <a:p>
-            <a:pPr algn="l">
-              <a:spcAft>
-                <a:spcPts val="0"/>
-              </a:spcAft>
-            </a:pPr>
-            <a:r>
-              <a:rPr sz="1700" b="0" i="0">
-                <a:solidFill>
-                  <a:srgbClr val="8EDBD4"/>
-                </a:solidFill>
-                <a:latin typeface="Arial"/>
-              </a:rPr>
-              <a:t>Bending</a:t>
-            </a:r>
-          </a:p>
-          <a:p>
-            <a:pPr algn="l">
-              <a:spcAft>
-                <a:spcPts val="0"/>
-              </a:spcAft>
-            </a:pPr>
-            <a:r>
-              <a:rPr sz="1700" b="0" i="0">
-                <a:solidFill>
-                  <a:srgbClr val="8EDBD4"/>
-                </a:solidFill>
-                <a:latin typeface="Arial"/>
-              </a:rPr>
-              <a:t>Pretension</a:t>
-            </a:r>
-          </a:p>
-        </p:txBody>
-      </p:sp>
-      <p:cxnSp>
-        <p:nvCxnSpPr>
-          <p:cNvPr id="94" name="C4-E08 line 92" descr="sci-ppt:o092"/>
-          <p:cNvCxnSpPr/>
+        </p:txBody>
+      </p:sp>
+      <p:sp>
+        <p:nvSpPr>
+          <p:cNvPr id="33" name="C4-E08 text 31" descr="sci-ppt:o031"/>
+          <p:cNvSpPr txBox="1"/>
           <p:nvPr/>
-        </p:nvCxnSpPr>
+        </p:nvSpPr>
         <p:spPr>
           <a:xfrm>
-            <a:off x="274320" y="3977639"/>
-            <a:ext cx="11612880" cy="0"/>
-          </a:xfrm>
-          <a:prstGeom prst="line">
-            <a:avLst/>
-          </a:prstGeom>
-          <a:ln w="12700">
-            <a:solidFill>
-              <a:srgbClr val="405967"/>
-            </a:solidFill>
-          </a:ln>
-          <a:effectLst/>
-        </p:spPr>
-      </p:cxnSp>
-      <p:sp>
-        <p:nvSpPr>
-          <p:cNvPr id="95" name="C4-E08 text 93" descr="sci-ppt:o093"/>
-          <p:cNvSpPr txBox="1"/>
-          <p:nvPr/>
-        </p:nvSpPr>
-        <p:spPr>
-          <a:xfrm>
-            <a:off x="320040" y="4096512"/>
-            <a:ext cx="5715000" cy="246888"/>
+            <a:off x="2157984" y="3886199"/>
+            <a:ext cx="3840480" cy="223900"/>
           </a:xfrm>
           <a:prstGeom prst="rect">
             <a:avLst/>
@@ -5310,7 +7655,7 @@
           <a:effectLst/>
         </p:spPr>
         <p:txBody>
-          <a:bodyPr wrap="square" lIns="27432" rIns="27432" tIns="18288" bIns="18288" anchor="ctr">
+          <a:bodyPr wrap="none" lIns="18288" rIns="18288" tIns="18288" bIns="18288" anchor="t">
             <a:spAutoFit/>
           </a:bodyPr>
           <a:lstStyle/>
@@ -5323,25 +7668,57 @@
             <a:r>
               <a:rPr sz="1150" b="0" i="0">
                 <a:solidFill>
-                  <a:srgbClr val="B4C7D2"/>
+                  <a:srgbClr val="F2B880"/>
                 </a:solidFill>
                 <a:latin typeface="Arial"/>
               </a:rPr>
-              <a:t>• t_a → t_b — pulse interval</a:t>
+              <a:t>reactions ∫ [D_f∇⁴w − T₀∇²w + t_coh] dt</a:t>
             </a:r>
           </a:p>
         </p:txBody>
       </p:sp>
       <p:sp>
         <p:nvSpPr>
-          <p:cNvPr id="96" name="C4-E08 text 94" descr="sci-ppt:o094"/>
+          <p:cNvPr id="34" name="C4-E08 round_rect 32" descr="sci-ppt:o032"/>
+          <p:cNvSpPr/>
+          <p:nvPr/>
+        </p:nvSpPr>
+        <p:spPr>
+          <a:xfrm>
+            <a:off x="7040880" y="1371600"/>
+            <a:ext cx="4800600" cy="3291840"/>
+          </a:xfrm>
+          <a:prstGeom prst="roundRect">
+            <a:avLst/>
+          </a:prstGeom>
+          <a:solidFill>
+            <a:srgbClr val="213E4B"/>
+          </a:solidFill>
+          <a:ln w="20320">
+            <a:solidFill>
+              <a:srgbClr val="8EDBD4"/>
+            </a:solidFill>
+          </a:ln>
+          <a:effectLst/>
+        </p:spPr>
+        <p:txBody>
+          <a:bodyPr rtlCol="0" anchor="ctr"/>
+          <a:lstStyle/>
+          <a:p>
+            <a:pPr algn="ctr"/>
+          </a:p>
+        </p:txBody>
+      </p:sp>
+      <p:sp>
+        <p:nvSpPr>
+          <p:cNvPr id="35" name="C4-E08 text 33" descr="sci-ppt:o033"/>
           <p:cNvSpPr txBox="1"/>
           <p:nvPr/>
         </p:nvSpPr>
         <p:spPr>
           <a:xfrm>
-            <a:off x="6217920" y="4096512"/>
-            <a:ext cx="5715000" cy="246888"/>
+            <a:off x="7150608" y="1426464"/>
+            <a:ext cx="4581144" cy="254889"/>
           </a:xfrm>
           <a:prstGeom prst="rect">
             <a:avLst/>
@@ -5350,7 +7727,7 @@
           <a:effectLst/>
         </p:spPr>
         <p:txBody>
-          <a:bodyPr wrap="square" lIns="27432" rIns="27432" tIns="18288" bIns="18288" anchor="ctr">
+          <a:bodyPr wrap="none" lIns="18288" rIns="18288" tIns="18288" bIns="18288" anchor="t">
             <a:spAutoFit/>
           </a:bodyPr>
           <a:lstStyle/>
@@ -5361,27 +7738,27 @@
               </a:spcAft>
             </a:pPr>
             <a:r>
-              <a:rPr sz="1150" b="0" i="0">
+              <a:rPr sz="1350" b="1" i="0">
                 <a:solidFill>
-                  <a:srgbClr val="B4C7D2"/>
+                  <a:srgbClr val="8EDBD4"/>
                 </a:solidFill>
                 <a:latin typeface="Arial"/>
               </a:rPr>
-              <a:t>• p_load(t) → J_A</a:t>
+              <a:t>Exact pulse integral</a:t>
             </a:r>
           </a:p>
         </p:txBody>
       </p:sp>
       <p:sp>
         <p:nvSpPr>
-          <p:cNvPr id="97" name="C4-E08 text 95" descr="sci-ppt:o095"/>
+          <p:cNvPr id="36" name="C4-E08 text 34" descr="sci-ppt:o034"/>
           <p:cNvSpPr txBox="1"/>
           <p:nvPr/>
         </p:nvSpPr>
         <p:spPr>
           <a:xfrm>
-            <a:off x="320040" y="4329684"/>
-            <a:ext cx="5715000" cy="246888"/>
+            <a:off x="7178040" y="1874519"/>
+            <a:ext cx="4572000" cy="417576"/>
           </a:xfrm>
           <a:prstGeom prst="rect">
             <a:avLst/>
@@ -5390,7 +7767,7 @@
           <a:effectLst/>
         </p:spPr>
         <p:txBody>
-          <a:bodyPr wrap="square" lIns="27432" rIns="27432" tIns="18288" bIns="18288" anchor="ctr">
+          <a:bodyPr wrap="none" lIns="18288" rIns="18288" tIns="18288" bIns="18288" anchor="t">
             <a:spAutoFit/>
           </a:bodyPr>
           <a:lstStyle/>
@@ -5401,27 +7778,43 @@
               </a:spcAft>
             </a:pPr>
             <a:r>
-              <a:rPr sz="1150" b="0" i="0">
+              <a:rPr sz="1200" b="1" i="0">
                 <a:solidFill>
-                  <a:srgbClr val="B4C7D2"/>
+                  <a:srgbClr val="E7F0F3"/>
                 </a:solidFill>
                 <a:latin typeface="Arial"/>
               </a:rPr>
-              <a:t>• m_A → velocity change</a:t>
+              <a:t>m_A[ẇ(t_b) − ẇ(tₐ)] = J_A − ∫ [D_f∇⁴w − T₀∇²w + t_coh]</a:t>
             </a:r>
           </a:p>
-        </p:txBody>
-      </p:sp>
-      <p:sp>
-        <p:nvSpPr>
-          <p:cNvPr id="98" name="C4-E08 text 96" descr="sci-ppt:o096"/>
+          <a:p>
+            <a:pPr algn="l">
+              <a:spcAft>
+                <a:spcPts val="0"/>
+              </a:spcAft>
+            </a:pPr>
+            <a:r>
+              <a:rPr sz="1200" b="1" i="0">
+                <a:solidFill>
+                  <a:srgbClr val="E7F0F3"/>
+                </a:solidFill>
+                <a:latin typeface="Arial"/>
+              </a:rPr>
+              <a:t>dt</a:t>
+            </a:r>
+          </a:p>
+        </p:txBody>
+      </p:sp>
+      <p:sp>
+        <p:nvSpPr>
+          <p:cNvPr id="37" name="C4-E08 text 35" descr="sci-ppt:o035"/>
           <p:cNvSpPr txBox="1"/>
           <p:nvPr/>
         </p:nvSpPr>
         <p:spPr>
           <a:xfrm>
-            <a:off x="6217920" y="4329684"/>
-            <a:ext cx="5715000" cy="246888"/>
+            <a:off x="7379208" y="2834640"/>
+            <a:ext cx="4370832" cy="231648"/>
           </a:xfrm>
           <a:prstGeom prst="rect">
             <a:avLst/>
@@ -5430,7 +7823,7 @@
           <a:effectLst/>
         </p:spPr>
         <p:txBody>
-          <a:bodyPr wrap="square" lIns="27432" rIns="27432" tIns="18288" bIns="18288" anchor="ctr">
+          <a:bodyPr wrap="none" lIns="18288" rIns="18288" tIns="18288" bIns="18288" anchor="t">
             <a:spAutoFit/>
           </a:bodyPr>
           <a:lstStyle/>
@@ -5441,27 +7834,59 @@
               </a:spcAft>
             </a:pPr>
             <a:r>
-              <a:rPr sz="1150" b="0" i="0">
+              <a:rPr sz="1200" b="0" i="0">
                 <a:solidFill>
-                  <a:srgbClr val="B4C7D2"/>
+                  <a:srgbClr val="E7F0F3"/>
                 </a:solidFill>
                 <a:latin typeface="Arial"/>
               </a:rPr>
-              <a:t>• ẇ(x,t_a), ẇ(x,t_b)</a:t>
+              <a:t>Left: momentum per area gained.</a:t>
             </a:r>
           </a:p>
         </p:txBody>
       </p:sp>
       <p:sp>
         <p:nvSpPr>
-          <p:cNvPr id="99" name="C4-E08 text 97" descr="sci-ppt:o097"/>
+          <p:cNvPr id="38" name="C4-E08 ellipse 36" descr="sci-ppt:o036"/>
+          <p:cNvSpPr/>
+          <p:nvPr/>
+        </p:nvSpPr>
+        <p:spPr>
+          <a:xfrm>
+            <a:off x="7210044" y="2887980"/>
+            <a:ext cx="82296" cy="82296"/>
+          </a:xfrm>
+          <a:prstGeom prst="ellipse">
+            <a:avLst/>
+          </a:prstGeom>
+          <a:solidFill>
+            <a:srgbClr val="8EDBD4"/>
+          </a:solidFill>
+          <a:ln w="12700">
+            <a:solidFill>
+              <a:srgbClr val="8EDBD4"/>
+            </a:solidFill>
+          </a:ln>
+          <a:effectLst/>
+        </p:spPr>
+        <p:txBody>
+          <a:bodyPr rtlCol="0" anchor="ctr"/>
+          <a:lstStyle/>
+          <a:p>
+            <a:pPr algn="ctr"/>
+          </a:p>
+        </p:txBody>
+      </p:sp>
+      <p:sp>
+        <p:nvSpPr>
+          <p:cNvPr id="39" name="C4-E08 text 37" descr="sci-ppt:o037"/>
           <p:cNvSpPr txBox="1"/>
           <p:nvPr/>
         </p:nvSpPr>
         <p:spPr>
           <a:xfrm>
-            <a:off x="320040" y="4562856"/>
-            <a:ext cx="5715000" cy="246888"/>
+            <a:off x="7379208" y="3112008"/>
+            <a:ext cx="4370832" cy="231648"/>
           </a:xfrm>
           <a:prstGeom prst="rect">
             <a:avLst/>
@@ -5470,7 +7895,7 @@
           <a:effectLst/>
         </p:spPr>
         <p:txBody>
-          <a:bodyPr wrap="square" lIns="27432" rIns="27432" tIns="18288" bIns="18288" anchor="ctr">
+          <a:bodyPr wrap="none" lIns="18288" rIns="18288" tIns="18288" bIns="18288" anchor="t">
             <a:spAutoFit/>
           </a:bodyPr>
           <a:lstStyle/>
@@ -5481,27 +7906,59 @@
               </a:spcAft>
             </a:pPr>
             <a:r>
-              <a:rPr sz="1150" b="0" i="0">
+              <a:rPr sz="1200" b="0" i="0">
                 <a:solidFill>
-                  <a:srgbClr val="B4C7D2"/>
+                  <a:srgbClr val="E7F0F3"/>
                 </a:solidFill>
                 <a:latin typeface="Arial"/>
               </a:rPr>
-              <a:t>• D_f∇⁴w, −T₀∇²w, t_coh — reaction impulses</a:t>
+              <a:t>Right: applied impulse minus impulse of the reactions.</a:t>
             </a:r>
           </a:p>
         </p:txBody>
       </p:sp>
       <p:sp>
         <p:nvSpPr>
-          <p:cNvPr id="100" name="C4-E08 text 98" descr="sci-ppt:o098"/>
+          <p:cNvPr id="40" name="C4-E08 ellipse 38" descr="sci-ppt:o038"/>
+          <p:cNvSpPr/>
+          <p:nvPr/>
+        </p:nvSpPr>
+        <p:spPr>
+          <a:xfrm>
+            <a:off x="7210044" y="3165348"/>
+            <a:ext cx="82296" cy="82296"/>
+          </a:xfrm>
+          <a:prstGeom prst="ellipse">
+            <a:avLst/>
+          </a:prstGeom>
+          <a:solidFill>
+            <a:srgbClr val="8EDBD4"/>
+          </a:solidFill>
+          <a:ln w="12700">
+            <a:solidFill>
+              <a:srgbClr val="8EDBD4"/>
+            </a:solidFill>
+          </a:ln>
+          <a:effectLst/>
+        </p:spPr>
+        <p:txBody>
+          <a:bodyPr rtlCol="0" anchor="ctr"/>
+          <a:lstStyle/>
+          <a:p>
+            <a:pPr algn="ctr"/>
+          </a:p>
+        </p:txBody>
+      </p:sp>
+      <p:sp>
+        <p:nvSpPr>
+          <p:cNvPr id="41" name="C4-E08 text 39" descr="sci-ppt:o039"/>
           <p:cNvSpPr txBox="1"/>
           <p:nvPr/>
         </p:nvSpPr>
         <p:spPr>
           <a:xfrm>
-            <a:off x="320040" y="5596128"/>
-            <a:ext cx="11430000" cy="292608"/>
+            <a:off x="7379208" y="3389376"/>
+            <a:ext cx="4370832" cy="417576"/>
           </a:xfrm>
           <a:prstGeom prst="rect">
             <a:avLst/>
@@ -5510,7 +7967,7 @@
           <a:effectLst/>
         </p:spPr>
         <p:txBody>
-          <a:bodyPr wrap="square" lIns="27432" rIns="27432" tIns="18288" bIns="18288" anchor="ctr">
+          <a:bodyPr wrap="none" lIns="18288" rIns="18288" tIns="18288" bIns="18288" anchor="t">
             <a:spAutoFit/>
           </a:bodyPr>
           <a:lstStyle/>
@@ -5521,27 +7978,75 @@
               </a:spcAft>
             </a:pPr>
             <a:r>
-              <a:rPr sz="1150" b="0" i="0">
+              <a:rPr sz="1200" b="0" i="0">
                 <a:solidFill>
-                  <a:srgbClr val="8EDBD4"/>
+                  <a:srgbClr val="E7F0F3"/>
                 </a:solidFill>
                 <a:latin typeface="Arial"/>
               </a:rPr>
-              <a:t>Applied impulse and reaction impulse both enter.</a:t>
+              <a:t>Reactions are small only if the pulse is shorter than</a:t>
             </a:r>
           </a:p>
-        </p:txBody>
-      </p:sp>
-      <p:sp>
-        <p:nvSpPr>
-          <p:cNvPr id="101" name="C4-E08 text 99" descr="sci-ppt:o099"/>
+          <a:p>
+            <a:pPr algn="l">
+              <a:spcAft>
+                <a:spcPts val="0"/>
+              </a:spcAft>
+            </a:pPr>
+            <a:r>
+              <a:rPr sz="1200" b="0" i="0">
+                <a:solidFill>
+                  <a:srgbClr val="E7F0F3"/>
+                </a:solidFill>
+                <a:latin typeface="Arial"/>
+              </a:rPr>
+              <a:t>the plate response.</a:t>
+            </a:r>
+          </a:p>
+        </p:txBody>
+      </p:sp>
+      <p:sp>
+        <p:nvSpPr>
+          <p:cNvPr id="42" name="C4-E08 ellipse 40" descr="sci-ppt:o040"/>
+          <p:cNvSpPr/>
+          <p:nvPr/>
+        </p:nvSpPr>
+        <p:spPr>
+          <a:xfrm>
+            <a:off x="7210044" y="3442716"/>
+            <a:ext cx="82296" cy="82296"/>
+          </a:xfrm>
+          <a:prstGeom prst="ellipse">
+            <a:avLst/>
+          </a:prstGeom>
+          <a:solidFill>
+            <a:srgbClr val="8EDBD4"/>
+          </a:solidFill>
+          <a:ln w="12700">
+            <a:solidFill>
+              <a:srgbClr val="8EDBD4"/>
+            </a:solidFill>
+          </a:ln>
+          <a:effectLst/>
+        </p:spPr>
+        <p:txBody>
+          <a:bodyPr rtlCol="0" anchor="ctr"/>
+          <a:lstStyle/>
+          <a:p>
+            <a:pPr algn="ctr"/>
+          </a:p>
+        </p:txBody>
+      </p:sp>
+      <p:sp>
+        <p:nvSpPr>
+          <p:cNvPr id="43" name="C4-E08 text 41" descr="sci-ppt:o041"/>
           <p:cNvSpPr txBox="1"/>
           <p:nvPr/>
         </p:nvSpPr>
         <p:spPr>
           <a:xfrm>
-            <a:off x="320040" y="6473952"/>
-            <a:ext cx="11430000" cy="256032"/>
+            <a:off x="914400" y="5486400"/>
+            <a:ext cx="10972800" cy="239395"/>
           </a:xfrm>
           <a:prstGeom prst="rect">
             <a:avLst/>
@@ -5550,7 +8055,47 @@
           <a:effectLst/>
         </p:spPr>
         <p:txBody>
-          <a:bodyPr wrap="square" lIns="27432" rIns="27432" tIns="18288" bIns="18288" anchor="ctr">
+          <a:bodyPr wrap="none" lIns="18288" rIns="18288" tIns="18288" bIns="18288" anchor="t">
+            <a:spAutoFit/>
+          </a:bodyPr>
+          <a:lstStyle/>
+          <a:p>
+            <a:pPr algn="l">
+              <a:spcAft>
+                <a:spcPts val="0"/>
+              </a:spcAft>
+            </a:pPr>
+            <a:r>
+              <a:rPr sz="1250" b="0" i="0">
+                <a:solidFill>
+                  <a:srgbClr val="E7F0F3"/>
+                </a:solidFill>
+                <a:latin typeface="Arial"/>
+              </a:rPr>
+              <a:t>A free velocity jump J_A/m_A is only the upper limit: elastic and cohesive reactions subtract from it.</a:t>
+            </a:r>
+          </a:p>
+        </p:txBody>
+      </p:sp>
+      <p:sp>
+        <p:nvSpPr>
+          <p:cNvPr id="44" name="C4-E08 text 42" descr="sci-ppt:o042"/>
+          <p:cNvSpPr txBox="1"/>
+          <p:nvPr/>
+        </p:nvSpPr>
+        <p:spPr>
+          <a:xfrm>
+            <a:off x="320040" y="6510528"/>
+            <a:ext cx="11521440" cy="200660"/>
+          </a:xfrm>
+          <a:prstGeom prst="rect">
+            <a:avLst/>
+          </a:prstGeom>
+          <a:noFill/>
+          <a:effectLst/>
+        </p:spPr>
+        <p:txBody>
+          <a:bodyPr wrap="none" lIns="18288" rIns="18288" tIns="18288" bIns="18288" anchor="t">
             <a:spAutoFit/>
           </a:bodyPr>
           <a:lstStyle/>
@@ -5567,7 +8112,7 @@
                 </a:solidFill>
                 <a:latin typeface="Arial"/>
               </a:rPr>
-              <a:t>Model schematic; geometry is not to scale.</a:t>
+              <a:t>Time-integrated momentum balance of Eq. C4-E08; curves are schematic.</a:t>
             </a:r>
           </a:p>
         </p:txBody>
